--- a/files/markopoulo/sls-01-theoria.pptx
+++ b/files/markopoulo/sls-01-theoria.pptx
@@ -18,8 +18,10 @@
     <p:sldId id="263" r:id="rId9"/>
     <p:sldId id="264" r:id="rId10"/>
     <p:sldId id="265" r:id="rId11"/>
+    <p:sldId id="273" r:id="rId24"/>
     <p:sldId id="266" r:id="rId12"/>
     <p:sldId id="267" r:id="rId13"/>
+    <p:sldId id="272" r:id="rId23"/>
     <p:sldId id="268" r:id="rId14"/>
     <p:sldId id="269" r:id="rId15"/>
     <p:sldId id="270" r:id="rId16"/>
@@ -4551,7 +4553,7 @@
                 <a:ea typeface="Consolas" pitchFamily="34" charset="-122"/>
                 <a:cs typeface="Consolas" pitchFamily="34" charset="-120"/>
               </a:rPr>
-              <a:t>10  </a:t>
+              <a:t>11  </a:t>
             </a:r>
             <a:r>
               <a:rPr lang="en-US" sz="1000" kern="0" spc="140" dirty="0">
@@ -5671,7 +5673,7 @@
                 <a:ea typeface="Consolas" pitchFamily="34" charset="-122"/>
                 <a:cs typeface="Consolas" pitchFamily="34" charset="-120"/>
               </a:rPr>
-              <a:t>11  </a:t>
+              <a:t>12  </a:t>
             </a:r>
             <a:r>
               <a:rPr lang="en-US" sz="1000" kern="0" spc="140" dirty="0">
@@ -6726,7 +6728,7 @@
                 <a:ea typeface="Consolas" pitchFamily="34" charset="-122"/>
                 <a:cs typeface="Consolas" pitchFamily="34" charset="-120"/>
               </a:rPr>
-              <a:t>12  </a:t>
+              <a:t>14  </a:t>
             </a:r>
             <a:r>
               <a:rPr lang="en-US" sz="1000" kern="0" spc="140" dirty="0">
@@ -7887,7 +7889,7 @@
                 <a:ea typeface="Consolas" pitchFamily="34" charset="-122"/>
                 <a:cs typeface="Consolas" pitchFamily="34" charset="-120"/>
               </a:rPr>
-              <a:t>13  </a:t>
+              <a:t>15  </a:t>
             </a:r>
             <a:r>
               <a:rPr lang="en-US" sz="1000" kern="0" spc="140" dirty="0">
@@ -9959,7 +9961,7 @@
                 <a:ea typeface="Consolas" pitchFamily="34" charset="-122"/>
                 <a:cs typeface="Consolas" pitchFamily="34" charset="-120"/>
               </a:rPr>
-              <a:t>14  </a:t>
+              <a:t>16  </a:t>
             </a:r>
             <a:r>
               <a:rPr lang="en-US" sz="1000" kern="0" spc="140" dirty="0">
@@ -10931,7 +10933,7 @@
                 <a:ea typeface="Consolas" pitchFamily="34" charset="-122"/>
                 <a:cs typeface="Consolas" pitchFamily="34" charset="-120"/>
               </a:rPr>
-              <a:t>15  </a:t>
+              <a:t>17  </a:t>
             </a:r>
             <a:r>
               <a:rPr lang="en-US" sz="1000" kern="0" spc="140" dirty="0">
@@ -11765,6 +11767,4912 @@
               <a:t>Τρίτη 13/10: κατηγορίες ΛΣ και διεργασίες. Θα «κυνηγήσουμε» διεργασίες στη Διαχείριση εργασιών.</a:t>
             </a:r>
             <a:endParaRPr lang="en-US" sz="1200" dirty="0"/>
+          </a:p>
+        </p:txBody>
+      </p:sp>
+    </p:spTree>
+  </p:cSld>
+  <p:clrMapOvr>
+    <a:masterClrMapping/>
+  </p:clrMapOvr>
+</p:sld>
+</file>
+
+<file path=ppt/slides/slide17.xml><?xml version="1.0" encoding="utf-8"?>
+<p:sld xmlns:a="http://schemas.openxmlformats.org/drawingml/2006/main" xmlns:p="http://schemas.openxmlformats.org/presentationml/2006/main" xmlns:r="http://schemas.openxmlformats.org/officeDocument/2006/relationships">
+  <p:cSld>
+    <p:spTree>
+      <p:nvGrpSpPr>
+        <p:cNvPr id="1" name=""/>
+        <p:cNvGrpSpPr/>
+        <p:nvPr/>
+      </p:nvGrpSpPr>
+      <p:grpSpPr/>
+      <p:sp>
+        <p:nvSpPr>
+          <p:cNvPr id="101" name="Shape 101"/>
+          <p:cNvSpPr/>
+          <p:nvPr/>
+        </p:nvSpPr>
+        <p:spPr>
+          <a:xfrm>
+            <a:off x="0" y="0"/>
+            <a:ext cx="109728" cy="6858000"/>
+          </a:xfrm>
+          <a:prstGeom prst="rect">
+            <a:avLst/>
+          </a:prstGeom>
+          <a:solidFill>
+            <a:srgbClr val="2F4BD8"/>
+          </a:solidFill>
+          <a:ln w="12700">
+            <a:solidFill>
+              <a:srgbClr val="2F4BD8"/>
+            </a:solidFill>
+            <a:prstDash val="solid"/>
+          </a:ln>
+        </p:spPr>
+        <p:txBody>
+          <a:bodyPr/>
+          <a:p/>
+        </p:txBody>
+      </p:sp>
+      <p:pic>
+        <p:nvPicPr>
+          <p:cNvPr id="102" name="Picture 101" descr="image.png"/>
+          <p:cNvPicPr>
+            <a:picLocks noChangeAspect="1"/>
+          </p:cNvPicPr>
+          <p:nvPr/>
+        </p:nvPicPr>
+        <p:blipFill>
+          <a:blip r:embed="rId2"/>
+          <a:stretch>
+            <a:fillRect/>
+          </a:stretch>
+        </p:blipFill>
+        <p:spPr>
+          <a:xfrm>
+            <a:off x="9189720" y="274320"/>
+            <a:ext cx="310896" cy="310896"/>
+          </a:xfrm>
+          <a:prstGeom prst="rect">
+            <a:avLst/>
+          </a:prstGeom>
+        </p:spPr>
+      </p:pic>
+      <p:sp>
+        <p:nvSpPr>
+          <p:cNvPr id="102" name="Text 102"/>
+          <p:cNvSpPr txBox="1"/>
+          <p:nvPr/>
+        </p:nvSpPr>
+        <p:spPr>
+          <a:xfrm>
+            <a:off x="9573768" y="246888"/>
+            <a:ext cx="2468880" cy="365760"/>
+          </a:xfrm>
+          <a:prstGeom prst="rect">
+            <a:avLst/>
+          </a:prstGeom>
+          <a:noFill/>
+          <a:ln/>
+        </p:spPr>
+        <p:txBody>
+          <a:bodyPr wrap="square" lIns="0" tIns="0" rIns="0" bIns="0" rtlCol="0" anchor="ctr"/>
+          <a:lstStyle/>
+          <a:p>
+            <a:pPr indent="0" marL="0">
+              <a:buNone/>
+            </a:pPr>
+            <a:r>
+              <a:rPr lang="el-GR" sz="950" b="1" dirty="0">
+                <a:solidFill>
+                  <a:srgbClr val="4A5265"/>
+                </a:solidFill>
+                <a:latin typeface="Segoe UI" pitchFamily="34" charset="0"/>
+                <a:ea typeface="Segoe UI" pitchFamily="34" charset="-122"/>
+                <a:cs typeface="Segoe UI" pitchFamily="34" charset="-120"/>
+              </a:rPr>
+              <a:t>ΣΑΕΚ Μαρκοπούλου</a:t>
+            </a:r>
+            <a:endParaRPr lang="el-GR" sz="950" dirty="0"/>
+          </a:p>
+          <a:p>
+            <a:pPr indent="0" marL="0">
+              <a:buNone/>
+            </a:pPr>
+            <a:r>
+              <a:rPr lang="el-GR" sz="950" dirty="0">
+                <a:solidFill>
+                  <a:srgbClr val="8A91A3"/>
+                </a:solidFill>
+                <a:latin typeface="Segoe UI" pitchFamily="34" charset="0"/>
+                <a:ea typeface="Segoe UI" pitchFamily="34" charset="-122"/>
+                <a:cs typeface="Segoe UI" pitchFamily="34" charset="-120"/>
+              </a:rPr>
+              <a:t>Σύγχρονα Λειτουργικά Συστήματα</a:t>
+            </a:r>
+            <a:endParaRPr lang="el-GR" sz="950" dirty="0"/>
+          </a:p>
+        </p:txBody>
+      </p:sp>
+      <p:sp>
+        <p:nvSpPr>
+          <p:cNvPr id="103" name="Text 103"/>
+          <p:cNvSpPr txBox="1"/>
+          <p:nvPr/>
+        </p:nvSpPr>
+        <p:spPr>
+          <a:xfrm>
+            <a:off x="8503920" y="6419088"/>
+            <a:ext cx="3154680" cy="237744"/>
+          </a:xfrm>
+          <a:prstGeom prst="rect">
+            <a:avLst/>
+          </a:prstGeom>
+          <a:noFill/>
+          <a:ln/>
+        </p:spPr>
+        <p:txBody>
+          <a:bodyPr wrap="square" lIns="0" tIns="0" rIns="0" bIns="0" rtlCol="0" anchor="ctr"/>
+          <a:lstStyle/>
+          <a:p>
+            <a:pPr indent="0" marL="0" algn="r">
+              <a:buNone/>
+            </a:pPr>
+            <a:r>
+              <a:rPr lang="el-GR" sz="900" dirty="0">
+                <a:solidFill>
+                  <a:srgbClr val="8A91A3"/>
+                </a:solidFill>
+                <a:latin typeface="Consolas" pitchFamily="34" charset="0"/>
+                <a:ea typeface="Consolas" pitchFamily="34" charset="-122"/>
+                <a:cs typeface="Consolas" pitchFamily="34" charset="-120"/>
+              </a:rPr>
+              <a:t>Λαμπρόπουλος Χρήστος</a:t>
+            </a:r>
+            <a:endParaRPr lang="el-GR" sz="900" dirty="0"/>
+          </a:p>
+        </p:txBody>
+      </p:sp>
+      <p:sp>
+        <p:nvSpPr>
+          <p:cNvPr id="104" name="Text 104"/>
+          <p:cNvSpPr txBox="1"/>
+          <p:nvPr/>
+        </p:nvSpPr>
+        <p:spPr>
+          <a:xfrm>
+            <a:off x="566928" y="384048"/>
+            <a:ext cx="8412480" cy="237744"/>
+          </a:xfrm>
+          <a:prstGeom prst="rect">
+            <a:avLst/>
+          </a:prstGeom>
+          <a:noFill/>
+          <a:ln/>
+        </p:spPr>
+        <p:txBody>
+          <a:bodyPr wrap="square" lIns="0" tIns="0" rIns="0" bIns="0" rtlCol="0" anchor="ctr"/>
+          <a:lstStyle/>
+          <a:p>
+            <a:pPr indent="0" marL="0">
+              <a:buNone/>
+            </a:pPr>
+            <a:r>
+              <a:rPr lang="el-GR" sz="1000" spc="140" dirty="0">
+                <a:solidFill>
+                  <a:srgbClr val="2F4BD8"/>
+                </a:solidFill>
+                <a:latin typeface="Consolas" pitchFamily="34" charset="0"/>
+                <a:ea typeface="Consolas" pitchFamily="34" charset="-122"/>
+                <a:cs typeface="Consolas" pitchFamily="34" charset="-120"/>
+              </a:rPr>
+              <a:t xml:space="preserve">13  </a:t>
+            </a:r>
+            <a:r>
+              <a:rPr lang="el-GR" sz="1000" spc="140" dirty="0">
+                <a:solidFill>
+                  <a:srgbClr val="8A91A3"/>
+                </a:solidFill>
+                <a:latin typeface="Consolas" pitchFamily="34" charset="0"/>
+                <a:ea typeface="Consolas" pitchFamily="34" charset="-122"/>
+                <a:cs typeface="Consolas" pitchFamily="34" charset="-120"/>
+              </a:rPr>
+              <a:t>ΠΟΙΟ ΛΣ ΓΙΑ ΠΟΙΑ ΔΟΥΛΕΙΑ</a:t>
+            </a:r>
+            <a:endParaRPr lang="el-GR" sz="1000" dirty="0"/>
+          </a:p>
+        </p:txBody>
+      </p:sp>
+      <p:sp>
+        <p:nvSpPr>
+          <p:cNvPr id="105" name="Text 105"/>
+          <p:cNvSpPr txBox="1"/>
+          <p:nvPr/>
+        </p:nvSpPr>
+        <p:spPr>
+          <a:xfrm>
+            <a:off x="530352" y="658368"/>
+            <a:ext cx="8503920" cy="566928"/>
+          </a:xfrm>
+          <a:prstGeom prst="rect">
+            <a:avLst/>
+          </a:prstGeom>
+          <a:noFill/>
+          <a:ln/>
+        </p:spPr>
+        <p:txBody>
+          <a:bodyPr wrap="square" lIns="0" tIns="0" rIns="0" bIns="0" rtlCol="0" anchor="ctr"/>
+          <a:lstStyle/>
+          <a:p>
+            <a:pPr indent="0" marL="0">
+              <a:buNone/>
+            </a:pPr>
+            <a:r>
+              <a:rPr lang="el-GR" sz="3000" b="1" dirty="0">
+                <a:solidFill>
+                  <a:srgbClr val="171B26"/>
+                </a:solidFill>
+                <a:latin typeface="Segoe UI" pitchFamily="34" charset="0"/>
+                <a:ea typeface="Segoe UI" pitchFamily="34" charset="-122"/>
+                <a:cs typeface="Segoe UI" pitchFamily="34" charset="-120"/>
+              </a:rPr>
+              <a:t>Ποιο ΛΣ για ποια δουλειά;</a:t>
+            </a:r>
+            <a:endParaRPr lang="el-GR" sz="3000" dirty="0"/>
+          </a:p>
+        </p:txBody>
+      </p:sp>
+      <p:sp>
+        <p:nvSpPr>
+          <p:cNvPr id="106" name="Text 106"/>
+          <p:cNvSpPr txBox="1"/>
+          <p:nvPr/>
+        </p:nvSpPr>
+        <p:spPr>
+          <a:xfrm>
+            <a:off x="9098280" y="749808"/>
+            <a:ext cx="2331720" cy="274320"/>
+          </a:xfrm>
+          <a:prstGeom prst="rect">
+            <a:avLst/>
+          </a:prstGeom>
+          <a:noFill/>
+          <a:ln/>
+        </p:spPr>
+        <p:txBody>
+          <a:bodyPr wrap="square" lIns="0" tIns="0" rIns="0" bIns="0" rtlCol="0" anchor="ctr"/>
+          <a:lstStyle/>
+          <a:p>
+            <a:pPr indent="0" marL="0" algn="r">
+              <a:buNone/>
+            </a:pPr>
+            <a:r>
+              <a:rPr lang="el-GR" sz="1100" b="1" dirty="0">
+                <a:solidFill>
+                  <a:srgbClr val="1B6B52"/>
+                </a:solidFill>
+                <a:latin typeface="Consolas" pitchFamily="34" charset="0"/>
+                <a:ea typeface="Consolas" pitchFamily="34" charset="-122"/>
+                <a:cs typeface="Consolas" pitchFamily="34" charset="-120"/>
+              </a:rPr>
+              <a:t>ΓΙΑ ΤΟ SITE</a:t>
+            </a:r>
+            <a:endParaRPr lang="el-GR" sz="1100" dirty="0"/>
+          </a:p>
+        </p:txBody>
+      </p:sp>
+      <p:graphicFrame>
+        <p:nvGraphicFramePr>
+          <p:cNvPr id="107" name="Table 107"/>
+          <p:cNvGraphicFramePr>
+            <a:graphicFrameLocks noGrp="1"/>
+          </p:cNvGraphicFramePr>
+          <p:nvPr/>
+        </p:nvGraphicFramePr>
+        <p:xfrm>
+          <a:off x="566928" y="1463040"/>
+          <a:ext cx="10881360" cy="3182112"/>
+        </p:xfrm>
+        <a:graphic>
+          <a:graphicData uri="http://schemas.openxmlformats.org/drawingml/2006/table">
+            <a:tbl>
+              <a:tblPr/>
+              <a:tblGrid>
+                <a:gridCol w="3931920"/>
+                <a:gridCol w="1371600"/>
+                <a:gridCol w="5577840"/>
+              </a:tblGrid>
+              <a:tr h="329184">
+                <a:tc>
+                  <a:txBody>
+                    <a:bodyPr/>
+                    <a:lstStyle/>
+                    <a:p>
+                      <a:pPr indent="0" marL="0">
+                        <a:buNone/>
+                      </a:pPr>
+                      <a:r>
+                        <a:rPr lang="el-GR" sz="900" b="1" dirty="0">
+                          <a:solidFill>
+                            <a:srgbClr val="8A91A3"/>
+                          </a:solidFill>
+                          <a:latin typeface="Consolas" pitchFamily="34" charset="0"/>
+                          <a:ea typeface="Consolas" pitchFamily="34" charset="-122"/>
+                          <a:cs typeface="Consolas" pitchFamily="34" charset="-120"/>
+                        </a:rPr>
+                        <a:t>ΠΕΡΙΠΤΩΣΗ</a:t>
+                      </a:r>
+                      <a:endParaRPr lang="el-GR" sz="1150" dirty="0"/>
+                    </a:p>
+                  </a:txBody>
+                  <a:tcPr marL="91440" marR="91440" marT="45720" marB="45720" anchor="ctr">
+                    <a:lnL w="9525" cap="flat" cmpd="sng" algn="ctr">
+                      <a:solidFill>
+                        <a:srgbClr val="D3D9E4"/>
+                      </a:solidFill>
+                      <a:prstDash val="solid"/>
+                      <a:round/>
+                      <a:headEnd type="none" w="med" len="med"/>
+                      <a:tailEnd type="none" w="med" len="med"/>
+                    </a:lnL>
+                    <a:lnR w="9525" cap="flat" cmpd="sng" algn="ctr">
+                      <a:solidFill>
+                        <a:srgbClr val="D3D9E4"/>
+                      </a:solidFill>
+                      <a:prstDash val="solid"/>
+                      <a:round/>
+                      <a:headEnd type="none" w="med" len="med"/>
+                      <a:tailEnd type="none" w="med" len="med"/>
+                    </a:lnR>
+                    <a:lnT w="9525" cap="flat" cmpd="sng" algn="ctr">
+                      <a:solidFill>
+                        <a:srgbClr val="D3D9E4"/>
+                      </a:solidFill>
+                      <a:prstDash val="solid"/>
+                      <a:round/>
+                      <a:headEnd type="none" w="med" len="med"/>
+                      <a:tailEnd type="none" w="med" len="med"/>
+                    </a:lnT>
+                    <a:lnB w="9525" cap="flat" cmpd="sng" algn="ctr">
+                      <a:solidFill>
+                        <a:srgbClr val="D3D9E4"/>
+                      </a:solidFill>
+                      <a:prstDash val="solid"/>
+                      <a:round/>
+                      <a:headEnd type="none" w="med" len="med"/>
+                      <a:tailEnd type="none" w="med" len="med"/>
+                    </a:lnB>
+                    <a:solidFill>
+                      <a:srgbClr val="F1F3FA"/>
+                    </a:solidFill>
+                  </a:tcPr>
+                </a:tc>
+                <a:tc>
+                  <a:txBody>
+                    <a:bodyPr/>
+                    <a:lstStyle/>
+                    <a:p>
+                      <a:pPr indent="0" marL="0">
+                        <a:buNone/>
+                      </a:pPr>
+                      <a:r>
+                        <a:rPr lang="el-GR" sz="900" b="1" dirty="0">
+                          <a:solidFill>
+                            <a:srgbClr val="8A91A3"/>
+                          </a:solidFill>
+                          <a:latin typeface="Consolas" pitchFamily="34" charset="0"/>
+                          <a:ea typeface="Consolas" pitchFamily="34" charset="-122"/>
+                          <a:cs typeface="Consolas" pitchFamily="34" charset="-120"/>
+                        </a:rPr>
+                        <a:t>ΛΣ</a:t>
+                      </a:r>
+                      <a:endParaRPr lang="el-GR" sz="1150" dirty="0"/>
+                    </a:p>
+                  </a:txBody>
+                  <a:tcPr marL="91440" marR="91440" marT="45720" marB="45720" anchor="ctr">
+                    <a:lnL w="9525" cap="flat" cmpd="sng" algn="ctr">
+                      <a:solidFill>
+                        <a:srgbClr val="D3D9E4"/>
+                      </a:solidFill>
+                      <a:prstDash val="solid"/>
+                      <a:round/>
+                      <a:headEnd type="none" w="med" len="med"/>
+                      <a:tailEnd type="none" w="med" len="med"/>
+                    </a:lnL>
+                    <a:lnR w="9525" cap="flat" cmpd="sng" algn="ctr">
+                      <a:solidFill>
+                        <a:srgbClr val="D3D9E4"/>
+                      </a:solidFill>
+                      <a:prstDash val="solid"/>
+                      <a:round/>
+                      <a:headEnd type="none" w="med" len="med"/>
+                      <a:tailEnd type="none" w="med" len="med"/>
+                    </a:lnR>
+                    <a:lnT w="9525" cap="flat" cmpd="sng" algn="ctr">
+                      <a:solidFill>
+                        <a:srgbClr val="D3D9E4"/>
+                      </a:solidFill>
+                      <a:prstDash val="solid"/>
+                      <a:round/>
+                      <a:headEnd type="none" w="med" len="med"/>
+                      <a:tailEnd type="none" w="med" len="med"/>
+                    </a:lnT>
+                    <a:lnB w="9525" cap="flat" cmpd="sng" algn="ctr">
+                      <a:solidFill>
+                        <a:srgbClr val="D3D9E4"/>
+                      </a:solidFill>
+                      <a:prstDash val="solid"/>
+                      <a:round/>
+                      <a:headEnd type="none" w="med" len="med"/>
+                      <a:tailEnd type="none" w="med" len="med"/>
+                    </a:lnB>
+                    <a:solidFill>
+                      <a:srgbClr val="F1F3FA"/>
+                    </a:solidFill>
+                  </a:tcPr>
+                </a:tc>
+                <a:tc>
+                  <a:txBody>
+                    <a:bodyPr/>
+                    <a:lstStyle/>
+                    <a:p>
+                      <a:pPr indent="0" marL="0">
+                        <a:buNone/>
+                      </a:pPr>
+                      <a:r>
+                        <a:rPr lang="el-GR" sz="900" b="1" dirty="0">
+                          <a:solidFill>
+                            <a:srgbClr val="8A91A3"/>
+                          </a:solidFill>
+                          <a:latin typeface="Consolas" pitchFamily="34" charset="0"/>
+                          <a:ea typeface="Consolas" pitchFamily="34" charset="-122"/>
+                          <a:cs typeface="Consolas" pitchFamily="34" charset="-120"/>
+                        </a:rPr>
+                        <a:t>ΓΙΑΤΙ</a:t>
+                      </a:r>
+                      <a:endParaRPr lang="el-GR" sz="1150" dirty="0"/>
+                    </a:p>
+                  </a:txBody>
+                  <a:tcPr marL="91440" marR="91440" marT="45720" marB="45720" anchor="ctr">
+                    <a:lnL w="9525" cap="flat" cmpd="sng" algn="ctr">
+                      <a:solidFill>
+                        <a:srgbClr val="D3D9E4"/>
+                      </a:solidFill>
+                      <a:prstDash val="solid"/>
+                      <a:round/>
+                      <a:headEnd type="none" w="med" len="med"/>
+                      <a:tailEnd type="none" w="med" len="med"/>
+                    </a:lnL>
+                    <a:lnR w="9525" cap="flat" cmpd="sng" algn="ctr">
+                      <a:solidFill>
+                        <a:srgbClr val="D3D9E4"/>
+                      </a:solidFill>
+                      <a:prstDash val="solid"/>
+                      <a:round/>
+                      <a:headEnd type="none" w="med" len="med"/>
+                      <a:tailEnd type="none" w="med" len="med"/>
+                    </a:lnR>
+                    <a:lnT w="9525" cap="flat" cmpd="sng" algn="ctr">
+                      <a:solidFill>
+                        <a:srgbClr val="D3D9E4"/>
+                      </a:solidFill>
+                      <a:prstDash val="solid"/>
+                      <a:round/>
+                      <a:headEnd type="none" w="med" len="med"/>
+                      <a:tailEnd type="none" w="med" len="med"/>
+                    </a:lnT>
+                    <a:lnB w="9525" cap="flat" cmpd="sng" algn="ctr">
+                      <a:solidFill>
+                        <a:srgbClr val="D3D9E4"/>
+                      </a:solidFill>
+                      <a:prstDash val="solid"/>
+                      <a:round/>
+                      <a:headEnd type="none" w="med" len="med"/>
+                      <a:tailEnd type="none" w="med" len="med"/>
+                    </a:lnB>
+                    <a:solidFill>
+                      <a:srgbClr val="F1F3FA"/>
+                    </a:solidFill>
+                  </a:tcPr>
+                </a:tc>
+              </a:tr>
+              <a:tr h="475488">
+                <a:tc>
+                  <a:txBody>
+                    <a:bodyPr/>
+                    <a:lstStyle/>
+                    <a:p>
+                      <a:pPr indent="0" marL="0">
+                        <a:buNone/>
+                      </a:pPr>
+                      <a:r>
+                        <a:rPr lang="el-GR" sz="1150" b="1" dirty="0">
+                          <a:solidFill>
+                            <a:srgbClr val="171B26"/>
+                          </a:solidFill>
+                          <a:latin typeface="Segoe UI" pitchFamily="34" charset="0"/>
+                          <a:ea typeface="Segoe UI" pitchFamily="34" charset="-122"/>
+                          <a:cs typeface="Segoe UI" pitchFamily="34" charset="-120"/>
+                        </a:rPr>
+                        <a:t>Εργαστήριο με παλιούς υπολογιστές και μηδέν budget</a:t>
+                      </a:r>
+                      <a:endParaRPr lang="el-GR" sz="1150" dirty="0"/>
+                    </a:p>
+                  </a:txBody>
+                  <a:tcPr marL="91440" marR="91440" marT="45720" marB="45720" anchor="ctr">
+                    <a:lnL w="9525" cap="flat" cmpd="sng" algn="ctr">
+                      <a:solidFill>
+                        <a:srgbClr val="D3D9E4"/>
+                      </a:solidFill>
+                      <a:prstDash val="solid"/>
+                      <a:round/>
+                      <a:headEnd type="none" w="med" len="med"/>
+                      <a:tailEnd type="none" w="med" len="med"/>
+                    </a:lnL>
+                    <a:lnR w="9525" cap="flat" cmpd="sng" algn="ctr">
+                      <a:solidFill>
+                        <a:srgbClr val="D3D9E4"/>
+                      </a:solidFill>
+                      <a:prstDash val="solid"/>
+                      <a:round/>
+                      <a:headEnd type="none" w="med" len="med"/>
+                      <a:tailEnd type="none" w="med" len="med"/>
+                    </a:lnR>
+                    <a:lnT w="9525" cap="flat" cmpd="sng" algn="ctr">
+                      <a:solidFill>
+                        <a:srgbClr val="D3D9E4"/>
+                      </a:solidFill>
+                      <a:prstDash val="solid"/>
+                      <a:round/>
+                      <a:headEnd type="none" w="med" len="med"/>
+                      <a:tailEnd type="none" w="med" len="med"/>
+                    </a:lnT>
+                    <a:lnB w="9525" cap="flat" cmpd="sng" algn="ctr">
+                      <a:solidFill>
+                        <a:srgbClr val="D3D9E4"/>
+                      </a:solidFill>
+                      <a:prstDash val="solid"/>
+                      <a:round/>
+                      <a:headEnd type="none" w="med" len="med"/>
+                      <a:tailEnd type="none" w="med" len="med"/>
+                    </a:lnB>
+                    <a:solidFill>
+                      <a:srgbClr val="FBFCFE"/>
+                    </a:solidFill>
+                  </a:tcPr>
+                </a:tc>
+                <a:tc>
+                  <a:txBody>
+                    <a:bodyPr/>
+                    <a:lstStyle/>
+                    <a:p>
+                      <a:pPr indent="0" marL="0">
+                        <a:buNone/>
+                      </a:pPr>
+                      <a:r>
+                        <a:rPr lang="el-GR" sz="1150" dirty="0">
+                          <a:solidFill>
+                            <a:srgbClr val="171B26"/>
+                          </a:solidFill>
+                          <a:latin typeface="Segoe UI" pitchFamily="34" charset="0"/>
+                          <a:ea typeface="Segoe UI" pitchFamily="34" charset="-122"/>
+                          <a:cs typeface="Segoe UI" pitchFamily="34" charset="-120"/>
+                        </a:rPr>
+                        <a:t>Linux</a:t>
+                      </a:r>
+                      <a:endParaRPr lang="el-GR" sz="1150" dirty="0"/>
+                    </a:p>
+                  </a:txBody>
+                  <a:tcPr marL="91440" marR="91440" marT="45720" marB="45720" anchor="ctr">
+                    <a:lnL w="9525" cap="flat" cmpd="sng" algn="ctr">
+                      <a:solidFill>
+                        <a:srgbClr val="D3D9E4"/>
+                      </a:solidFill>
+                      <a:prstDash val="solid"/>
+                      <a:round/>
+                      <a:headEnd type="none" w="med" len="med"/>
+                      <a:tailEnd type="none" w="med" len="med"/>
+                    </a:lnL>
+                    <a:lnR w="9525" cap="flat" cmpd="sng" algn="ctr">
+                      <a:solidFill>
+                        <a:srgbClr val="D3D9E4"/>
+                      </a:solidFill>
+                      <a:prstDash val="solid"/>
+                      <a:round/>
+                      <a:headEnd type="none" w="med" len="med"/>
+                      <a:tailEnd type="none" w="med" len="med"/>
+                    </a:lnR>
+                    <a:lnT w="9525" cap="flat" cmpd="sng" algn="ctr">
+                      <a:solidFill>
+                        <a:srgbClr val="D3D9E4"/>
+                      </a:solidFill>
+                      <a:prstDash val="solid"/>
+                      <a:round/>
+                      <a:headEnd type="none" w="med" len="med"/>
+                      <a:tailEnd type="none" w="med" len="med"/>
+                    </a:lnT>
+                    <a:lnB w="9525" cap="flat" cmpd="sng" algn="ctr">
+                      <a:solidFill>
+                        <a:srgbClr val="D3D9E4"/>
+                      </a:solidFill>
+                      <a:prstDash val="solid"/>
+                      <a:round/>
+                      <a:headEnd type="none" w="med" len="med"/>
+                      <a:tailEnd type="none" w="med" len="med"/>
+                    </a:lnB>
+                    <a:solidFill>
+                      <a:srgbClr val="FBFCFE"/>
+                    </a:solidFill>
+                  </a:tcPr>
+                </a:tc>
+                <a:tc>
+                  <a:txBody>
+                    <a:bodyPr/>
+                    <a:lstStyle/>
+                    <a:p>
+                      <a:pPr indent="0" marL="0">
+                        <a:buNone/>
+                      </a:pPr>
+                      <a:r>
+                        <a:rPr lang="el-GR" sz="1150" dirty="0">
+                          <a:solidFill>
+                            <a:srgbClr val="171B26"/>
+                          </a:solidFill>
+                          <a:latin typeface="Segoe UI" pitchFamily="34" charset="0"/>
+                          <a:ea typeface="Segoe UI" pitchFamily="34" charset="-122"/>
+                          <a:cs typeface="Segoe UI" pitchFamily="34" charset="-120"/>
+                        </a:rPr>
+                        <a:t>Δωρεάν και ελαφρύ (Linux Mint, Lubuntu): τρέχει και σε παλιό υλικό</a:t>
+                      </a:r>
+                      <a:endParaRPr lang="el-GR" sz="1150" dirty="0"/>
+                    </a:p>
+                  </a:txBody>
+                  <a:tcPr marL="91440" marR="91440" marT="45720" marB="45720" anchor="ctr">
+                    <a:lnL w="9525" cap="flat" cmpd="sng" algn="ctr">
+                      <a:solidFill>
+                        <a:srgbClr val="D3D9E4"/>
+                      </a:solidFill>
+                      <a:prstDash val="solid"/>
+                      <a:round/>
+                      <a:headEnd type="none" w="med" len="med"/>
+                      <a:tailEnd type="none" w="med" len="med"/>
+                    </a:lnL>
+                    <a:lnR w="9525" cap="flat" cmpd="sng" algn="ctr">
+                      <a:solidFill>
+                        <a:srgbClr val="D3D9E4"/>
+                      </a:solidFill>
+                      <a:prstDash val="solid"/>
+                      <a:round/>
+                      <a:headEnd type="none" w="med" len="med"/>
+                      <a:tailEnd type="none" w="med" len="med"/>
+                    </a:lnR>
+                    <a:lnT w="9525" cap="flat" cmpd="sng" algn="ctr">
+                      <a:solidFill>
+                        <a:srgbClr val="D3D9E4"/>
+                      </a:solidFill>
+                      <a:prstDash val="solid"/>
+                      <a:round/>
+                      <a:headEnd type="none" w="med" len="med"/>
+                      <a:tailEnd type="none" w="med" len="med"/>
+                    </a:lnT>
+                    <a:lnB w="9525" cap="flat" cmpd="sng" algn="ctr">
+                      <a:solidFill>
+                        <a:srgbClr val="D3D9E4"/>
+                      </a:solidFill>
+                      <a:prstDash val="solid"/>
+                      <a:round/>
+                      <a:headEnd type="none" w="med" len="med"/>
+                      <a:tailEnd type="none" w="med" len="med"/>
+                    </a:lnB>
+                    <a:solidFill>
+                      <a:srgbClr val="FBFCFE"/>
+                    </a:solidFill>
+                  </a:tcPr>
+                </a:tc>
+              </a:tr>
+              <a:tr h="475488">
+                <a:tc>
+                  <a:txBody>
+                    <a:bodyPr/>
+                    <a:lstStyle/>
+                    <a:p>
+                      <a:pPr indent="0" marL="0">
+                        <a:buNone/>
+                      </a:pPr>
+                      <a:r>
+                        <a:rPr lang="el-GR" sz="1150" b="1" dirty="0">
+                          <a:solidFill>
+                            <a:srgbClr val="171B26"/>
+                          </a:solidFill>
+                          <a:latin typeface="Segoe UI" pitchFamily="34" charset="0"/>
+                          <a:ea typeface="Segoe UI" pitchFamily="34" charset="-122"/>
+                          <a:cs typeface="Segoe UI" pitchFamily="34" charset="-120"/>
+                        </a:rPr>
+                        <a:t>Γραφίστας με Final Cut</a:t>
+                      </a:r>
+                      <a:endParaRPr lang="el-GR" sz="1150" dirty="0"/>
+                    </a:p>
+                  </a:txBody>
+                  <a:tcPr marL="91440" marR="91440" marT="45720" marB="45720" anchor="ctr">
+                    <a:lnL w="9525" cap="flat" cmpd="sng" algn="ctr">
+                      <a:solidFill>
+                        <a:srgbClr val="D3D9E4"/>
+                      </a:solidFill>
+                      <a:prstDash val="solid"/>
+                      <a:round/>
+                      <a:headEnd type="none" w="med" len="med"/>
+                      <a:tailEnd type="none" w="med" len="med"/>
+                    </a:lnL>
+                    <a:lnR w="9525" cap="flat" cmpd="sng" algn="ctr">
+                      <a:solidFill>
+                        <a:srgbClr val="D3D9E4"/>
+                      </a:solidFill>
+                      <a:prstDash val="solid"/>
+                      <a:round/>
+                      <a:headEnd type="none" w="med" len="med"/>
+                      <a:tailEnd type="none" w="med" len="med"/>
+                    </a:lnR>
+                    <a:lnT w="9525" cap="flat" cmpd="sng" algn="ctr">
+                      <a:solidFill>
+                        <a:srgbClr val="D3D9E4"/>
+                      </a:solidFill>
+                      <a:prstDash val="solid"/>
+                      <a:round/>
+                      <a:headEnd type="none" w="med" len="med"/>
+                      <a:tailEnd type="none" w="med" len="med"/>
+                    </a:lnT>
+                    <a:lnB w="9525" cap="flat" cmpd="sng" algn="ctr">
+                      <a:solidFill>
+                        <a:srgbClr val="D3D9E4"/>
+                      </a:solidFill>
+                      <a:prstDash val="solid"/>
+                      <a:round/>
+                      <a:headEnd type="none" w="med" len="med"/>
+                      <a:tailEnd type="none" w="med" len="med"/>
+                    </a:lnB>
+                    <a:solidFill>
+                      <a:srgbClr val="FBFCFE"/>
+                    </a:solidFill>
+                  </a:tcPr>
+                </a:tc>
+                <a:tc>
+                  <a:txBody>
+                    <a:bodyPr/>
+                    <a:lstStyle/>
+                    <a:p>
+                      <a:pPr indent="0" marL="0">
+                        <a:buNone/>
+                      </a:pPr>
+                      <a:r>
+                        <a:rPr lang="el-GR" sz="1150" dirty="0">
+                          <a:solidFill>
+                            <a:srgbClr val="171B26"/>
+                          </a:solidFill>
+                          <a:latin typeface="Segoe UI" pitchFamily="34" charset="0"/>
+                          <a:ea typeface="Segoe UI" pitchFamily="34" charset="-122"/>
+                          <a:cs typeface="Segoe UI" pitchFamily="34" charset="-120"/>
+                        </a:rPr>
+                        <a:t>macOS</a:t>
+                      </a:r>
+                      <a:endParaRPr lang="el-GR" sz="1150" dirty="0"/>
+                    </a:p>
+                  </a:txBody>
+                  <a:tcPr marL="91440" marR="91440" marT="45720" marB="45720" anchor="ctr">
+                    <a:lnL w="9525" cap="flat" cmpd="sng" algn="ctr">
+                      <a:solidFill>
+                        <a:srgbClr val="D3D9E4"/>
+                      </a:solidFill>
+                      <a:prstDash val="solid"/>
+                      <a:round/>
+                      <a:headEnd type="none" w="med" len="med"/>
+                      <a:tailEnd type="none" w="med" len="med"/>
+                    </a:lnL>
+                    <a:lnR w="9525" cap="flat" cmpd="sng" algn="ctr">
+                      <a:solidFill>
+                        <a:srgbClr val="D3D9E4"/>
+                      </a:solidFill>
+                      <a:prstDash val="solid"/>
+                      <a:round/>
+                      <a:headEnd type="none" w="med" len="med"/>
+                      <a:tailEnd type="none" w="med" len="med"/>
+                    </a:lnR>
+                    <a:lnT w="9525" cap="flat" cmpd="sng" algn="ctr">
+                      <a:solidFill>
+                        <a:srgbClr val="D3D9E4"/>
+                      </a:solidFill>
+                      <a:prstDash val="solid"/>
+                      <a:round/>
+                      <a:headEnd type="none" w="med" len="med"/>
+                      <a:tailEnd type="none" w="med" len="med"/>
+                    </a:lnT>
+                    <a:lnB w="9525" cap="flat" cmpd="sng" algn="ctr">
+                      <a:solidFill>
+                        <a:srgbClr val="D3D9E4"/>
+                      </a:solidFill>
+                      <a:prstDash val="solid"/>
+                      <a:round/>
+                      <a:headEnd type="none" w="med" len="med"/>
+                      <a:tailEnd type="none" w="med" len="med"/>
+                    </a:lnB>
+                    <a:solidFill>
+                      <a:srgbClr val="FBFCFE"/>
+                    </a:solidFill>
+                  </a:tcPr>
+                </a:tc>
+                <a:tc>
+                  <a:txBody>
+                    <a:bodyPr/>
+                    <a:lstStyle/>
+                    <a:p>
+                      <a:pPr indent="0" marL="0">
+                        <a:buNone/>
+                      </a:pPr>
+                      <a:r>
+                        <a:rPr lang="el-GR" sz="1150" dirty="0">
+                          <a:solidFill>
+                            <a:srgbClr val="171B26"/>
+                          </a:solidFill>
+                          <a:latin typeface="Segoe UI" pitchFamily="34" charset="0"/>
+                          <a:ea typeface="Segoe UI" pitchFamily="34" charset="-122"/>
+                          <a:cs typeface="Segoe UI" pitchFamily="34" charset="-120"/>
+                        </a:rPr>
+                        <a:t>Το Final Cut υπάρχει μόνο σε macOS</a:t>
+                      </a:r>
+                      <a:endParaRPr lang="el-GR" sz="1150" dirty="0"/>
+                    </a:p>
+                  </a:txBody>
+                  <a:tcPr marL="91440" marR="91440" marT="45720" marB="45720" anchor="ctr">
+                    <a:lnL w="9525" cap="flat" cmpd="sng" algn="ctr">
+                      <a:solidFill>
+                        <a:srgbClr val="D3D9E4"/>
+                      </a:solidFill>
+                      <a:prstDash val="solid"/>
+                      <a:round/>
+                      <a:headEnd type="none" w="med" len="med"/>
+                      <a:tailEnd type="none" w="med" len="med"/>
+                    </a:lnL>
+                    <a:lnR w="9525" cap="flat" cmpd="sng" algn="ctr">
+                      <a:solidFill>
+                        <a:srgbClr val="D3D9E4"/>
+                      </a:solidFill>
+                      <a:prstDash val="solid"/>
+                      <a:round/>
+                      <a:headEnd type="none" w="med" len="med"/>
+                      <a:tailEnd type="none" w="med" len="med"/>
+                    </a:lnR>
+                    <a:lnT w="9525" cap="flat" cmpd="sng" algn="ctr">
+                      <a:solidFill>
+                        <a:srgbClr val="D3D9E4"/>
+                      </a:solidFill>
+                      <a:prstDash val="solid"/>
+                      <a:round/>
+                      <a:headEnd type="none" w="med" len="med"/>
+                      <a:tailEnd type="none" w="med" len="med"/>
+                    </a:lnT>
+                    <a:lnB w="9525" cap="flat" cmpd="sng" algn="ctr">
+                      <a:solidFill>
+                        <a:srgbClr val="D3D9E4"/>
+                      </a:solidFill>
+                      <a:prstDash val="solid"/>
+                      <a:round/>
+                      <a:headEnd type="none" w="med" len="med"/>
+                      <a:tailEnd type="none" w="med" len="med"/>
+                    </a:lnB>
+                    <a:solidFill>
+                      <a:srgbClr val="FBFCFE"/>
+                    </a:solidFill>
+                  </a:tcPr>
+                </a:tc>
+              </a:tr>
+              <a:tr h="475488">
+                <a:tc>
+                  <a:txBody>
+                    <a:bodyPr/>
+                    <a:lstStyle/>
+                    <a:p>
+                      <a:pPr indent="0" marL="0">
+                        <a:buNone/>
+                      </a:pPr>
+                      <a:r>
+                        <a:rPr lang="el-GR" sz="1150" b="1" dirty="0">
+                          <a:solidFill>
+                            <a:srgbClr val="171B26"/>
+                          </a:solidFill>
+                          <a:latin typeface="Segoe UI" pitchFamily="34" charset="0"/>
+                          <a:ea typeface="Segoe UI" pitchFamily="34" charset="-122"/>
+                          <a:cs typeface="Segoe UI" pitchFamily="34" charset="-120"/>
+                        </a:rPr>
+                        <a:t>Web server για το site μιας εταιρείας</a:t>
+                      </a:r>
+                      <a:endParaRPr lang="el-GR" sz="1150" dirty="0"/>
+                    </a:p>
+                  </a:txBody>
+                  <a:tcPr marL="91440" marR="91440" marT="45720" marB="45720" anchor="ctr">
+                    <a:lnL w="9525" cap="flat" cmpd="sng" algn="ctr">
+                      <a:solidFill>
+                        <a:srgbClr val="D3D9E4"/>
+                      </a:solidFill>
+                      <a:prstDash val="solid"/>
+                      <a:round/>
+                      <a:headEnd type="none" w="med" len="med"/>
+                      <a:tailEnd type="none" w="med" len="med"/>
+                    </a:lnL>
+                    <a:lnR w="9525" cap="flat" cmpd="sng" algn="ctr">
+                      <a:solidFill>
+                        <a:srgbClr val="D3D9E4"/>
+                      </a:solidFill>
+                      <a:prstDash val="solid"/>
+                      <a:round/>
+                      <a:headEnd type="none" w="med" len="med"/>
+                      <a:tailEnd type="none" w="med" len="med"/>
+                    </a:lnR>
+                    <a:lnT w="9525" cap="flat" cmpd="sng" algn="ctr">
+                      <a:solidFill>
+                        <a:srgbClr val="D3D9E4"/>
+                      </a:solidFill>
+                      <a:prstDash val="solid"/>
+                      <a:round/>
+                      <a:headEnd type="none" w="med" len="med"/>
+                      <a:tailEnd type="none" w="med" len="med"/>
+                    </a:lnT>
+                    <a:lnB w="9525" cap="flat" cmpd="sng" algn="ctr">
+                      <a:solidFill>
+                        <a:srgbClr val="D3D9E4"/>
+                      </a:solidFill>
+                      <a:prstDash val="solid"/>
+                      <a:round/>
+                      <a:headEnd type="none" w="med" len="med"/>
+                      <a:tailEnd type="none" w="med" len="med"/>
+                    </a:lnB>
+                    <a:solidFill>
+                      <a:srgbClr val="FBFCFE"/>
+                    </a:solidFill>
+                  </a:tcPr>
+                </a:tc>
+                <a:tc>
+                  <a:txBody>
+                    <a:bodyPr/>
+                    <a:lstStyle/>
+                    <a:p>
+                      <a:pPr indent="0" marL="0">
+                        <a:buNone/>
+                      </a:pPr>
+                      <a:r>
+                        <a:rPr lang="el-GR" sz="1150" dirty="0">
+                          <a:solidFill>
+                            <a:srgbClr val="171B26"/>
+                          </a:solidFill>
+                          <a:latin typeface="Segoe UI" pitchFamily="34" charset="0"/>
+                          <a:ea typeface="Segoe UI" pitchFamily="34" charset="-122"/>
+                          <a:cs typeface="Segoe UI" pitchFamily="34" charset="-120"/>
+                        </a:rPr>
+                        <a:t>Linux</a:t>
+                      </a:r>
+                      <a:endParaRPr lang="el-GR" sz="1150" dirty="0"/>
+                    </a:p>
+                  </a:txBody>
+                  <a:tcPr marL="91440" marR="91440" marT="45720" marB="45720" anchor="ctr">
+                    <a:lnL w="9525" cap="flat" cmpd="sng" algn="ctr">
+                      <a:solidFill>
+                        <a:srgbClr val="D3D9E4"/>
+                      </a:solidFill>
+                      <a:prstDash val="solid"/>
+                      <a:round/>
+                      <a:headEnd type="none" w="med" len="med"/>
+                      <a:tailEnd type="none" w="med" len="med"/>
+                    </a:lnL>
+                    <a:lnR w="9525" cap="flat" cmpd="sng" algn="ctr">
+                      <a:solidFill>
+                        <a:srgbClr val="D3D9E4"/>
+                      </a:solidFill>
+                      <a:prstDash val="solid"/>
+                      <a:round/>
+                      <a:headEnd type="none" w="med" len="med"/>
+                      <a:tailEnd type="none" w="med" len="med"/>
+                    </a:lnR>
+                    <a:lnT w="9525" cap="flat" cmpd="sng" algn="ctr">
+                      <a:solidFill>
+                        <a:srgbClr val="D3D9E4"/>
+                      </a:solidFill>
+                      <a:prstDash val="solid"/>
+                      <a:round/>
+                      <a:headEnd type="none" w="med" len="med"/>
+                      <a:tailEnd type="none" w="med" len="med"/>
+                    </a:lnT>
+                    <a:lnB w="9525" cap="flat" cmpd="sng" algn="ctr">
+                      <a:solidFill>
+                        <a:srgbClr val="D3D9E4"/>
+                      </a:solidFill>
+                      <a:prstDash val="solid"/>
+                      <a:round/>
+                      <a:headEnd type="none" w="med" len="med"/>
+                      <a:tailEnd type="none" w="med" len="med"/>
+                    </a:lnB>
+                    <a:solidFill>
+                      <a:srgbClr val="FBFCFE"/>
+                    </a:solidFill>
+                  </a:tcPr>
+                </a:tc>
+                <a:tc>
+                  <a:txBody>
+                    <a:bodyPr/>
+                    <a:lstStyle/>
+                    <a:p>
+                      <a:pPr indent="0" marL="0">
+                        <a:buNone/>
+                      </a:pPr>
+                      <a:r>
+                        <a:rPr lang="el-GR" sz="1150" dirty="0">
+                          <a:solidFill>
+                            <a:srgbClr val="171B26"/>
+                          </a:solidFill>
+                          <a:latin typeface="Segoe UI" pitchFamily="34" charset="0"/>
+                          <a:ea typeface="Segoe UI" pitchFamily="34" charset="-122"/>
+                          <a:cs typeface="Segoe UI" pitchFamily="34" charset="-120"/>
+                        </a:rPr>
+                        <a:t>Σταθερό, δωρεάν, το πιο διαδεδομένο σε servers</a:t>
+                      </a:r>
+                      <a:endParaRPr lang="el-GR" sz="1150" dirty="0"/>
+                    </a:p>
+                  </a:txBody>
+                  <a:tcPr marL="91440" marR="91440" marT="45720" marB="45720" anchor="ctr">
+                    <a:lnL w="9525" cap="flat" cmpd="sng" algn="ctr">
+                      <a:solidFill>
+                        <a:srgbClr val="D3D9E4"/>
+                      </a:solidFill>
+                      <a:prstDash val="solid"/>
+                      <a:round/>
+                      <a:headEnd type="none" w="med" len="med"/>
+                      <a:tailEnd type="none" w="med" len="med"/>
+                    </a:lnL>
+                    <a:lnR w="9525" cap="flat" cmpd="sng" algn="ctr">
+                      <a:solidFill>
+                        <a:srgbClr val="D3D9E4"/>
+                      </a:solidFill>
+                      <a:prstDash val="solid"/>
+                      <a:round/>
+                      <a:headEnd type="none" w="med" len="med"/>
+                      <a:tailEnd type="none" w="med" len="med"/>
+                    </a:lnR>
+                    <a:lnT w="9525" cap="flat" cmpd="sng" algn="ctr">
+                      <a:solidFill>
+                        <a:srgbClr val="D3D9E4"/>
+                      </a:solidFill>
+                      <a:prstDash val="solid"/>
+                      <a:round/>
+                      <a:headEnd type="none" w="med" len="med"/>
+                      <a:tailEnd type="none" w="med" len="med"/>
+                    </a:lnT>
+                    <a:lnB w="9525" cap="flat" cmpd="sng" algn="ctr">
+                      <a:solidFill>
+                        <a:srgbClr val="D3D9E4"/>
+                      </a:solidFill>
+                      <a:prstDash val="solid"/>
+                      <a:round/>
+                      <a:headEnd type="none" w="med" len="med"/>
+                      <a:tailEnd type="none" w="med" len="med"/>
+                    </a:lnB>
+                    <a:solidFill>
+                      <a:srgbClr val="FBFCFE"/>
+                    </a:solidFill>
+                  </a:tcPr>
+                </a:tc>
+              </a:tr>
+              <a:tr h="475488">
+                <a:tc>
+                  <a:txBody>
+                    <a:bodyPr/>
+                    <a:lstStyle/>
+                    <a:p>
+                      <a:pPr indent="0" marL="0">
+                        <a:buNone/>
+                      </a:pPr>
+                      <a:r>
+                        <a:rPr lang="el-GR" sz="1150" b="1" dirty="0">
+                          <a:solidFill>
+                            <a:srgbClr val="171B26"/>
+                          </a:solidFill>
+                          <a:latin typeface="Segoe UI" pitchFamily="34" charset="0"/>
+                          <a:ea typeface="Segoe UI" pitchFamily="34" charset="-122"/>
+                          <a:cs typeface="Segoe UI" pitchFamily="34" charset="-120"/>
+                        </a:rPr>
+                        <a:t>Λογιστήριο με ελληνικό λογιστικό πρόγραμμα</a:t>
+                      </a:r>
+                      <a:endParaRPr lang="el-GR" sz="1150" dirty="0"/>
+                    </a:p>
+                  </a:txBody>
+                  <a:tcPr marL="91440" marR="91440" marT="45720" marB="45720" anchor="ctr">
+                    <a:lnL w="9525" cap="flat" cmpd="sng" algn="ctr">
+                      <a:solidFill>
+                        <a:srgbClr val="D3D9E4"/>
+                      </a:solidFill>
+                      <a:prstDash val="solid"/>
+                      <a:round/>
+                      <a:headEnd type="none" w="med" len="med"/>
+                      <a:tailEnd type="none" w="med" len="med"/>
+                    </a:lnL>
+                    <a:lnR w="9525" cap="flat" cmpd="sng" algn="ctr">
+                      <a:solidFill>
+                        <a:srgbClr val="D3D9E4"/>
+                      </a:solidFill>
+                      <a:prstDash val="solid"/>
+                      <a:round/>
+                      <a:headEnd type="none" w="med" len="med"/>
+                      <a:tailEnd type="none" w="med" len="med"/>
+                    </a:lnR>
+                    <a:lnT w="9525" cap="flat" cmpd="sng" algn="ctr">
+                      <a:solidFill>
+                        <a:srgbClr val="D3D9E4"/>
+                      </a:solidFill>
+                      <a:prstDash val="solid"/>
+                      <a:round/>
+                      <a:headEnd type="none" w="med" len="med"/>
+                      <a:tailEnd type="none" w="med" len="med"/>
+                    </a:lnT>
+                    <a:lnB w="9525" cap="flat" cmpd="sng" algn="ctr">
+                      <a:solidFill>
+                        <a:srgbClr val="D3D9E4"/>
+                      </a:solidFill>
+                      <a:prstDash val="solid"/>
+                      <a:round/>
+                      <a:headEnd type="none" w="med" len="med"/>
+                      <a:tailEnd type="none" w="med" len="med"/>
+                    </a:lnB>
+                    <a:solidFill>
+                      <a:srgbClr val="FBFCFE"/>
+                    </a:solidFill>
+                  </a:tcPr>
+                </a:tc>
+                <a:tc>
+                  <a:txBody>
+                    <a:bodyPr/>
+                    <a:lstStyle/>
+                    <a:p>
+                      <a:pPr indent="0" marL="0">
+                        <a:buNone/>
+                      </a:pPr>
+                      <a:r>
+                        <a:rPr lang="el-GR" sz="1150" dirty="0">
+                          <a:solidFill>
+                            <a:srgbClr val="171B26"/>
+                          </a:solidFill>
+                          <a:latin typeface="Segoe UI" pitchFamily="34" charset="0"/>
+                          <a:ea typeface="Segoe UI" pitchFamily="34" charset="-122"/>
+                          <a:cs typeface="Segoe UI" pitchFamily="34" charset="-120"/>
+                        </a:rPr>
+                        <a:t>Windows</a:t>
+                      </a:r>
+                      <a:endParaRPr lang="el-GR" sz="1150" dirty="0"/>
+                    </a:p>
+                  </a:txBody>
+                  <a:tcPr marL="91440" marR="91440" marT="45720" marB="45720" anchor="ctr">
+                    <a:lnL w="9525" cap="flat" cmpd="sng" algn="ctr">
+                      <a:solidFill>
+                        <a:srgbClr val="D3D9E4"/>
+                      </a:solidFill>
+                      <a:prstDash val="solid"/>
+                      <a:round/>
+                      <a:headEnd type="none" w="med" len="med"/>
+                      <a:tailEnd type="none" w="med" len="med"/>
+                    </a:lnL>
+                    <a:lnR w="9525" cap="flat" cmpd="sng" algn="ctr">
+                      <a:solidFill>
+                        <a:srgbClr val="D3D9E4"/>
+                      </a:solidFill>
+                      <a:prstDash val="solid"/>
+                      <a:round/>
+                      <a:headEnd type="none" w="med" len="med"/>
+                      <a:tailEnd type="none" w="med" len="med"/>
+                    </a:lnR>
+                    <a:lnT w="9525" cap="flat" cmpd="sng" algn="ctr">
+                      <a:solidFill>
+                        <a:srgbClr val="D3D9E4"/>
+                      </a:solidFill>
+                      <a:prstDash val="solid"/>
+                      <a:round/>
+                      <a:headEnd type="none" w="med" len="med"/>
+                      <a:tailEnd type="none" w="med" len="med"/>
+                    </a:lnT>
+                    <a:lnB w="9525" cap="flat" cmpd="sng" algn="ctr">
+                      <a:solidFill>
+                        <a:srgbClr val="D3D9E4"/>
+                      </a:solidFill>
+                      <a:prstDash val="solid"/>
+                      <a:round/>
+                      <a:headEnd type="none" w="med" len="med"/>
+                      <a:tailEnd type="none" w="med" len="med"/>
+                    </a:lnB>
+                    <a:solidFill>
+                      <a:srgbClr val="FBFCFE"/>
+                    </a:solidFill>
+                  </a:tcPr>
+                </a:tc>
+                <a:tc>
+                  <a:txBody>
+                    <a:bodyPr/>
+                    <a:lstStyle/>
+                    <a:p>
+                      <a:pPr indent="0" marL="0">
+                        <a:buNone/>
+                      </a:pPr>
+                      <a:r>
+                        <a:rPr lang="el-GR" sz="1150" dirty="0">
+                          <a:solidFill>
+                            <a:srgbClr val="171B26"/>
+                          </a:solidFill>
+                          <a:latin typeface="Segoe UI" pitchFamily="34" charset="0"/>
+                          <a:ea typeface="Segoe UI" pitchFamily="34" charset="-122"/>
+                          <a:cs typeface="Segoe UI" pitchFamily="34" charset="-120"/>
+                        </a:rPr>
+                        <a:t>Τα περισσότερα ελληνικά λογιστικά τρέχουν μόνο σε Windows</a:t>
+                      </a:r>
+                      <a:endParaRPr lang="el-GR" sz="1150" dirty="0"/>
+                    </a:p>
+                  </a:txBody>
+                  <a:tcPr marL="91440" marR="91440" marT="45720" marB="45720" anchor="ctr">
+                    <a:lnL w="9525" cap="flat" cmpd="sng" algn="ctr">
+                      <a:solidFill>
+                        <a:srgbClr val="D3D9E4"/>
+                      </a:solidFill>
+                      <a:prstDash val="solid"/>
+                      <a:round/>
+                      <a:headEnd type="none" w="med" len="med"/>
+                      <a:tailEnd type="none" w="med" len="med"/>
+                    </a:lnL>
+                    <a:lnR w="9525" cap="flat" cmpd="sng" algn="ctr">
+                      <a:solidFill>
+                        <a:srgbClr val="D3D9E4"/>
+                      </a:solidFill>
+                      <a:prstDash val="solid"/>
+                      <a:round/>
+                      <a:headEnd type="none" w="med" len="med"/>
+                      <a:tailEnd type="none" w="med" len="med"/>
+                    </a:lnR>
+                    <a:lnT w="9525" cap="flat" cmpd="sng" algn="ctr">
+                      <a:solidFill>
+                        <a:srgbClr val="D3D9E4"/>
+                      </a:solidFill>
+                      <a:prstDash val="solid"/>
+                      <a:round/>
+                      <a:headEnd type="none" w="med" len="med"/>
+                      <a:tailEnd type="none" w="med" len="med"/>
+                    </a:lnT>
+                    <a:lnB w="9525" cap="flat" cmpd="sng" algn="ctr">
+                      <a:solidFill>
+                        <a:srgbClr val="D3D9E4"/>
+                      </a:solidFill>
+                      <a:prstDash val="solid"/>
+                      <a:round/>
+                      <a:headEnd type="none" w="med" len="med"/>
+                      <a:tailEnd type="none" w="med" len="med"/>
+                    </a:lnB>
+                    <a:solidFill>
+                      <a:srgbClr val="FBFCFE"/>
+                    </a:solidFill>
+                  </a:tcPr>
+                </a:tc>
+              </a:tr>
+              <a:tr h="475488">
+                <a:tc>
+                  <a:txBody>
+                    <a:bodyPr/>
+                    <a:lstStyle/>
+                    <a:p>
+                      <a:pPr indent="0" marL="0">
+                        <a:buNone/>
+                      </a:pPr>
+                      <a:r>
+                        <a:rPr lang="el-GR" sz="1150" b="1" dirty="0">
+                          <a:solidFill>
+                            <a:srgbClr val="171B26"/>
+                          </a:solidFill>
+                          <a:latin typeface="Segoe UI" pitchFamily="34" charset="0"/>
+                          <a:ea typeface="Segoe UI" pitchFamily="34" charset="-122"/>
+                          <a:cs typeface="Segoe UI" pitchFamily="34" charset="-120"/>
+                        </a:rPr>
+                        <a:t>Developer παιχνιδιών με DirectX</a:t>
+                      </a:r>
+                      <a:endParaRPr lang="el-GR" sz="1150" dirty="0"/>
+                    </a:p>
+                  </a:txBody>
+                  <a:tcPr marL="91440" marR="91440" marT="45720" marB="45720" anchor="ctr">
+                    <a:lnL w="9525" cap="flat" cmpd="sng" algn="ctr">
+                      <a:solidFill>
+                        <a:srgbClr val="D3D9E4"/>
+                      </a:solidFill>
+                      <a:prstDash val="solid"/>
+                      <a:round/>
+                      <a:headEnd type="none" w="med" len="med"/>
+                      <a:tailEnd type="none" w="med" len="med"/>
+                    </a:lnL>
+                    <a:lnR w="9525" cap="flat" cmpd="sng" algn="ctr">
+                      <a:solidFill>
+                        <a:srgbClr val="D3D9E4"/>
+                      </a:solidFill>
+                      <a:prstDash val="solid"/>
+                      <a:round/>
+                      <a:headEnd type="none" w="med" len="med"/>
+                      <a:tailEnd type="none" w="med" len="med"/>
+                    </a:lnR>
+                    <a:lnT w="9525" cap="flat" cmpd="sng" algn="ctr">
+                      <a:solidFill>
+                        <a:srgbClr val="D3D9E4"/>
+                      </a:solidFill>
+                      <a:prstDash val="solid"/>
+                      <a:round/>
+                      <a:headEnd type="none" w="med" len="med"/>
+                      <a:tailEnd type="none" w="med" len="med"/>
+                    </a:lnT>
+                    <a:lnB w="9525" cap="flat" cmpd="sng" algn="ctr">
+                      <a:solidFill>
+                        <a:srgbClr val="D3D9E4"/>
+                      </a:solidFill>
+                      <a:prstDash val="solid"/>
+                      <a:round/>
+                      <a:headEnd type="none" w="med" len="med"/>
+                      <a:tailEnd type="none" w="med" len="med"/>
+                    </a:lnB>
+                    <a:solidFill>
+                      <a:srgbClr val="FBFCFE"/>
+                    </a:solidFill>
+                  </a:tcPr>
+                </a:tc>
+                <a:tc>
+                  <a:txBody>
+                    <a:bodyPr/>
+                    <a:lstStyle/>
+                    <a:p>
+                      <a:pPr indent="0" marL="0">
+                        <a:buNone/>
+                      </a:pPr>
+                      <a:r>
+                        <a:rPr lang="el-GR" sz="1150" dirty="0">
+                          <a:solidFill>
+                            <a:srgbClr val="171B26"/>
+                          </a:solidFill>
+                          <a:latin typeface="Segoe UI" pitchFamily="34" charset="0"/>
+                          <a:ea typeface="Segoe UI" pitchFamily="34" charset="-122"/>
+                          <a:cs typeface="Segoe UI" pitchFamily="34" charset="-120"/>
+                        </a:rPr>
+                        <a:t>Windows</a:t>
+                      </a:r>
+                      <a:endParaRPr lang="el-GR" sz="1150" dirty="0"/>
+                    </a:p>
+                  </a:txBody>
+                  <a:tcPr marL="91440" marR="91440" marT="45720" marB="45720" anchor="ctr">
+                    <a:lnL w="9525" cap="flat" cmpd="sng" algn="ctr">
+                      <a:solidFill>
+                        <a:srgbClr val="D3D9E4"/>
+                      </a:solidFill>
+                      <a:prstDash val="solid"/>
+                      <a:round/>
+                      <a:headEnd type="none" w="med" len="med"/>
+                      <a:tailEnd type="none" w="med" len="med"/>
+                    </a:lnL>
+                    <a:lnR w="9525" cap="flat" cmpd="sng" algn="ctr">
+                      <a:solidFill>
+                        <a:srgbClr val="D3D9E4"/>
+                      </a:solidFill>
+                      <a:prstDash val="solid"/>
+                      <a:round/>
+                      <a:headEnd type="none" w="med" len="med"/>
+                      <a:tailEnd type="none" w="med" len="med"/>
+                    </a:lnR>
+                    <a:lnT w="9525" cap="flat" cmpd="sng" algn="ctr">
+                      <a:solidFill>
+                        <a:srgbClr val="D3D9E4"/>
+                      </a:solidFill>
+                      <a:prstDash val="solid"/>
+                      <a:round/>
+                      <a:headEnd type="none" w="med" len="med"/>
+                      <a:tailEnd type="none" w="med" len="med"/>
+                    </a:lnT>
+                    <a:lnB w="9525" cap="flat" cmpd="sng" algn="ctr">
+                      <a:solidFill>
+                        <a:srgbClr val="D3D9E4"/>
+                      </a:solidFill>
+                      <a:prstDash val="solid"/>
+                      <a:round/>
+                      <a:headEnd type="none" w="med" len="med"/>
+                      <a:tailEnd type="none" w="med" len="med"/>
+                    </a:lnB>
+                    <a:solidFill>
+                      <a:srgbClr val="FBFCFE"/>
+                    </a:solidFill>
+                  </a:tcPr>
+                </a:tc>
+                <a:tc>
+                  <a:txBody>
+                    <a:bodyPr/>
+                    <a:lstStyle/>
+                    <a:p>
+                      <a:pPr indent="0" marL="0">
+                        <a:buNone/>
+                      </a:pPr>
+                      <a:r>
+                        <a:rPr lang="el-GR" sz="1150" dirty="0">
+                          <a:solidFill>
+                            <a:srgbClr val="171B26"/>
+                          </a:solidFill>
+                          <a:latin typeface="Segoe UI" pitchFamily="34" charset="0"/>
+                          <a:ea typeface="Segoe UI" pitchFamily="34" charset="-122"/>
+                          <a:cs typeface="Segoe UI" pitchFamily="34" charset="-120"/>
+                        </a:rPr>
+                        <a:t>Το DirectX είναι της Microsoft και υπάρχει μόνο στα Windows</a:t>
+                      </a:r>
+                      <a:endParaRPr lang="el-GR" sz="1150" dirty="0"/>
+                    </a:p>
+                  </a:txBody>
+                  <a:tcPr marL="91440" marR="91440" marT="45720" marB="45720" anchor="ctr">
+                    <a:lnL w="9525" cap="flat" cmpd="sng" algn="ctr">
+                      <a:solidFill>
+                        <a:srgbClr val="D3D9E4"/>
+                      </a:solidFill>
+                      <a:prstDash val="solid"/>
+                      <a:round/>
+                      <a:headEnd type="none" w="med" len="med"/>
+                      <a:tailEnd type="none" w="med" len="med"/>
+                    </a:lnL>
+                    <a:lnR w="9525" cap="flat" cmpd="sng" algn="ctr">
+                      <a:solidFill>
+                        <a:srgbClr val="D3D9E4"/>
+                      </a:solidFill>
+                      <a:prstDash val="solid"/>
+                      <a:round/>
+                      <a:headEnd type="none" w="med" len="med"/>
+                      <a:tailEnd type="none" w="med" len="med"/>
+                    </a:lnR>
+                    <a:lnT w="9525" cap="flat" cmpd="sng" algn="ctr">
+                      <a:solidFill>
+                        <a:srgbClr val="D3D9E4"/>
+                      </a:solidFill>
+                      <a:prstDash val="solid"/>
+                      <a:round/>
+                      <a:headEnd type="none" w="med" len="med"/>
+                      <a:tailEnd type="none" w="med" len="med"/>
+                    </a:lnT>
+                    <a:lnB w="9525" cap="flat" cmpd="sng" algn="ctr">
+                      <a:solidFill>
+                        <a:srgbClr val="D3D9E4"/>
+                      </a:solidFill>
+                      <a:prstDash val="solid"/>
+                      <a:round/>
+                      <a:headEnd type="none" w="med" len="med"/>
+                      <a:tailEnd type="none" w="med" len="med"/>
+                    </a:lnB>
+                    <a:solidFill>
+                      <a:srgbClr val="FBFCFE"/>
+                    </a:solidFill>
+                  </a:tcPr>
+                </a:tc>
+              </a:tr>
+              <a:tr h="475488">
+                <a:tc>
+                  <a:txBody>
+                    <a:bodyPr/>
+                    <a:lstStyle/>
+                    <a:p>
+                      <a:pPr indent="0" marL="0">
+                        <a:buNone/>
+                      </a:pPr>
+                      <a:r>
+                        <a:rPr lang="el-GR" sz="1150" b="1" dirty="0">
+                          <a:solidFill>
+                            <a:srgbClr val="171B26"/>
+                          </a:solidFill>
+                          <a:latin typeface="Segoe UI" pitchFamily="34" charset="0"/>
+                          <a:ea typeface="Segoe UI" pitchFamily="34" charset="-122"/>
+                          <a:cs typeface="Segoe UI" pitchFamily="34" charset="-120"/>
+                        </a:rPr>
+                        <a:t>Developer εφαρμογών για iPhone</a:t>
+                      </a:r>
+                      <a:endParaRPr lang="el-GR" sz="1150" dirty="0"/>
+                    </a:p>
+                  </a:txBody>
+                  <a:tcPr marL="91440" marR="91440" marT="45720" marB="45720" anchor="ctr">
+                    <a:lnL w="9525" cap="flat" cmpd="sng" algn="ctr">
+                      <a:solidFill>
+                        <a:srgbClr val="D3D9E4"/>
+                      </a:solidFill>
+                      <a:prstDash val="solid"/>
+                      <a:round/>
+                      <a:headEnd type="none" w="med" len="med"/>
+                      <a:tailEnd type="none" w="med" len="med"/>
+                    </a:lnL>
+                    <a:lnR w="9525" cap="flat" cmpd="sng" algn="ctr">
+                      <a:solidFill>
+                        <a:srgbClr val="D3D9E4"/>
+                      </a:solidFill>
+                      <a:prstDash val="solid"/>
+                      <a:round/>
+                      <a:headEnd type="none" w="med" len="med"/>
+                      <a:tailEnd type="none" w="med" len="med"/>
+                    </a:lnR>
+                    <a:lnT w="9525" cap="flat" cmpd="sng" algn="ctr">
+                      <a:solidFill>
+                        <a:srgbClr val="D3D9E4"/>
+                      </a:solidFill>
+                      <a:prstDash val="solid"/>
+                      <a:round/>
+                      <a:headEnd type="none" w="med" len="med"/>
+                      <a:tailEnd type="none" w="med" len="med"/>
+                    </a:lnT>
+                    <a:lnB w="9525" cap="flat" cmpd="sng" algn="ctr">
+                      <a:solidFill>
+                        <a:srgbClr val="D3D9E4"/>
+                      </a:solidFill>
+                      <a:prstDash val="solid"/>
+                      <a:round/>
+                      <a:headEnd type="none" w="med" len="med"/>
+                      <a:tailEnd type="none" w="med" len="med"/>
+                    </a:lnB>
+                    <a:solidFill>
+                      <a:srgbClr val="FBFCFE"/>
+                    </a:solidFill>
+                  </a:tcPr>
+                </a:tc>
+                <a:tc>
+                  <a:txBody>
+                    <a:bodyPr/>
+                    <a:lstStyle/>
+                    <a:p>
+                      <a:pPr indent="0" marL="0">
+                        <a:buNone/>
+                      </a:pPr>
+                      <a:r>
+                        <a:rPr lang="el-GR" sz="1150" dirty="0">
+                          <a:solidFill>
+                            <a:srgbClr val="171B26"/>
+                          </a:solidFill>
+                          <a:latin typeface="Segoe UI" pitchFamily="34" charset="0"/>
+                          <a:ea typeface="Segoe UI" pitchFamily="34" charset="-122"/>
+                          <a:cs typeface="Segoe UI" pitchFamily="34" charset="-120"/>
+                        </a:rPr>
+                        <a:t>macOS</a:t>
+                      </a:r>
+                      <a:endParaRPr lang="el-GR" sz="1150" dirty="0"/>
+                    </a:p>
+                  </a:txBody>
+                  <a:tcPr marL="91440" marR="91440" marT="45720" marB="45720" anchor="ctr">
+                    <a:lnL w="9525" cap="flat" cmpd="sng" algn="ctr">
+                      <a:solidFill>
+                        <a:srgbClr val="D3D9E4"/>
+                      </a:solidFill>
+                      <a:prstDash val="solid"/>
+                      <a:round/>
+                      <a:headEnd type="none" w="med" len="med"/>
+                      <a:tailEnd type="none" w="med" len="med"/>
+                    </a:lnL>
+                    <a:lnR w="9525" cap="flat" cmpd="sng" algn="ctr">
+                      <a:solidFill>
+                        <a:srgbClr val="D3D9E4"/>
+                      </a:solidFill>
+                      <a:prstDash val="solid"/>
+                      <a:round/>
+                      <a:headEnd type="none" w="med" len="med"/>
+                      <a:tailEnd type="none" w="med" len="med"/>
+                    </a:lnR>
+                    <a:lnT w="9525" cap="flat" cmpd="sng" algn="ctr">
+                      <a:solidFill>
+                        <a:srgbClr val="D3D9E4"/>
+                      </a:solidFill>
+                      <a:prstDash val="solid"/>
+                      <a:round/>
+                      <a:headEnd type="none" w="med" len="med"/>
+                      <a:tailEnd type="none" w="med" len="med"/>
+                    </a:lnT>
+                    <a:lnB w="9525" cap="flat" cmpd="sng" algn="ctr">
+                      <a:solidFill>
+                        <a:srgbClr val="D3D9E4"/>
+                      </a:solidFill>
+                      <a:prstDash val="solid"/>
+                      <a:round/>
+                      <a:headEnd type="none" w="med" len="med"/>
+                      <a:tailEnd type="none" w="med" len="med"/>
+                    </a:lnB>
+                    <a:solidFill>
+                      <a:srgbClr val="FBFCFE"/>
+                    </a:solidFill>
+                  </a:tcPr>
+                </a:tc>
+                <a:tc>
+                  <a:txBody>
+                    <a:bodyPr/>
+                    <a:lstStyle/>
+                    <a:p>
+                      <a:pPr indent="0" marL="0">
+                        <a:buNone/>
+                      </a:pPr>
+                      <a:r>
+                        <a:rPr lang="el-GR" sz="1150" dirty="0">
+                          <a:solidFill>
+                            <a:srgbClr val="171B26"/>
+                          </a:solidFill>
+                          <a:latin typeface="Segoe UI" pitchFamily="34" charset="0"/>
+                          <a:ea typeface="Segoe UI" pitchFamily="34" charset="-122"/>
+                          <a:cs typeface="Segoe UI" pitchFamily="34" charset="-120"/>
+                        </a:rPr>
+                        <a:t>Το Xcode, που χρειάζεται για iPhone, τρέχει μόνο σε macOS</a:t>
+                      </a:r>
+                      <a:endParaRPr lang="el-GR" sz="1150" dirty="0"/>
+                    </a:p>
+                  </a:txBody>
+                  <a:tcPr marL="91440" marR="91440" marT="45720" marB="45720" anchor="ctr">
+                    <a:lnL w="9525" cap="flat" cmpd="sng" algn="ctr">
+                      <a:solidFill>
+                        <a:srgbClr val="D3D9E4"/>
+                      </a:solidFill>
+                      <a:prstDash val="solid"/>
+                      <a:round/>
+                      <a:headEnd type="none" w="med" len="med"/>
+                      <a:tailEnd type="none" w="med" len="med"/>
+                    </a:lnL>
+                    <a:lnR w="9525" cap="flat" cmpd="sng" algn="ctr">
+                      <a:solidFill>
+                        <a:srgbClr val="D3D9E4"/>
+                      </a:solidFill>
+                      <a:prstDash val="solid"/>
+                      <a:round/>
+                      <a:headEnd type="none" w="med" len="med"/>
+                      <a:tailEnd type="none" w="med" len="med"/>
+                    </a:lnR>
+                    <a:lnT w="9525" cap="flat" cmpd="sng" algn="ctr">
+                      <a:solidFill>
+                        <a:srgbClr val="D3D9E4"/>
+                      </a:solidFill>
+                      <a:prstDash val="solid"/>
+                      <a:round/>
+                      <a:headEnd type="none" w="med" len="med"/>
+                      <a:tailEnd type="none" w="med" len="med"/>
+                    </a:lnT>
+                    <a:lnB w="9525" cap="flat" cmpd="sng" algn="ctr">
+                      <a:solidFill>
+                        <a:srgbClr val="D3D9E4"/>
+                      </a:solidFill>
+                      <a:prstDash val="solid"/>
+                      <a:round/>
+                      <a:headEnd type="none" w="med" len="med"/>
+                      <a:tailEnd type="none" w="med" len="med"/>
+                    </a:lnB>
+                    <a:solidFill>
+                      <a:srgbClr val="FBFCFE"/>
+                    </a:solidFill>
+                  </a:tcPr>
+                </a:tc>
+              </a:tr>
+            </a:tbl>
+          </a:graphicData>
+        </a:graphic>
+      </p:graphicFrame>
+      <p:sp>
+        <p:nvSpPr>
+          <p:cNvPr id="108" name="Shape 108"/>
+          <p:cNvSpPr/>
+          <p:nvPr/>
+        </p:nvSpPr>
+        <p:spPr>
+          <a:xfrm>
+            <a:off x="566928" y="4873752"/>
+            <a:ext cx="10881360" cy="1115568"/>
+          </a:xfrm>
+          <a:prstGeom prst="roundRect">
+            <a:avLst>
+              <a:gd name="adj" fmla="val 1935"/>
+            </a:avLst>
+          </a:prstGeom>
+          <a:solidFill>
+            <a:srgbClr val="F6EDD6"/>
+          </a:solidFill>
+          <a:ln w="12700">
+            <a:solidFill>
+              <a:srgbClr val="F6EDD6"/>
+            </a:solidFill>
+            <a:prstDash val="solid"/>
+          </a:ln>
+        </p:spPr>
+        <p:txBody>
+          <a:bodyPr/>
+          <a:p/>
+        </p:txBody>
+      </p:sp>
+      <p:sp>
+        <p:nvSpPr>
+          <p:cNvPr id="109" name="Text 109"/>
+          <p:cNvSpPr txBox="1"/>
+          <p:nvPr/>
+        </p:nvSpPr>
+        <p:spPr>
+          <a:xfrm>
+            <a:off x="731520" y="5001768"/>
+            <a:ext cx="10552176" cy="274320"/>
+          </a:xfrm>
+          <a:prstGeom prst="rect">
+            <a:avLst/>
+          </a:prstGeom>
+          <a:noFill/>
+          <a:ln/>
+        </p:spPr>
+        <p:txBody>
+          <a:bodyPr wrap="square" lIns="0" tIns="0" rIns="0" bIns="0" rtlCol="0" anchor="ctr"/>
+          <a:lstStyle/>
+          <a:p>
+            <a:pPr indent="0" marL="0">
+              <a:buNone/>
+            </a:pPr>
+            <a:r>
+              <a:rPr lang="el-GR" sz="1400" b="1" dirty="0">
+                <a:solidFill>
+                  <a:srgbClr val="171B26"/>
+                </a:solidFill>
+                <a:latin typeface="Segoe UI" pitchFamily="34" charset="0"/>
+                <a:ea typeface="Segoe UI" pitchFamily="34" charset="-122"/>
+                <a:cs typeface="Segoe UI" pitchFamily="34" charset="-120"/>
+              </a:rPr>
+              <a:t>Τρεις ερωτήσεις πριν διαλέξεις</a:t>
+            </a:r>
+            <a:endParaRPr lang="el-GR" sz="1400" dirty="0"/>
+          </a:p>
+        </p:txBody>
+      </p:sp>
+      <p:sp>
+        <p:nvSpPr>
+          <p:cNvPr id="110" name="Text 110"/>
+          <p:cNvSpPr txBox="1"/>
+          <p:nvPr/>
+        </p:nvSpPr>
+        <p:spPr>
+          <a:xfrm>
+            <a:off x="731520" y="5349240"/>
+            <a:ext cx="10552176" cy="548640"/>
+          </a:xfrm>
+          <a:prstGeom prst="rect">
+            <a:avLst/>
+          </a:prstGeom>
+          <a:noFill/>
+          <a:ln/>
+        </p:spPr>
+        <p:txBody>
+          <a:bodyPr wrap="square" lIns="0" tIns="0" rIns="0" bIns="0" rtlCol="0" anchor="t"/>
+          <a:lstStyle/>
+          <a:p>
+            <a:pPr indent="0" marL="0">
+              <a:lnSpc>
+                <a:spcPct val="112000"/>
+              </a:lnSpc>
+              <a:spcAft>
+                <a:spcPts val="400"/>
+              </a:spcAft>
+              <a:buNone/>
+            </a:pPr>
+            <a:r>
+              <a:rPr lang="el-GR" sz="1200" b="1" dirty="0">
+                <a:solidFill>
+                  <a:srgbClr val="171B26"/>
+                </a:solidFill>
+                <a:latin typeface="Segoe UI" pitchFamily="34" charset="0"/>
+                <a:ea typeface="Segoe UI" pitchFamily="34" charset="-122"/>
+                <a:cs typeface="Segoe UI" pitchFamily="34" charset="-120"/>
+              </a:rPr>
+              <a:t>Πόσο κοστίζει;</a:t>
+            </a:r>
+            <a:r>
+              <a:rPr lang="el-GR" sz="1200" dirty="0">
+                <a:solidFill>
+                  <a:srgbClr val="4A5265"/>
+                </a:solidFill>
+                <a:latin typeface="Segoe UI" pitchFamily="34" charset="0"/>
+                <a:ea typeface="Segoe UI" pitchFamily="34" charset="-122"/>
+                <a:cs typeface="Segoe UI" pitchFamily="34" charset="-120"/>
+              </a:rPr>
+              <a:t xml:space="preserve"> · </a:t>
+            </a:r>
+            <a:r>
+              <a:rPr lang="el-GR" sz="1200" b="1" dirty="0">
+                <a:solidFill>
+                  <a:srgbClr val="171B26"/>
+                </a:solidFill>
+                <a:latin typeface="Segoe UI" pitchFamily="34" charset="0"/>
+                <a:ea typeface="Segoe UI" pitchFamily="34" charset="-122"/>
+                <a:cs typeface="Segoe UI" pitchFamily="34" charset="-120"/>
+              </a:rPr>
+              <a:t>Ποιο λογισμικό χρειάζεται η δουλειά;</a:t>
+            </a:r>
+            <a:r>
+              <a:rPr lang="el-GR" sz="1200" dirty="0">
+                <a:solidFill>
+                  <a:srgbClr val="4A5265"/>
+                </a:solidFill>
+                <a:latin typeface="Segoe UI" pitchFamily="34" charset="0"/>
+                <a:ea typeface="Segoe UI" pitchFamily="34" charset="-122"/>
+                <a:cs typeface="Segoe UI" pitchFamily="34" charset="-120"/>
+              </a:rPr>
+              <a:t xml:space="preserve"> · </a:t>
+            </a:r>
+            <a:r>
+              <a:rPr lang="el-GR" sz="1200" b="1" dirty="0">
+                <a:solidFill>
+                  <a:srgbClr val="171B26"/>
+                </a:solidFill>
+                <a:latin typeface="Segoe UI" pitchFamily="34" charset="0"/>
+                <a:ea typeface="Segoe UI" pitchFamily="34" charset="-122"/>
+                <a:cs typeface="Segoe UI" pitchFamily="34" charset="-120"/>
+              </a:rPr>
+              <a:t>Πόσο σταθερό και ασφαλές πρέπει να είναι;</a:t>
+            </a:r>
+            <a:r>
+              <a:rPr lang="el-GR" sz="1200" dirty="0">
+                <a:solidFill>
+                  <a:srgbClr val="4A5265"/>
+                </a:solidFill>
+                <a:latin typeface="Segoe UI" pitchFamily="34" charset="0"/>
+                <a:ea typeface="Segoe UI" pitchFamily="34" charset="-122"/>
+                <a:cs typeface="Segoe UI" pitchFamily="34" charset="-120"/>
+              </a:rPr>
+              <a:t xml:space="preserve"> Το ΛΣ το διαλέγει η δουλειά, όχι η συνήθεια.</a:t>
+            </a:r>
+            <a:endParaRPr lang="el-GR" sz="1200" dirty="0"/>
+          </a:p>
+        </p:txBody>
+      </p:sp>
+    </p:spTree>
+  </p:cSld>
+  <p:clrMapOvr>
+    <a:masterClrMapping/>
+  </p:clrMapOvr>
+</p:sld>
+</file>
+
+<file path=ppt/slides/slide18.xml><?xml version="1.0" encoding="utf-8"?>
+<p:sld xmlns:a="http://schemas.openxmlformats.org/drawingml/2006/main" xmlns:p="http://schemas.openxmlformats.org/presentationml/2006/main" xmlns:r="http://schemas.openxmlformats.org/officeDocument/2006/relationships">
+  <p:cSld>
+    <p:spTree>
+      <p:nvGrpSpPr>
+        <p:cNvPr id="1" name=""/>
+        <p:cNvGrpSpPr/>
+        <p:nvPr/>
+      </p:nvGrpSpPr>
+      <p:grpSpPr/>
+      <p:sp>
+        <p:nvSpPr>
+          <p:cNvPr id="101" name="Shape 101"/>
+          <p:cNvSpPr/>
+          <p:nvPr/>
+        </p:nvSpPr>
+        <p:spPr>
+          <a:xfrm>
+            <a:off x="0" y="0"/>
+            <a:ext cx="109728" cy="6858000"/>
+          </a:xfrm>
+          <a:prstGeom prst="rect">
+            <a:avLst/>
+          </a:prstGeom>
+          <a:solidFill>
+            <a:srgbClr val="2F4BD8"/>
+          </a:solidFill>
+          <a:ln w="12700">
+            <a:solidFill>
+              <a:srgbClr val="2F4BD8"/>
+            </a:solidFill>
+            <a:prstDash val="solid"/>
+          </a:ln>
+        </p:spPr>
+        <p:txBody>
+          <a:bodyPr/>
+          <a:p/>
+        </p:txBody>
+      </p:sp>
+      <p:pic>
+        <p:nvPicPr>
+          <p:cNvPr id="102" name="Picture 101" descr="image.png"/>
+          <p:cNvPicPr>
+            <a:picLocks noChangeAspect="1"/>
+          </p:cNvPicPr>
+          <p:nvPr/>
+        </p:nvPicPr>
+        <p:blipFill>
+          <a:blip r:embed="rId2"/>
+          <a:stretch>
+            <a:fillRect/>
+          </a:stretch>
+        </p:blipFill>
+        <p:spPr>
+          <a:xfrm>
+            <a:off x="9189720" y="274320"/>
+            <a:ext cx="310896" cy="310896"/>
+          </a:xfrm>
+          <a:prstGeom prst="rect">
+            <a:avLst/>
+          </a:prstGeom>
+        </p:spPr>
+      </p:pic>
+      <p:sp>
+        <p:nvSpPr>
+          <p:cNvPr id="102" name="Text 102"/>
+          <p:cNvSpPr txBox="1"/>
+          <p:nvPr/>
+        </p:nvSpPr>
+        <p:spPr>
+          <a:xfrm>
+            <a:off x="9573768" y="246888"/>
+            <a:ext cx="2468880" cy="365760"/>
+          </a:xfrm>
+          <a:prstGeom prst="rect">
+            <a:avLst/>
+          </a:prstGeom>
+          <a:noFill/>
+          <a:ln/>
+        </p:spPr>
+        <p:txBody>
+          <a:bodyPr wrap="square" lIns="0" tIns="0" rIns="0" bIns="0" rtlCol="0" anchor="ctr"/>
+          <a:lstStyle/>
+          <a:p>
+            <a:pPr indent="0" marL="0">
+              <a:buNone/>
+            </a:pPr>
+            <a:r>
+              <a:rPr lang="el-GR" sz="950" b="1" dirty="0">
+                <a:solidFill>
+                  <a:srgbClr val="4A5265"/>
+                </a:solidFill>
+                <a:latin typeface="Segoe UI" pitchFamily="34" charset="0"/>
+                <a:ea typeface="Segoe UI" pitchFamily="34" charset="-122"/>
+                <a:cs typeface="Segoe UI" pitchFamily="34" charset="-120"/>
+              </a:rPr>
+              <a:t>ΣΑΕΚ Μαρκοπούλου</a:t>
+            </a:r>
+            <a:endParaRPr lang="el-GR" sz="950" dirty="0"/>
+          </a:p>
+          <a:p>
+            <a:pPr indent="0" marL="0">
+              <a:buNone/>
+            </a:pPr>
+            <a:r>
+              <a:rPr lang="el-GR" sz="950" dirty="0">
+                <a:solidFill>
+                  <a:srgbClr val="8A91A3"/>
+                </a:solidFill>
+                <a:latin typeface="Segoe UI" pitchFamily="34" charset="0"/>
+                <a:ea typeface="Segoe UI" pitchFamily="34" charset="-122"/>
+                <a:cs typeface="Segoe UI" pitchFamily="34" charset="-120"/>
+              </a:rPr>
+              <a:t>Σύγχρονα Λειτουργικά Συστήματα</a:t>
+            </a:r>
+            <a:endParaRPr lang="el-GR" sz="950" dirty="0"/>
+          </a:p>
+        </p:txBody>
+      </p:sp>
+      <p:sp>
+        <p:nvSpPr>
+          <p:cNvPr id="103" name="Text 103"/>
+          <p:cNvSpPr txBox="1"/>
+          <p:nvPr/>
+        </p:nvSpPr>
+        <p:spPr>
+          <a:xfrm>
+            <a:off x="8503920" y="6419088"/>
+            <a:ext cx="3154680" cy="237744"/>
+          </a:xfrm>
+          <a:prstGeom prst="rect">
+            <a:avLst/>
+          </a:prstGeom>
+          <a:noFill/>
+          <a:ln/>
+        </p:spPr>
+        <p:txBody>
+          <a:bodyPr wrap="square" lIns="0" tIns="0" rIns="0" bIns="0" rtlCol="0" anchor="ctr"/>
+          <a:lstStyle/>
+          <a:p>
+            <a:pPr indent="0" marL="0" algn="r">
+              <a:buNone/>
+            </a:pPr>
+            <a:r>
+              <a:rPr lang="el-GR" sz="900" dirty="0">
+                <a:solidFill>
+                  <a:srgbClr val="8A91A3"/>
+                </a:solidFill>
+                <a:latin typeface="Consolas" pitchFamily="34" charset="0"/>
+                <a:ea typeface="Consolas" pitchFamily="34" charset="-122"/>
+                <a:cs typeface="Consolas" pitchFamily="34" charset="-120"/>
+              </a:rPr>
+              <a:t>Λαμπρόπουλος Χρήστος</a:t>
+            </a:r>
+            <a:endParaRPr lang="el-GR" sz="900" dirty="0"/>
+          </a:p>
+        </p:txBody>
+      </p:sp>
+      <p:sp>
+        <p:nvSpPr>
+          <p:cNvPr id="104" name="Text 104"/>
+          <p:cNvSpPr txBox="1"/>
+          <p:nvPr/>
+        </p:nvSpPr>
+        <p:spPr>
+          <a:xfrm>
+            <a:off x="566928" y="384048"/>
+            <a:ext cx="8412480" cy="237744"/>
+          </a:xfrm>
+          <a:prstGeom prst="rect">
+            <a:avLst/>
+          </a:prstGeom>
+          <a:noFill/>
+          <a:ln/>
+        </p:spPr>
+        <p:txBody>
+          <a:bodyPr wrap="square" lIns="0" tIns="0" rIns="0" bIns="0" rtlCol="0" anchor="ctr"/>
+          <a:lstStyle/>
+          <a:p>
+            <a:pPr indent="0" marL="0">
+              <a:buNone/>
+            </a:pPr>
+            <a:r>
+              <a:rPr lang="el-GR" sz="1000" spc="140" dirty="0">
+                <a:solidFill>
+                  <a:srgbClr val="2F4BD8"/>
+                </a:solidFill>
+                <a:latin typeface="Consolas" pitchFamily="34" charset="0"/>
+                <a:ea typeface="Consolas" pitchFamily="34" charset="-122"/>
+                <a:cs typeface="Consolas" pitchFamily="34" charset="-120"/>
+              </a:rPr>
+              <a:t xml:space="preserve">10  </a:t>
+            </a:r>
+            <a:r>
+              <a:rPr lang="el-GR" sz="1000" spc="140" dirty="0">
+                <a:solidFill>
+                  <a:srgbClr val="8A91A3"/>
+                </a:solidFill>
+                <a:latin typeface="Consolas" pitchFamily="34" charset="0"/>
+                <a:ea typeface="Consolas" pitchFamily="34" charset="-122"/>
+                <a:cs typeface="Consolas" pitchFamily="34" charset="-120"/>
+              </a:rPr>
+              <a:t>ΑΔΕΙΕΣ ΧΡΗΣΗΣ · ΠΑΡΑΔΕΙΓΜΑΤΑ</a:t>
+            </a:r>
+            <a:endParaRPr lang="el-GR" sz="1000" dirty="0"/>
+          </a:p>
+        </p:txBody>
+      </p:sp>
+      <p:sp>
+        <p:nvSpPr>
+          <p:cNvPr id="105" name="Text 105"/>
+          <p:cNvSpPr txBox="1"/>
+          <p:nvPr/>
+        </p:nvSpPr>
+        <p:spPr>
+          <a:xfrm>
+            <a:off x="530352" y="658368"/>
+            <a:ext cx="8503920" cy="566928"/>
+          </a:xfrm>
+          <a:prstGeom prst="rect">
+            <a:avLst/>
+          </a:prstGeom>
+          <a:noFill/>
+          <a:ln/>
+        </p:spPr>
+        <p:txBody>
+          <a:bodyPr wrap="square" lIns="0" tIns="0" rIns="0" bIns="0" rtlCol="0" anchor="ctr"/>
+          <a:lstStyle/>
+          <a:p>
+            <a:pPr indent="0" marL="0">
+              <a:buNone/>
+            </a:pPr>
+            <a:r>
+              <a:rPr lang="el-GR" sz="2600" b="1" dirty="0">
+                <a:solidFill>
+                  <a:srgbClr val="171B26"/>
+                </a:solidFill>
+                <a:latin typeface="Segoe UI" pitchFamily="34" charset="0"/>
+                <a:ea typeface="Segoe UI" pitchFamily="34" charset="-122"/>
+                <a:cs typeface="Segoe UI" pitchFamily="34" charset="-120"/>
+              </a:rPr>
+              <a:t>Εμπορικό ή ΕΛ/ΛΑΚ; Γνωστά προγράμματα</a:t>
+            </a:r>
+            <a:endParaRPr lang="el-GR" sz="2600" dirty="0"/>
+          </a:p>
+        </p:txBody>
+      </p:sp>
+      <p:sp>
+        <p:nvSpPr>
+          <p:cNvPr id="106" name="Text 106"/>
+          <p:cNvSpPr txBox="1"/>
+          <p:nvPr/>
+        </p:nvSpPr>
+        <p:spPr>
+          <a:xfrm>
+            <a:off x="9098280" y="749808"/>
+            <a:ext cx="2331720" cy="274320"/>
+          </a:xfrm>
+          <a:prstGeom prst="rect">
+            <a:avLst/>
+          </a:prstGeom>
+          <a:noFill/>
+          <a:ln/>
+        </p:spPr>
+        <p:txBody>
+          <a:bodyPr wrap="square" lIns="0" tIns="0" rIns="0" bIns="0" rtlCol="0" anchor="ctr"/>
+          <a:lstStyle/>
+          <a:p>
+            <a:pPr indent="0" marL="0" algn="r">
+              <a:buNone/>
+            </a:pPr>
+            <a:r>
+              <a:rPr lang="el-GR" sz="1100" b="1" dirty="0">
+                <a:solidFill>
+                  <a:srgbClr val="1B6B52"/>
+                </a:solidFill>
+                <a:latin typeface="Consolas" pitchFamily="34" charset="0"/>
+                <a:ea typeface="Consolas" pitchFamily="34" charset="-122"/>
+                <a:cs typeface="Consolas" pitchFamily="34" charset="-120"/>
+              </a:rPr>
+              <a:t>ΓΙΑ ΤΟ SITE</a:t>
+            </a:r>
+            <a:endParaRPr lang="el-GR" sz="1100" dirty="0"/>
+          </a:p>
+        </p:txBody>
+      </p:sp>
+      <p:graphicFrame>
+        <p:nvGraphicFramePr>
+          <p:cNvPr id="107" name="Table 107"/>
+          <p:cNvGraphicFramePr>
+            <a:graphicFrameLocks noGrp="1"/>
+          </p:cNvGraphicFramePr>
+          <p:nvPr/>
+        </p:nvGraphicFramePr>
+        <p:xfrm>
+          <a:off x="566928" y="1463040"/>
+          <a:ext cx="10881360" cy="3127248"/>
+        </p:xfrm>
+        <a:graphic>
+          <a:graphicData uri="http://schemas.openxmlformats.org/drawingml/2006/table">
+            <a:tbl>
+              <a:tblPr/>
+              <a:tblGrid>
+                <a:gridCol w="2743200"/>
+                <a:gridCol w="3291840"/>
+                <a:gridCol w="2011680"/>
+                <a:gridCol w="2834640"/>
+              </a:tblGrid>
+              <a:tr h="329184">
+                <a:tc>
+                  <a:txBody>
+                    <a:bodyPr/>
+                    <a:lstStyle/>
+                    <a:p>
+                      <a:pPr indent="0" marL="0">
+                        <a:buNone/>
+                      </a:pPr>
+                      <a:r>
+                        <a:rPr lang="el-GR" sz="900" b="1" dirty="0">
+                          <a:solidFill>
+                            <a:srgbClr val="8A91A3"/>
+                          </a:solidFill>
+                          <a:latin typeface="Consolas" pitchFamily="34" charset="0"/>
+                          <a:ea typeface="Consolas" pitchFamily="34" charset="-122"/>
+                          <a:cs typeface="Consolas" pitchFamily="34" charset="-120"/>
+                        </a:rPr>
+                        <a:t>ΠΡΟΓΡΑΜΜΑ</a:t>
+                      </a:r>
+                      <a:endParaRPr lang="el-GR" sz="1100" dirty="0"/>
+                    </a:p>
+                  </a:txBody>
+                  <a:tcPr marL="91440" marR="91440" marT="45720" marB="45720" anchor="ctr">
+                    <a:lnL w="9525" cap="flat" cmpd="sng" algn="ctr">
+                      <a:solidFill>
+                        <a:srgbClr val="D3D9E4"/>
+                      </a:solidFill>
+                      <a:prstDash val="solid"/>
+                      <a:round/>
+                      <a:headEnd type="none" w="med" len="med"/>
+                      <a:tailEnd type="none" w="med" len="med"/>
+                    </a:lnL>
+                    <a:lnR w="9525" cap="flat" cmpd="sng" algn="ctr">
+                      <a:solidFill>
+                        <a:srgbClr val="D3D9E4"/>
+                      </a:solidFill>
+                      <a:prstDash val="solid"/>
+                      <a:round/>
+                      <a:headEnd type="none" w="med" len="med"/>
+                      <a:tailEnd type="none" w="med" len="med"/>
+                    </a:lnR>
+                    <a:lnT w="9525" cap="flat" cmpd="sng" algn="ctr">
+                      <a:solidFill>
+                        <a:srgbClr val="D3D9E4"/>
+                      </a:solidFill>
+                      <a:prstDash val="solid"/>
+                      <a:round/>
+                      <a:headEnd type="none" w="med" len="med"/>
+                      <a:tailEnd type="none" w="med" len="med"/>
+                    </a:lnT>
+                    <a:lnB w="9525" cap="flat" cmpd="sng" algn="ctr">
+                      <a:solidFill>
+                        <a:srgbClr val="D3D9E4"/>
+                      </a:solidFill>
+                      <a:prstDash val="solid"/>
+                      <a:round/>
+                      <a:headEnd type="none" w="med" len="med"/>
+                      <a:tailEnd type="none" w="med" len="med"/>
+                    </a:lnB>
+                    <a:solidFill>
+                      <a:srgbClr val="F1F3FA"/>
+                    </a:solidFill>
+                  </a:tcPr>
+                </a:tc>
+                <a:tc>
+                  <a:txBody>
+                    <a:bodyPr/>
+                    <a:lstStyle/>
+                    <a:p>
+                      <a:pPr indent="0" marL="0">
+                        <a:buNone/>
+                      </a:pPr>
+                      <a:r>
+                        <a:rPr lang="el-GR" sz="900" b="1" dirty="0">
+                          <a:solidFill>
+                            <a:srgbClr val="8A91A3"/>
+                          </a:solidFill>
+                          <a:latin typeface="Consolas" pitchFamily="34" charset="0"/>
+                          <a:ea typeface="Consolas" pitchFamily="34" charset="-122"/>
+                          <a:cs typeface="Consolas" pitchFamily="34" charset="-120"/>
+                        </a:rPr>
+                        <a:t>ΤΙ ΕΙΝΑΙ</a:t>
+                      </a:r>
+                      <a:endParaRPr lang="el-GR" sz="1100" dirty="0"/>
+                    </a:p>
+                  </a:txBody>
+                  <a:tcPr marL="91440" marR="91440" marT="45720" marB="45720" anchor="ctr">
+                    <a:lnL w="9525" cap="flat" cmpd="sng" algn="ctr">
+                      <a:solidFill>
+                        <a:srgbClr val="D3D9E4"/>
+                      </a:solidFill>
+                      <a:prstDash val="solid"/>
+                      <a:round/>
+                      <a:headEnd type="none" w="med" len="med"/>
+                      <a:tailEnd type="none" w="med" len="med"/>
+                    </a:lnL>
+                    <a:lnR w="9525" cap="flat" cmpd="sng" algn="ctr">
+                      <a:solidFill>
+                        <a:srgbClr val="D3D9E4"/>
+                      </a:solidFill>
+                      <a:prstDash val="solid"/>
+                      <a:round/>
+                      <a:headEnd type="none" w="med" len="med"/>
+                      <a:tailEnd type="none" w="med" len="med"/>
+                    </a:lnR>
+                    <a:lnT w="9525" cap="flat" cmpd="sng" algn="ctr">
+                      <a:solidFill>
+                        <a:srgbClr val="D3D9E4"/>
+                      </a:solidFill>
+                      <a:prstDash val="solid"/>
+                      <a:round/>
+                      <a:headEnd type="none" w="med" len="med"/>
+                      <a:tailEnd type="none" w="med" len="med"/>
+                    </a:lnT>
+                    <a:lnB w="9525" cap="flat" cmpd="sng" algn="ctr">
+                      <a:solidFill>
+                        <a:srgbClr val="D3D9E4"/>
+                      </a:solidFill>
+                      <a:prstDash val="solid"/>
+                      <a:round/>
+                      <a:headEnd type="none" w="med" len="med"/>
+                      <a:tailEnd type="none" w="med" len="med"/>
+                    </a:lnB>
+                    <a:solidFill>
+                      <a:srgbClr val="F1F3FA"/>
+                    </a:solidFill>
+                  </a:tcPr>
+                </a:tc>
+                <a:tc>
+                  <a:txBody>
+                    <a:bodyPr/>
+                    <a:lstStyle/>
+                    <a:p>
+                      <a:pPr indent="0" marL="0">
+                        <a:buNone/>
+                      </a:pPr>
+                      <a:r>
+                        <a:rPr lang="el-GR" sz="900" b="1" dirty="0">
+                          <a:solidFill>
+                            <a:srgbClr val="8A91A3"/>
+                          </a:solidFill>
+                          <a:latin typeface="Consolas" pitchFamily="34" charset="0"/>
+                          <a:ea typeface="Consolas" pitchFamily="34" charset="-122"/>
+                          <a:cs typeface="Consolas" pitchFamily="34" charset="-120"/>
+                        </a:rPr>
+                        <a:t>ΑΔΕΙΑ</a:t>
+                      </a:r>
+                      <a:endParaRPr lang="el-GR" sz="1100" dirty="0"/>
+                    </a:p>
+                  </a:txBody>
+                  <a:tcPr marL="91440" marR="91440" marT="45720" marB="45720" anchor="ctr">
+                    <a:lnL w="9525" cap="flat" cmpd="sng" algn="ctr">
+                      <a:solidFill>
+                        <a:srgbClr val="D3D9E4"/>
+                      </a:solidFill>
+                      <a:prstDash val="solid"/>
+                      <a:round/>
+                      <a:headEnd type="none" w="med" len="med"/>
+                      <a:tailEnd type="none" w="med" len="med"/>
+                    </a:lnL>
+                    <a:lnR w="9525" cap="flat" cmpd="sng" algn="ctr">
+                      <a:solidFill>
+                        <a:srgbClr val="D3D9E4"/>
+                      </a:solidFill>
+                      <a:prstDash val="solid"/>
+                      <a:round/>
+                      <a:headEnd type="none" w="med" len="med"/>
+                      <a:tailEnd type="none" w="med" len="med"/>
+                    </a:lnR>
+                    <a:lnT w="9525" cap="flat" cmpd="sng" algn="ctr">
+                      <a:solidFill>
+                        <a:srgbClr val="D3D9E4"/>
+                      </a:solidFill>
+                      <a:prstDash val="solid"/>
+                      <a:round/>
+                      <a:headEnd type="none" w="med" len="med"/>
+                      <a:tailEnd type="none" w="med" len="med"/>
+                    </a:lnT>
+                    <a:lnB w="9525" cap="flat" cmpd="sng" algn="ctr">
+                      <a:solidFill>
+                        <a:srgbClr val="D3D9E4"/>
+                      </a:solidFill>
+                      <a:prstDash val="solid"/>
+                      <a:round/>
+                      <a:headEnd type="none" w="med" len="med"/>
+                      <a:tailEnd type="none" w="med" len="med"/>
+                    </a:lnB>
+                    <a:solidFill>
+                      <a:srgbClr val="F1F3FA"/>
+                    </a:solidFill>
+                  </a:tcPr>
+                </a:tc>
+                <a:tc>
+                  <a:txBody>
+                    <a:bodyPr/>
+                    <a:lstStyle/>
+                    <a:p>
+                      <a:pPr indent="0" marL="0">
+                        <a:buNone/>
+                      </a:pPr>
+                      <a:r>
+                        <a:rPr lang="el-GR" sz="900" b="1" dirty="0">
+                          <a:solidFill>
+                            <a:srgbClr val="8A91A3"/>
+                          </a:solidFill>
+                          <a:latin typeface="Consolas" pitchFamily="34" charset="0"/>
+                          <a:ea typeface="Consolas" pitchFamily="34" charset="-122"/>
+                          <a:cs typeface="Consolas" pitchFamily="34" charset="-120"/>
+                        </a:rPr>
+                        <a:t>ΑΠΟ ΠΟΙΟΝ</a:t>
+                      </a:r>
+                      <a:endParaRPr lang="el-GR" sz="1100" dirty="0"/>
+                    </a:p>
+                  </a:txBody>
+                  <a:tcPr marL="91440" marR="91440" marT="45720" marB="45720" anchor="ctr">
+                    <a:lnL w="9525" cap="flat" cmpd="sng" algn="ctr">
+                      <a:solidFill>
+                        <a:srgbClr val="D3D9E4"/>
+                      </a:solidFill>
+                      <a:prstDash val="solid"/>
+                      <a:round/>
+                      <a:headEnd type="none" w="med" len="med"/>
+                      <a:tailEnd type="none" w="med" len="med"/>
+                    </a:lnL>
+                    <a:lnR w="9525" cap="flat" cmpd="sng" algn="ctr">
+                      <a:solidFill>
+                        <a:srgbClr val="D3D9E4"/>
+                      </a:solidFill>
+                      <a:prstDash val="solid"/>
+                      <a:round/>
+                      <a:headEnd type="none" w="med" len="med"/>
+                      <a:tailEnd type="none" w="med" len="med"/>
+                    </a:lnR>
+                    <a:lnT w="9525" cap="flat" cmpd="sng" algn="ctr">
+                      <a:solidFill>
+                        <a:srgbClr val="D3D9E4"/>
+                      </a:solidFill>
+                      <a:prstDash val="solid"/>
+                      <a:round/>
+                      <a:headEnd type="none" w="med" len="med"/>
+                      <a:tailEnd type="none" w="med" len="med"/>
+                    </a:lnT>
+                    <a:lnB w="9525" cap="flat" cmpd="sng" algn="ctr">
+                      <a:solidFill>
+                        <a:srgbClr val="D3D9E4"/>
+                      </a:solidFill>
+                      <a:prstDash val="solid"/>
+                      <a:round/>
+                      <a:headEnd type="none" w="med" len="med"/>
+                      <a:tailEnd type="none" w="med" len="med"/>
+                    </a:lnB>
+                    <a:solidFill>
+                      <a:srgbClr val="F1F3FA"/>
+                    </a:solidFill>
+                  </a:tcPr>
+                </a:tc>
+              </a:tr>
+              <a:tr h="310896">
+                <a:tc>
+                  <a:txBody>
+                    <a:bodyPr/>
+                    <a:lstStyle/>
+                    <a:p>
+                      <a:pPr indent="0" marL="0">
+                        <a:buNone/>
+                      </a:pPr>
+                      <a:r>
+                        <a:rPr lang="el-GR" sz="1100" b="1" dirty="0">
+                          <a:solidFill>
+                            <a:srgbClr val="171B26"/>
+                          </a:solidFill>
+                          <a:latin typeface="Segoe UI" pitchFamily="34" charset="0"/>
+                          <a:ea typeface="Segoe UI" pitchFamily="34" charset="-122"/>
+                          <a:cs typeface="Segoe UI" pitchFamily="34" charset="-120"/>
+                        </a:rPr>
+                        <a:t>Windows 11</a:t>
+                      </a:r>
+                      <a:endParaRPr lang="el-GR" sz="1100" dirty="0"/>
+                    </a:p>
+                  </a:txBody>
+                  <a:tcPr marL="91440" marR="91440" marT="45720" marB="45720" anchor="ctr">
+                    <a:lnL w="9525" cap="flat" cmpd="sng" algn="ctr">
+                      <a:solidFill>
+                        <a:srgbClr val="D3D9E4"/>
+                      </a:solidFill>
+                      <a:prstDash val="solid"/>
+                      <a:round/>
+                      <a:headEnd type="none" w="med" len="med"/>
+                      <a:tailEnd type="none" w="med" len="med"/>
+                    </a:lnL>
+                    <a:lnR w="9525" cap="flat" cmpd="sng" algn="ctr">
+                      <a:solidFill>
+                        <a:srgbClr val="D3D9E4"/>
+                      </a:solidFill>
+                      <a:prstDash val="solid"/>
+                      <a:round/>
+                      <a:headEnd type="none" w="med" len="med"/>
+                      <a:tailEnd type="none" w="med" len="med"/>
+                    </a:lnR>
+                    <a:lnT w="9525" cap="flat" cmpd="sng" algn="ctr">
+                      <a:solidFill>
+                        <a:srgbClr val="D3D9E4"/>
+                      </a:solidFill>
+                      <a:prstDash val="solid"/>
+                      <a:round/>
+                      <a:headEnd type="none" w="med" len="med"/>
+                      <a:tailEnd type="none" w="med" len="med"/>
+                    </a:lnT>
+                    <a:lnB w="9525" cap="flat" cmpd="sng" algn="ctr">
+                      <a:solidFill>
+                        <a:srgbClr val="D3D9E4"/>
+                      </a:solidFill>
+                      <a:prstDash val="solid"/>
+                      <a:round/>
+                      <a:headEnd type="none" w="med" len="med"/>
+                      <a:tailEnd type="none" w="med" len="med"/>
+                    </a:lnB>
+                    <a:solidFill>
+                      <a:srgbClr val="FBFCFE"/>
+                    </a:solidFill>
+                  </a:tcPr>
+                </a:tc>
+                <a:tc>
+                  <a:txBody>
+                    <a:bodyPr/>
+                    <a:lstStyle/>
+                    <a:p>
+                      <a:pPr indent="0" marL="0">
+                        <a:buNone/>
+                      </a:pPr>
+                      <a:r>
+                        <a:rPr lang="el-GR" sz="1100" dirty="0">
+                          <a:solidFill>
+                            <a:srgbClr val="171B26"/>
+                          </a:solidFill>
+                          <a:latin typeface="Segoe UI" pitchFamily="34" charset="0"/>
+                          <a:ea typeface="Segoe UI" pitchFamily="34" charset="-122"/>
+                          <a:cs typeface="Segoe UI" pitchFamily="34" charset="-120"/>
+                        </a:rPr>
+                        <a:t>Λειτουργικό σύστημα</a:t>
+                      </a:r>
+                      <a:endParaRPr lang="el-GR" sz="1100" dirty="0"/>
+                    </a:p>
+                  </a:txBody>
+                  <a:tcPr marL="91440" marR="91440" marT="45720" marB="45720" anchor="ctr">
+                    <a:lnL w="9525" cap="flat" cmpd="sng" algn="ctr">
+                      <a:solidFill>
+                        <a:srgbClr val="D3D9E4"/>
+                      </a:solidFill>
+                      <a:prstDash val="solid"/>
+                      <a:round/>
+                      <a:headEnd type="none" w="med" len="med"/>
+                      <a:tailEnd type="none" w="med" len="med"/>
+                    </a:lnL>
+                    <a:lnR w="9525" cap="flat" cmpd="sng" algn="ctr">
+                      <a:solidFill>
+                        <a:srgbClr val="D3D9E4"/>
+                      </a:solidFill>
+                      <a:prstDash val="solid"/>
+                      <a:round/>
+                      <a:headEnd type="none" w="med" len="med"/>
+                      <a:tailEnd type="none" w="med" len="med"/>
+                    </a:lnR>
+                    <a:lnT w="9525" cap="flat" cmpd="sng" algn="ctr">
+                      <a:solidFill>
+                        <a:srgbClr val="D3D9E4"/>
+                      </a:solidFill>
+                      <a:prstDash val="solid"/>
+                      <a:round/>
+                      <a:headEnd type="none" w="med" len="med"/>
+                      <a:tailEnd type="none" w="med" len="med"/>
+                    </a:lnT>
+                    <a:lnB w="9525" cap="flat" cmpd="sng" algn="ctr">
+                      <a:solidFill>
+                        <a:srgbClr val="D3D9E4"/>
+                      </a:solidFill>
+                      <a:prstDash val="solid"/>
+                      <a:round/>
+                      <a:headEnd type="none" w="med" len="med"/>
+                      <a:tailEnd type="none" w="med" len="med"/>
+                    </a:lnB>
+                    <a:solidFill>
+                      <a:srgbClr val="FBFCFE"/>
+                    </a:solidFill>
+                  </a:tcPr>
+                </a:tc>
+                <a:tc>
+                  <a:txBody>
+                    <a:bodyPr/>
+                    <a:lstStyle/>
+                    <a:p>
+                      <a:pPr indent="0" marL="0">
+                        <a:buNone/>
+                      </a:pPr>
+                      <a:r>
+                        <a:rPr lang="el-GR" sz="1100" dirty="0">
+                          <a:solidFill>
+                            <a:srgbClr val="171B26"/>
+                          </a:solidFill>
+                          <a:latin typeface="Segoe UI" pitchFamily="34" charset="0"/>
+                          <a:ea typeface="Segoe UI" pitchFamily="34" charset="-122"/>
+                          <a:cs typeface="Segoe UI" pitchFamily="34" charset="-120"/>
+                        </a:rPr>
+                        <a:t>Εμπορικό</a:t>
+                      </a:r>
+                      <a:endParaRPr lang="el-GR" sz="1100" dirty="0"/>
+                    </a:p>
+                  </a:txBody>
+                  <a:tcPr marL="91440" marR="91440" marT="45720" marB="45720" anchor="ctr">
+                    <a:lnL w="9525" cap="flat" cmpd="sng" algn="ctr">
+                      <a:solidFill>
+                        <a:srgbClr val="D3D9E4"/>
+                      </a:solidFill>
+                      <a:prstDash val="solid"/>
+                      <a:round/>
+                      <a:headEnd type="none" w="med" len="med"/>
+                      <a:tailEnd type="none" w="med" len="med"/>
+                    </a:lnL>
+                    <a:lnR w="9525" cap="flat" cmpd="sng" algn="ctr">
+                      <a:solidFill>
+                        <a:srgbClr val="D3D9E4"/>
+                      </a:solidFill>
+                      <a:prstDash val="solid"/>
+                      <a:round/>
+                      <a:headEnd type="none" w="med" len="med"/>
+                      <a:tailEnd type="none" w="med" len="med"/>
+                    </a:lnR>
+                    <a:lnT w="9525" cap="flat" cmpd="sng" algn="ctr">
+                      <a:solidFill>
+                        <a:srgbClr val="D3D9E4"/>
+                      </a:solidFill>
+                      <a:prstDash val="solid"/>
+                      <a:round/>
+                      <a:headEnd type="none" w="med" len="med"/>
+                      <a:tailEnd type="none" w="med" len="med"/>
+                    </a:lnT>
+                    <a:lnB w="9525" cap="flat" cmpd="sng" algn="ctr">
+                      <a:solidFill>
+                        <a:srgbClr val="D3D9E4"/>
+                      </a:solidFill>
+                      <a:prstDash val="solid"/>
+                      <a:round/>
+                      <a:headEnd type="none" w="med" len="med"/>
+                      <a:tailEnd type="none" w="med" len="med"/>
+                    </a:lnB>
+                    <a:solidFill>
+                      <a:srgbClr val="FBFCFE"/>
+                    </a:solidFill>
+                  </a:tcPr>
+                </a:tc>
+                <a:tc>
+                  <a:txBody>
+                    <a:bodyPr/>
+                    <a:lstStyle/>
+                    <a:p>
+                      <a:pPr indent="0" marL="0">
+                        <a:buNone/>
+                      </a:pPr>
+                      <a:r>
+                        <a:rPr lang="el-GR" sz="1100" dirty="0">
+                          <a:solidFill>
+                            <a:srgbClr val="171B26"/>
+                          </a:solidFill>
+                          <a:latin typeface="Segoe UI" pitchFamily="34" charset="0"/>
+                          <a:ea typeface="Segoe UI" pitchFamily="34" charset="-122"/>
+                          <a:cs typeface="Segoe UI" pitchFamily="34" charset="-120"/>
+                        </a:rPr>
+                        <a:t>Microsoft</a:t>
+                      </a:r>
+                      <a:endParaRPr lang="el-GR" sz="1100" dirty="0"/>
+                    </a:p>
+                  </a:txBody>
+                  <a:tcPr marL="91440" marR="91440" marT="45720" marB="45720" anchor="ctr">
+                    <a:lnL w="9525" cap="flat" cmpd="sng" algn="ctr">
+                      <a:solidFill>
+                        <a:srgbClr val="D3D9E4"/>
+                      </a:solidFill>
+                      <a:prstDash val="solid"/>
+                      <a:round/>
+                      <a:headEnd type="none" w="med" len="med"/>
+                      <a:tailEnd type="none" w="med" len="med"/>
+                    </a:lnL>
+                    <a:lnR w="9525" cap="flat" cmpd="sng" algn="ctr">
+                      <a:solidFill>
+                        <a:srgbClr val="D3D9E4"/>
+                      </a:solidFill>
+                      <a:prstDash val="solid"/>
+                      <a:round/>
+                      <a:headEnd type="none" w="med" len="med"/>
+                      <a:tailEnd type="none" w="med" len="med"/>
+                    </a:lnR>
+                    <a:lnT w="9525" cap="flat" cmpd="sng" algn="ctr">
+                      <a:solidFill>
+                        <a:srgbClr val="D3D9E4"/>
+                      </a:solidFill>
+                      <a:prstDash val="solid"/>
+                      <a:round/>
+                      <a:headEnd type="none" w="med" len="med"/>
+                      <a:tailEnd type="none" w="med" len="med"/>
+                    </a:lnT>
+                    <a:lnB w="9525" cap="flat" cmpd="sng" algn="ctr">
+                      <a:solidFill>
+                        <a:srgbClr val="D3D9E4"/>
+                      </a:solidFill>
+                      <a:prstDash val="solid"/>
+                      <a:round/>
+                      <a:headEnd type="none" w="med" len="med"/>
+                      <a:tailEnd type="none" w="med" len="med"/>
+                    </a:lnB>
+                    <a:solidFill>
+                      <a:srgbClr val="FBFCFE"/>
+                    </a:solidFill>
+                  </a:tcPr>
+                </a:tc>
+              </a:tr>
+              <a:tr h="310896">
+                <a:tc>
+                  <a:txBody>
+                    <a:bodyPr/>
+                    <a:lstStyle/>
+                    <a:p>
+                      <a:pPr indent="0" marL="0">
+                        <a:buNone/>
+                      </a:pPr>
+                      <a:r>
+                        <a:rPr lang="el-GR" sz="1100" b="1" dirty="0">
+                          <a:solidFill>
+                            <a:srgbClr val="171B26"/>
+                          </a:solidFill>
+                          <a:latin typeface="Segoe UI" pitchFamily="34" charset="0"/>
+                          <a:ea typeface="Segoe UI" pitchFamily="34" charset="-122"/>
+                          <a:cs typeface="Segoe UI" pitchFamily="34" charset="-120"/>
+                        </a:rPr>
+                        <a:t>macOS</a:t>
+                      </a:r>
+                      <a:endParaRPr lang="el-GR" sz="1100" dirty="0"/>
+                    </a:p>
+                  </a:txBody>
+                  <a:tcPr marL="91440" marR="91440" marT="45720" marB="45720" anchor="ctr">
+                    <a:lnL w="9525" cap="flat" cmpd="sng" algn="ctr">
+                      <a:solidFill>
+                        <a:srgbClr val="D3D9E4"/>
+                      </a:solidFill>
+                      <a:prstDash val="solid"/>
+                      <a:round/>
+                      <a:headEnd type="none" w="med" len="med"/>
+                      <a:tailEnd type="none" w="med" len="med"/>
+                    </a:lnL>
+                    <a:lnR w="9525" cap="flat" cmpd="sng" algn="ctr">
+                      <a:solidFill>
+                        <a:srgbClr val="D3D9E4"/>
+                      </a:solidFill>
+                      <a:prstDash val="solid"/>
+                      <a:round/>
+                      <a:headEnd type="none" w="med" len="med"/>
+                      <a:tailEnd type="none" w="med" len="med"/>
+                    </a:lnR>
+                    <a:lnT w="9525" cap="flat" cmpd="sng" algn="ctr">
+                      <a:solidFill>
+                        <a:srgbClr val="D3D9E4"/>
+                      </a:solidFill>
+                      <a:prstDash val="solid"/>
+                      <a:round/>
+                      <a:headEnd type="none" w="med" len="med"/>
+                      <a:tailEnd type="none" w="med" len="med"/>
+                    </a:lnT>
+                    <a:lnB w="9525" cap="flat" cmpd="sng" algn="ctr">
+                      <a:solidFill>
+                        <a:srgbClr val="D3D9E4"/>
+                      </a:solidFill>
+                      <a:prstDash val="solid"/>
+                      <a:round/>
+                      <a:headEnd type="none" w="med" len="med"/>
+                      <a:tailEnd type="none" w="med" len="med"/>
+                    </a:lnB>
+                    <a:solidFill>
+                      <a:srgbClr val="FBFCFE"/>
+                    </a:solidFill>
+                  </a:tcPr>
+                </a:tc>
+                <a:tc>
+                  <a:txBody>
+                    <a:bodyPr/>
+                    <a:lstStyle/>
+                    <a:p>
+                      <a:pPr indent="0" marL="0">
+                        <a:buNone/>
+                      </a:pPr>
+                      <a:r>
+                        <a:rPr lang="el-GR" sz="1100" dirty="0">
+                          <a:solidFill>
+                            <a:srgbClr val="171B26"/>
+                          </a:solidFill>
+                          <a:latin typeface="Segoe UI" pitchFamily="34" charset="0"/>
+                          <a:ea typeface="Segoe UI" pitchFamily="34" charset="-122"/>
+                          <a:cs typeface="Segoe UI" pitchFamily="34" charset="-120"/>
+                        </a:rPr>
+                        <a:t>Λειτουργικό σύστημα</a:t>
+                      </a:r>
+                      <a:endParaRPr lang="el-GR" sz="1100" dirty="0"/>
+                    </a:p>
+                  </a:txBody>
+                  <a:tcPr marL="91440" marR="91440" marT="45720" marB="45720" anchor="ctr">
+                    <a:lnL w="9525" cap="flat" cmpd="sng" algn="ctr">
+                      <a:solidFill>
+                        <a:srgbClr val="D3D9E4"/>
+                      </a:solidFill>
+                      <a:prstDash val="solid"/>
+                      <a:round/>
+                      <a:headEnd type="none" w="med" len="med"/>
+                      <a:tailEnd type="none" w="med" len="med"/>
+                    </a:lnL>
+                    <a:lnR w="9525" cap="flat" cmpd="sng" algn="ctr">
+                      <a:solidFill>
+                        <a:srgbClr val="D3D9E4"/>
+                      </a:solidFill>
+                      <a:prstDash val="solid"/>
+                      <a:round/>
+                      <a:headEnd type="none" w="med" len="med"/>
+                      <a:tailEnd type="none" w="med" len="med"/>
+                    </a:lnR>
+                    <a:lnT w="9525" cap="flat" cmpd="sng" algn="ctr">
+                      <a:solidFill>
+                        <a:srgbClr val="D3D9E4"/>
+                      </a:solidFill>
+                      <a:prstDash val="solid"/>
+                      <a:round/>
+                      <a:headEnd type="none" w="med" len="med"/>
+                      <a:tailEnd type="none" w="med" len="med"/>
+                    </a:lnT>
+                    <a:lnB w="9525" cap="flat" cmpd="sng" algn="ctr">
+                      <a:solidFill>
+                        <a:srgbClr val="D3D9E4"/>
+                      </a:solidFill>
+                      <a:prstDash val="solid"/>
+                      <a:round/>
+                      <a:headEnd type="none" w="med" len="med"/>
+                      <a:tailEnd type="none" w="med" len="med"/>
+                    </a:lnB>
+                    <a:solidFill>
+                      <a:srgbClr val="FBFCFE"/>
+                    </a:solidFill>
+                  </a:tcPr>
+                </a:tc>
+                <a:tc>
+                  <a:txBody>
+                    <a:bodyPr/>
+                    <a:lstStyle/>
+                    <a:p>
+                      <a:pPr indent="0" marL="0">
+                        <a:buNone/>
+                      </a:pPr>
+                      <a:r>
+                        <a:rPr lang="el-GR" sz="1100" dirty="0">
+                          <a:solidFill>
+                            <a:srgbClr val="171B26"/>
+                          </a:solidFill>
+                          <a:latin typeface="Segoe UI" pitchFamily="34" charset="0"/>
+                          <a:ea typeface="Segoe UI" pitchFamily="34" charset="-122"/>
+                          <a:cs typeface="Segoe UI" pitchFamily="34" charset="-120"/>
+                        </a:rPr>
+                        <a:t>Εμπορικό</a:t>
+                      </a:r>
+                      <a:endParaRPr lang="el-GR" sz="1100" dirty="0"/>
+                    </a:p>
+                  </a:txBody>
+                  <a:tcPr marL="91440" marR="91440" marT="45720" marB="45720" anchor="ctr">
+                    <a:lnL w="9525" cap="flat" cmpd="sng" algn="ctr">
+                      <a:solidFill>
+                        <a:srgbClr val="D3D9E4"/>
+                      </a:solidFill>
+                      <a:prstDash val="solid"/>
+                      <a:round/>
+                      <a:headEnd type="none" w="med" len="med"/>
+                      <a:tailEnd type="none" w="med" len="med"/>
+                    </a:lnL>
+                    <a:lnR w="9525" cap="flat" cmpd="sng" algn="ctr">
+                      <a:solidFill>
+                        <a:srgbClr val="D3D9E4"/>
+                      </a:solidFill>
+                      <a:prstDash val="solid"/>
+                      <a:round/>
+                      <a:headEnd type="none" w="med" len="med"/>
+                      <a:tailEnd type="none" w="med" len="med"/>
+                    </a:lnR>
+                    <a:lnT w="9525" cap="flat" cmpd="sng" algn="ctr">
+                      <a:solidFill>
+                        <a:srgbClr val="D3D9E4"/>
+                      </a:solidFill>
+                      <a:prstDash val="solid"/>
+                      <a:round/>
+                      <a:headEnd type="none" w="med" len="med"/>
+                      <a:tailEnd type="none" w="med" len="med"/>
+                    </a:lnT>
+                    <a:lnB w="9525" cap="flat" cmpd="sng" algn="ctr">
+                      <a:solidFill>
+                        <a:srgbClr val="D3D9E4"/>
+                      </a:solidFill>
+                      <a:prstDash val="solid"/>
+                      <a:round/>
+                      <a:headEnd type="none" w="med" len="med"/>
+                      <a:tailEnd type="none" w="med" len="med"/>
+                    </a:lnB>
+                    <a:solidFill>
+                      <a:srgbClr val="FBFCFE"/>
+                    </a:solidFill>
+                  </a:tcPr>
+                </a:tc>
+                <a:tc>
+                  <a:txBody>
+                    <a:bodyPr/>
+                    <a:lstStyle/>
+                    <a:p>
+                      <a:pPr indent="0" marL="0">
+                        <a:buNone/>
+                      </a:pPr>
+                      <a:r>
+                        <a:rPr lang="el-GR" sz="1100" dirty="0">
+                          <a:solidFill>
+                            <a:srgbClr val="171B26"/>
+                          </a:solidFill>
+                          <a:latin typeface="Segoe UI" pitchFamily="34" charset="0"/>
+                          <a:ea typeface="Segoe UI" pitchFamily="34" charset="-122"/>
+                          <a:cs typeface="Segoe UI" pitchFamily="34" charset="-120"/>
+                        </a:rPr>
+                        <a:t>Apple</a:t>
+                      </a:r>
+                      <a:endParaRPr lang="el-GR" sz="1100" dirty="0"/>
+                    </a:p>
+                  </a:txBody>
+                  <a:tcPr marL="91440" marR="91440" marT="45720" marB="45720" anchor="ctr">
+                    <a:lnL w="9525" cap="flat" cmpd="sng" algn="ctr">
+                      <a:solidFill>
+                        <a:srgbClr val="D3D9E4"/>
+                      </a:solidFill>
+                      <a:prstDash val="solid"/>
+                      <a:round/>
+                      <a:headEnd type="none" w="med" len="med"/>
+                      <a:tailEnd type="none" w="med" len="med"/>
+                    </a:lnL>
+                    <a:lnR w="9525" cap="flat" cmpd="sng" algn="ctr">
+                      <a:solidFill>
+                        <a:srgbClr val="D3D9E4"/>
+                      </a:solidFill>
+                      <a:prstDash val="solid"/>
+                      <a:round/>
+                      <a:headEnd type="none" w="med" len="med"/>
+                      <a:tailEnd type="none" w="med" len="med"/>
+                    </a:lnR>
+                    <a:lnT w="9525" cap="flat" cmpd="sng" algn="ctr">
+                      <a:solidFill>
+                        <a:srgbClr val="D3D9E4"/>
+                      </a:solidFill>
+                      <a:prstDash val="solid"/>
+                      <a:round/>
+                      <a:headEnd type="none" w="med" len="med"/>
+                      <a:tailEnd type="none" w="med" len="med"/>
+                    </a:lnT>
+                    <a:lnB w="9525" cap="flat" cmpd="sng" algn="ctr">
+                      <a:solidFill>
+                        <a:srgbClr val="D3D9E4"/>
+                      </a:solidFill>
+                      <a:prstDash val="solid"/>
+                      <a:round/>
+                      <a:headEnd type="none" w="med" len="med"/>
+                      <a:tailEnd type="none" w="med" len="med"/>
+                    </a:lnB>
+                    <a:solidFill>
+                      <a:srgbClr val="FBFCFE"/>
+                    </a:solidFill>
+                  </a:tcPr>
+                </a:tc>
+              </a:tr>
+              <a:tr h="310896">
+                <a:tc>
+                  <a:txBody>
+                    <a:bodyPr/>
+                    <a:lstStyle/>
+                    <a:p>
+                      <a:pPr indent="0" marL="0">
+                        <a:buNone/>
+                      </a:pPr>
+                      <a:r>
+                        <a:rPr lang="el-GR" sz="1100" b="1" dirty="0">
+                          <a:solidFill>
+                            <a:srgbClr val="171B26"/>
+                          </a:solidFill>
+                          <a:latin typeface="Segoe UI" pitchFamily="34" charset="0"/>
+                          <a:ea typeface="Segoe UI" pitchFamily="34" charset="-122"/>
+                          <a:cs typeface="Segoe UI" pitchFamily="34" charset="-120"/>
+                        </a:rPr>
+                        <a:t>Ubuntu</a:t>
+                      </a:r>
+                      <a:endParaRPr lang="el-GR" sz="1100" dirty="0"/>
+                    </a:p>
+                  </a:txBody>
+                  <a:tcPr marL="91440" marR="91440" marT="45720" marB="45720" anchor="ctr">
+                    <a:lnL w="9525" cap="flat" cmpd="sng" algn="ctr">
+                      <a:solidFill>
+                        <a:srgbClr val="D3D9E4"/>
+                      </a:solidFill>
+                      <a:prstDash val="solid"/>
+                      <a:round/>
+                      <a:headEnd type="none" w="med" len="med"/>
+                      <a:tailEnd type="none" w="med" len="med"/>
+                    </a:lnL>
+                    <a:lnR w="9525" cap="flat" cmpd="sng" algn="ctr">
+                      <a:solidFill>
+                        <a:srgbClr val="D3D9E4"/>
+                      </a:solidFill>
+                      <a:prstDash val="solid"/>
+                      <a:round/>
+                      <a:headEnd type="none" w="med" len="med"/>
+                      <a:tailEnd type="none" w="med" len="med"/>
+                    </a:lnR>
+                    <a:lnT w="9525" cap="flat" cmpd="sng" algn="ctr">
+                      <a:solidFill>
+                        <a:srgbClr val="D3D9E4"/>
+                      </a:solidFill>
+                      <a:prstDash val="solid"/>
+                      <a:round/>
+                      <a:headEnd type="none" w="med" len="med"/>
+                      <a:tailEnd type="none" w="med" len="med"/>
+                    </a:lnT>
+                    <a:lnB w="9525" cap="flat" cmpd="sng" algn="ctr">
+                      <a:solidFill>
+                        <a:srgbClr val="D3D9E4"/>
+                      </a:solidFill>
+                      <a:prstDash val="solid"/>
+                      <a:round/>
+                      <a:headEnd type="none" w="med" len="med"/>
+                      <a:tailEnd type="none" w="med" len="med"/>
+                    </a:lnB>
+                    <a:solidFill>
+                      <a:srgbClr val="FBFCFE"/>
+                    </a:solidFill>
+                  </a:tcPr>
+                </a:tc>
+                <a:tc>
+                  <a:txBody>
+                    <a:bodyPr/>
+                    <a:lstStyle/>
+                    <a:p>
+                      <a:pPr indent="0" marL="0">
+                        <a:buNone/>
+                      </a:pPr>
+                      <a:r>
+                        <a:rPr lang="el-GR" sz="1100" dirty="0">
+                          <a:solidFill>
+                            <a:srgbClr val="171B26"/>
+                          </a:solidFill>
+                          <a:latin typeface="Segoe UI" pitchFamily="34" charset="0"/>
+                          <a:ea typeface="Segoe UI" pitchFamily="34" charset="-122"/>
+                          <a:cs typeface="Segoe UI" pitchFamily="34" charset="-120"/>
+                        </a:rPr>
+                        <a:t>Λειτουργικό σύστημα (Linux)</a:t>
+                      </a:r>
+                      <a:endParaRPr lang="el-GR" sz="1100" dirty="0"/>
+                    </a:p>
+                  </a:txBody>
+                  <a:tcPr marL="91440" marR="91440" marT="45720" marB="45720" anchor="ctr">
+                    <a:lnL w="9525" cap="flat" cmpd="sng" algn="ctr">
+                      <a:solidFill>
+                        <a:srgbClr val="D3D9E4"/>
+                      </a:solidFill>
+                      <a:prstDash val="solid"/>
+                      <a:round/>
+                      <a:headEnd type="none" w="med" len="med"/>
+                      <a:tailEnd type="none" w="med" len="med"/>
+                    </a:lnL>
+                    <a:lnR w="9525" cap="flat" cmpd="sng" algn="ctr">
+                      <a:solidFill>
+                        <a:srgbClr val="D3D9E4"/>
+                      </a:solidFill>
+                      <a:prstDash val="solid"/>
+                      <a:round/>
+                      <a:headEnd type="none" w="med" len="med"/>
+                      <a:tailEnd type="none" w="med" len="med"/>
+                    </a:lnR>
+                    <a:lnT w="9525" cap="flat" cmpd="sng" algn="ctr">
+                      <a:solidFill>
+                        <a:srgbClr val="D3D9E4"/>
+                      </a:solidFill>
+                      <a:prstDash val="solid"/>
+                      <a:round/>
+                      <a:headEnd type="none" w="med" len="med"/>
+                      <a:tailEnd type="none" w="med" len="med"/>
+                    </a:lnT>
+                    <a:lnB w="9525" cap="flat" cmpd="sng" algn="ctr">
+                      <a:solidFill>
+                        <a:srgbClr val="D3D9E4"/>
+                      </a:solidFill>
+                      <a:prstDash val="solid"/>
+                      <a:round/>
+                      <a:headEnd type="none" w="med" len="med"/>
+                      <a:tailEnd type="none" w="med" len="med"/>
+                    </a:lnB>
+                    <a:solidFill>
+                      <a:srgbClr val="FBFCFE"/>
+                    </a:solidFill>
+                  </a:tcPr>
+                </a:tc>
+                <a:tc>
+                  <a:txBody>
+                    <a:bodyPr/>
+                    <a:lstStyle/>
+                    <a:p>
+                      <a:pPr indent="0" marL="0">
+                        <a:buNone/>
+                      </a:pPr>
+                      <a:r>
+                        <a:rPr lang="el-GR" sz="1100" dirty="0">
+                          <a:solidFill>
+                            <a:srgbClr val="171B26"/>
+                          </a:solidFill>
+                          <a:latin typeface="Segoe UI" pitchFamily="34" charset="0"/>
+                          <a:ea typeface="Segoe UI" pitchFamily="34" charset="-122"/>
+                          <a:cs typeface="Segoe UI" pitchFamily="34" charset="-120"/>
+                        </a:rPr>
+                        <a:t>ΕΛ/ΛΑΚ</a:t>
+                      </a:r>
+                      <a:endParaRPr lang="el-GR" sz="1100" dirty="0"/>
+                    </a:p>
+                  </a:txBody>
+                  <a:tcPr marL="91440" marR="91440" marT="45720" marB="45720" anchor="ctr">
+                    <a:lnL w="9525" cap="flat" cmpd="sng" algn="ctr">
+                      <a:solidFill>
+                        <a:srgbClr val="D3D9E4"/>
+                      </a:solidFill>
+                      <a:prstDash val="solid"/>
+                      <a:round/>
+                      <a:headEnd type="none" w="med" len="med"/>
+                      <a:tailEnd type="none" w="med" len="med"/>
+                    </a:lnL>
+                    <a:lnR w="9525" cap="flat" cmpd="sng" algn="ctr">
+                      <a:solidFill>
+                        <a:srgbClr val="D3D9E4"/>
+                      </a:solidFill>
+                      <a:prstDash val="solid"/>
+                      <a:round/>
+                      <a:headEnd type="none" w="med" len="med"/>
+                      <a:tailEnd type="none" w="med" len="med"/>
+                    </a:lnR>
+                    <a:lnT w="9525" cap="flat" cmpd="sng" algn="ctr">
+                      <a:solidFill>
+                        <a:srgbClr val="D3D9E4"/>
+                      </a:solidFill>
+                      <a:prstDash val="solid"/>
+                      <a:round/>
+                      <a:headEnd type="none" w="med" len="med"/>
+                      <a:tailEnd type="none" w="med" len="med"/>
+                    </a:lnT>
+                    <a:lnB w="9525" cap="flat" cmpd="sng" algn="ctr">
+                      <a:solidFill>
+                        <a:srgbClr val="D3D9E4"/>
+                      </a:solidFill>
+                      <a:prstDash val="solid"/>
+                      <a:round/>
+                      <a:headEnd type="none" w="med" len="med"/>
+                      <a:tailEnd type="none" w="med" len="med"/>
+                    </a:lnB>
+                    <a:solidFill>
+                      <a:srgbClr val="FBFCFE"/>
+                    </a:solidFill>
+                  </a:tcPr>
+                </a:tc>
+                <a:tc>
+                  <a:txBody>
+                    <a:bodyPr/>
+                    <a:lstStyle/>
+                    <a:p>
+                      <a:pPr indent="0" marL="0">
+                        <a:buNone/>
+                      </a:pPr>
+                      <a:r>
+                        <a:rPr lang="el-GR" sz="1100" dirty="0">
+                          <a:solidFill>
+                            <a:srgbClr val="171B26"/>
+                          </a:solidFill>
+                          <a:latin typeface="Segoe UI" pitchFamily="34" charset="0"/>
+                          <a:ea typeface="Segoe UI" pitchFamily="34" charset="-122"/>
+                          <a:cs typeface="Segoe UI" pitchFamily="34" charset="-120"/>
+                        </a:rPr>
+                        <a:t>Canonical και κοινότητα</a:t>
+                      </a:r>
+                      <a:endParaRPr lang="el-GR" sz="1100" dirty="0"/>
+                    </a:p>
+                  </a:txBody>
+                  <a:tcPr marL="91440" marR="91440" marT="45720" marB="45720" anchor="ctr">
+                    <a:lnL w="9525" cap="flat" cmpd="sng" algn="ctr">
+                      <a:solidFill>
+                        <a:srgbClr val="D3D9E4"/>
+                      </a:solidFill>
+                      <a:prstDash val="solid"/>
+                      <a:round/>
+                      <a:headEnd type="none" w="med" len="med"/>
+                      <a:tailEnd type="none" w="med" len="med"/>
+                    </a:lnL>
+                    <a:lnR w="9525" cap="flat" cmpd="sng" algn="ctr">
+                      <a:solidFill>
+                        <a:srgbClr val="D3D9E4"/>
+                      </a:solidFill>
+                      <a:prstDash val="solid"/>
+                      <a:round/>
+                      <a:headEnd type="none" w="med" len="med"/>
+                      <a:tailEnd type="none" w="med" len="med"/>
+                    </a:lnR>
+                    <a:lnT w="9525" cap="flat" cmpd="sng" algn="ctr">
+                      <a:solidFill>
+                        <a:srgbClr val="D3D9E4"/>
+                      </a:solidFill>
+                      <a:prstDash val="solid"/>
+                      <a:round/>
+                      <a:headEnd type="none" w="med" len="med"/>
+                      <a:tailEnd type="none" w="med" len="med"/>
+                    </a:lnT>
+                    <a:lnB w="9525" cap="flat" cmpd="sng" algn="ctr">
+                      <a:solidFill>
+                        <a:srgbClr val="D3D9E4"/>
+                      </a:solidFill>
+                      <a:prstDash val="solid"/>
+                      <a:round/>
+                      <a:headEnd type="none" w="med" len="med"/>
+                      <a:tailEnd type="none" w="med" len="med"/>
+                    </a:lnB>
+                    <a:solidFill>
+                      <a:srgbClr val="FBFCFE"/>
+                    </a:solidFill>
+                  </a:tcPr>
+                </a:tc>
+              </a:tr>
+              <a:tr h="310896">
+                <a:tc>
+                  <a:txBody>
+                    <a:bodyPr/>
+                    <a:lstStyle/>
+                    <a:p>
+                      <a:pPr indent="0" marL="0">
+                        <a:buNone/>
+                      </a:pPr>
+                      <a:r>
+                        <a:rPr lang="el-GR" sz="1100" b="1" dirty="0">
+                          <a:solidFill>
+                            <a:srgbClr val="171B26"/>
+                          </a:solidFill>
+                          <a:latin typeface="Segoe UI" pitchFamily="34" charset="0"/>
+                          <a:ea typeface="Segoe UI" pitchFamily="34" charset="-122"/>
+                          <a:cs typeface="Segoe UI" pitchFamily="34" charset="-120"/>
+                        </a:rPr>
+                        <a:t>Microsoft Office</a:t>
+                      </a:r>
+                      <a:endParaRPr lang="el-GR" sz="1100" dirty="0"/>
+                    </a:p>
+                  </a:txBody>
+                  <a:tcPr marL="91440" marR="91440" marT="45720" marB="45720" anchor="ctr">
+                    <a:lnL w="9525" cap="flat" cmpd="sng" algn="ctr">
+                      <a:solidFill>
+                        <a:srgbClr val="D3D9E4"/>
+                      </a:solidFill>
+                      <a:prstDash val="solid"/>
+                      <a:round/>
+                      <a:headEnd type="none" w="med" len="med"/>
+                      <a:tailEnd type="none" w="med" len="med"/>
+                    </a:lnL>
+                    <a:lnR w="9525" cap="flat" cmpd="sng" algn="ctr">
+                      <a:solidFill>
+                        <a:srgbClr val="D3D9E4"/>
+                      </a:solidFill>
+                      <a:prstDash val="solid"/>
+                      <a:round/>
+                      <a:headEnd type="none" w="med" len="med"/>
+                      <a:tailEnd type="none" w="med" len="med"/>
+                    </a:lnR>
+                    <a:lnT w="9525" cap="flat" cmpd="sng" algn="ctr">
+                      <a:solidFill>
+                        <a:srgbClr val="D3D9E4"/>
+                      </a:solidFill>
+                      <a:prstDash val="solid"/>
+                      <a:round/>
+                      <a:headEnd type="none" w="med" len="med"/>
+                      <a:tailEnd type="none" w="med" len="med"/>
+                    </a:lnT>
+                    <a:lnB w="9525" cap="flat" cmpd="sng" algn="ctr">
+                      <a:solidFill>
+                        <a:srgbClr val="D3D9E4"/>
+                      </a:solidFill>
+                      <a:prstDash val="solid"/>
+                      <a:round/>
+                      <a:headEnd type="none" w="med" len="med"/>
+                      <a:tailEnd type="none" w="med" len="med"/>
+                    </a:lnB>
+                    <a:solidFill>
+                      <a:srgbClr val="FBFCFE"/>
+                    </a:solidFill>
+                  </a:tcPr>
+                </a:tc>
+                <a:tc>
+                  <a:txBody>
+                    <a:bodyPr/>
+                    <a:lstStyle/>
+                    <a:p>
+                      <a:pPr indent="0" marL="0">
+                        <a:buNone/>
+                      </a:pPr>
+                      <a:r>
+                        <a:rPr lang="el-GR" sz="1100" dirty="0">
+                          <a:solidFill>
+                            <a:srgbClr val="171B26"/>
+                          </a:solidFill>
+                          <a:latin typeface="Segoe UI" pitchFamily="34" charset="0"/>
+                          <a:ea typeface="Segoe UI" pitchFamily="34" charset="-122"/>
+                          <a:cs typeface="Segoe UI" pitchFamily="34" charset="-120"/>
+                        </a:rPr>
+                        <a:t>Πρόγραμμα γραφείου</a:t>
+                      </a:r>
+                      <a:endParaRPr lang="el-GR" sz="1100" dirty="0"/>
+                    </a:p>
+                  </a:txBody>
+                  <a:tcPr marL="91440" marR="91440" marT="45720" marB="45720" anchor="ctr">
+                    <a:lnL w="9525" cap="flat" cmpd="sng" algn="ctr">
+                      <a:solidFill>
+                        <a:srgbClr val="D3D9E4"/>
+                      </a:solidFill>
+                      <a:prstDash val="solid"/>
+                      <a:round/>
+                      <a:headEnd type="none" w="med" len="med"/>
+                      <a:tailEnd type="none" w="med" len="med"/>
+                    </a:lnL>
+                    <a:lnR w="9525" cap="flat" cmpd="sng" algn="ctr">
+                      <a:solidFill>
+                        <a:srgbClr val="D3D9E4"/>
+                      </a:solidFill>
+                      <a:prstDash val="solid"/>
+                      <a:round/>
+                      <a:headEnd type="none" w="med" len="med"/>
+                      <a:tailEnd type="none" w="med" len="med"/>
+                    </a:lnR>
+                    <a:lnT w="9525" cap="flat" cmpd="sng" algn="ctr">
+                      <a:solidFill>
+                        <a:srgbClr val="D3D9E4"/>
+                      </a:solidFill>
+                      <a:prstDash val="solid"/>
+                      <a:round/>
+                      <a:headEnd type="none" w="med" len="med"/>
+                      <a:tailEnd type="none" w="med" len="med"/>
+                    </a:lnT>
+                    <a:lnB w="9525" cap="flat" cmpd="sng" algn="ctr">
+                      <a:solidFill>
+                        <a:srgbClr val="D3D9E4"/>
+                      </a:solidFill>
+                      <a:prstDash val="solid"/>
+                      <a:round/>
+                      <a:headEnd type="none" w="med" len="med"/>
+                      <a:tailEnd type="none" w="med" len="med"/>
+                    </a:lnB>
+                    <a:solidFill>
+                      <a:srgbClr val="FBFCFE"/>
+                    </a:solidFill>
+                  </a:tcPr>
+                </a:tc>
+                <a:tc>
+                  <a:txBody>
+                    <a:bodyPr/>
+                    <a:lstStyle/>
+                    <a:p>
+                      <a:pPr indent="0" marL="0">
+                        <a:buNone/>
+                      </a:pPr>
+                      <a:r>
+                        <a:rPr lang="el-GR" sz="1100" dirty="0">
+                          <a:solidFill>
+                            <a:srgbClr val="171B26"/>
+                          </a:solidFill>
+                          <a:latin typeface="Segoe UI" pitchFamily="34" charset="0"/>
+                          <a:ea typeface="Segoe UI" pitchFamily="34" charset="-122"/>
+                          <a:cs typeface="Segoe UI" pitchFamily="34" charset="-120"/>
+                        </a:rPr>
+                        <a:t>Εμπορικό</a:t>
+                      </a:r>
+                      <a:endParaRPr lang="el-GR" sz="1100" dirty="0"/>
+                    </a:p>
+                  </a:txBody>
+                  <a:tcPr marL="91440" marR="91440" marT="45720" marB="45720" anchor="ctr">
+                    <a:lnL w="9525" cap="flat" cmpd="sng" algn="ctr">
+                      <a:solidFill>
+                        <a:srgbClr val="D3D9E4"/>
+                      </a:solidFill>
+                      <a:prstDash val="solid"/>
+                      <a:round/>
+                      <a:headEnd type="none" w="med" len="med"/>
+                      <a:tailEnd type="none" w="med" len="med"/>
+                    </a:lnL>
+                    <a:lnR w="9525" cap="flat" cmpd="sng" algn="ctr">
+                      <a:solidFill>
+                        <a:srgbClr val="D3D9E4"/>
+                      </a:solidFill>
+                      <a:prstDash val="solid"/>
+                      <a:round/>
+                      <a:headEnd type="none" w="med" len="med"/>
+                      <a:tailEnd type="none" w="med" len="med"/>
+                    </a:lnR>
+                    <a:lnT w="9525" cap="flat" cmpd="sng" algn="ctr">
+                      <a:solidFill>
+                        <a:srgbClr val="D3D9E4"/>
+                      </a:solidFill>
+                      <a:prstDash val="solid"/>
+                      <a:round/>
+                      <a:headEnd type="none" w="med" len="med"/>
+                      <a:tailEnd type="none" w="med" len="med"/>
+                    </a:lnT>
+                    <a:lnB w="9525" cap="flat" cmpd="sng" algn="ctr">
+                      <a:solidFill>
+                        <a:srgbClr val="D3D9E4"/>
+                      </a:solidFill>
+                      <a:prstDash val="solid"/>
+                      <a:round/>
+                      <a:headEnd type="none" w="med" len="med"/>
+                      <a:tailEnd type="none" w="med" len="med"/>
+                    </a:lnB>
+                    <a:solidFill>
+                      <a:srgbClr val="FBFCFE"/>
+                    </a:solidFill>
+                  </a:tcPr>
+                </a:tc>
+                <a:tc>
+                  <a:txBody>
+                    <a:bodyPr/>
+                    <a:lstStyle/>
+                    <a:p>
+                      <a:pPr indent="0" marL="0">
+                        <a:buNone/>
+                      </a:pPr>
+                      <a:r>
+                        <a:rPr lang="el-GR" sz="1100" dirty="0">
+                          <a:solidFill>
+                            <a:srgbClr val="171B26"/>
+                          </a:solidFill>
+                          <a:latin typeface="Segoe UI" pitchFamily="34" charset="0"/>
+                          <a:ea typeface="Segoe UI" pitchFamily="34" charset="-122"/>
+                          <a:cs typeface="Segoe UI" pitchFamily="34" charset="-120"/>
+                        </a:rPr>
+                        <a:t>Microsoft</a:t>
+                      </a:r>
+                      <a:endParaRPr lang="el-GR" sz="1100" dirty="0"/>
+                    </a:p>
+                  </a:txBody>
+                  <a:tcPr marL="91440" marR="91440" marT="45720" marB="45720" anchor="ctr">
+                    <a:lnL w="9525" cap="flat" cmpd="sng" algn="ctr">
+                      <a:solidFill>
+                        <a:srgbClr val="D3D9E4"/>
+                      </a:solidFill>
+                      <a:prstDash val="solid"/>
+                      <a:round/>
+                      <a:headEnd type="none" w="med" len="med"/>
+                      <a:tailEnd type="none" w="med" len="med"/>
+                    </a:lnL>
+                    <a:lnR w="9525" cap="flat" cmpd="sng" algn="ctr">
+                      <a:solidFill>
+                        <a:srgbClr val="D3D9E4"/>
+                      </a:solidFill>
+                      <a:prstDash val="solid"/>
+                      <a:round/>
+                      <a:headEnd type="none" w="med" len="med"/>
+                      <a:tailEnd type="none" w="med" len="med"/>
+                    </a:lnR>
+                    <a:lnT w="9525" cap="flat" cmpd="sng" algn="ctr">
+                      <a:solidFill>
+                        <a:srgbClr val="D3D9E4"/>
+                      </a:solidFill>
+                      <a:prstDash val="solid"/>
+                      <a:round/>
+                      <a:headEnd type="none" w="med" len="med"/>
+                      <a:tailEnd type="none" w="med" len="med"/>
+                    </a:lnT>
+                    <a:lnB w="9525" cap="flat" cmpd="sng" algn="ctr">
+                      <a:solidFill>
+                        <a:srgbClr val="D3D9E4"/>
+                      </a:solidFill>
+                      <a:prstDash val="solid"/>
+                      <a:round/>
+                      <a:headEnd type="none" w="med" len="med"/>
+                      <a:tailEnd type="none" w="med" len="med"/>
+                    </a:lnB>
+                    <a:solidFill>
+                      <a:srgbClr val="FBFCFE"/>
+                    </a:solidFill>
+                  </a:tcPr>
+                </a:tc>
+              </a:tr>
+              <a:tr h="310896">
+                <a:tc>
+                  <a:txBody>
+                    <a:bodyPr/>
+                    <a:lstStyle/>
+                    <a:p>
+                      <a:pPr indent="0" marL="0">
+                        <a:buNone/>
+                      </a:pPr>
+                      <a:r>
+                        <a:rPr lang="el-GR" sz="1100" b="1" dirty="0">
+                          <a:solidFill>
+                            <a:srgbClr val="171B26"/>
+                          </a:solidFill>
+                          <a:latin typeface="Segoe UI" pitchFamily="34" charset="0"/>
+                          <a:ea typeface="Segoe UI" pitchFamily="34" charset="-122"/>
+                          <a:cs typeface="Segoe UI" pitchFamily="34" charset="-120"/>
+                        </a:rPr>
+                        <a:t>LibreOffice</a:t>
+                      </a:r>
+                      <a:endParaRPr lang="el-GR" sz="1100" dirty="0"/>
+                    </a:p>
+                  </a:txBody>
+                  <a:tcPr marL="91440" marR="91440" marT="45720" marB="45720" anchor="ctr">
+                    <a:lnL w="9525" cap="flat" cmpd="sng" algn="ctr">
+                      <a:solidFill>
+                        <a:srgbClr val="D3D9E4"/>
+                      </a:solidFill>
+                      <a:prstDash val="solid"/>
+                      <a:round/>
+                      <a:headEnd type="none" w="med" len="med"/>
+                      <a:tailEnd type="none" w="med" len="med"/>
+                    </a:lnL>
+                    <a:lnR w="9525" cap="flat" cmpd="sng" algn="ctr">
+                      <a:solidFill>
+                        <a:srgbClr val="D3D9E4"/>
+                      </a:solidFill>
+                      <a:prstDash val="solid"/>
+                      <a:round/>
+                      <a:headEnd type="none" w="med" len="med"/>
+                      <a:tailEnd type="none" w="med" len="med"/>
+                    </a:lnR>
+                    <a:lnT w="9525" cap="flat" cmpd="sng" algn="ctr">
+                      <a:solidFill>
+                        <a:srgbClr val="D3D9E4"/>
+                      </a:solidFill>
+                      <a:prstDash val="solid"/>
+                      <a:round/>
+                      <a:headEnd type="none" w="med" len="med"/>
+                      <a:tailEnd type="none" w="med" len="med"/>
+                    </a:lnT>
+                    <a:lnB w="9525" cap="flat" cmpd="sng" algn="ctr">
+                      <a:solidFill>
+                        <a:srgbClr val="D3D9E4"/>
+                      </a:solidFill>
+                      <a:prstDash val="solid"/>
+                      <a:round/>
+                      <a:headEnd type="none" w="med" len="med"/>
+                      <a:tailEnd type="none" w="med" len="med"/>
+                    </a:lnB>
+                    <a:solidFill>
+                      <a:srgbClr val="FBFCFE"/>
+                    </a:solidFill>
+                  </a:tcPr>
+                </a:tc>
+                <a:tc>
+                  <a:txBody>
+                    <a:bodyPr/>
+                    <a:lstStyle/>
+                    <a:p>
+                      <a:pPr indent="0" marL="0">
+                        <a:buNone/>
+                      </a:pPr>
+                      <a:r>
+                        <a:rPr lang="el-GR" sz="1100" dirty="0">
+                          <a:solidFill>
+                            <a:srgbClr val="171B26"/>
+                          </a:solidFill>
+                          <a:latin typeface="Segoe UI" pitchFamily="34" charset="0"/>
+                          <a:ea typeface="Segoe UI" pitchFamily="34" charset="-122"/>
+                          <a:cs typeface="Segoe UI" pitchFamily="34" charset="-120"/>
+                        </a:rPr>
+                        <a:t>Πρόγραμμα γραφείου</a:t>
+                      </a:r>
+                      <a:endParaRPr lang="el-GR" sz="1100" dirty="0"/>
+                    </a:p>
+                  </a:txBody>
+                  <a:tcPr marL="91440" marR="91440" marT="45720" marB="45720" anchor="ctr">
+                    <a:lnL w="9525" cap="flat" cmpd="sng" algn="ctr">
+                      <a:solidFill>
+                        <a:srgbClr val="D3D9E4"/>
+                      </a:solidFill>
+                      <a:prstDash val="solid"/>
+                      <a:round/>
+                      <a:headEnd type="none" w="med" len="med"/>
+                      <a:tailEnd type="none" w="med" len="med"/>
+                    </a:lnL>
+                    <a:lnR w="9525" cap="flat" cmpd="sng" algn="ctr">
+                      <a:solidFill>
+                        <a:srgbClr val="D3D9E4"/>
+                      </a:solidFill>
+                      <a:prstDash val="solid"/>
+                      <a:round/>
+                      <a:headEnd type="none" w="med" len="med"/>
+                      <a:tailEnd type="none" w="med" len="med"/>
+                    </a:lnR>
+                    <a:lnT w="9525" cap="flat" cmpd="sng" algn="ctr">
+                      <a:solidFill>
+                        <a:srgbClr val="D3D9E4"/>
+                      </a:solidFill>
+                      <a:prstDash val="solid"/>
+                      <a:round/>
+                      <a:headEnd type="none" w="med" len="med"/>
+                      <a:tailEnd type="none" w="med" len="med"/>
+                    </a:lnT>
+                    <a:lnB w="9525" cap="flat" cmpd="sng" algn="ctr">
+                      <a:solidFill>
+                        <a:srgbClr val="D3D9E4"/>
+                      </a:solidFill>
+                      <a:prstDash val="solid"/>
+                      <a:round/>
+                      <a:headEnd type="none" w="med" len="med"/>
+                      <a:tailEnd type="none" w="med" len="med"/>
+                    </a:lnB>
+                    <a:solidFill>
+                      <a:srgbClr val="FBFCFE"/>
+                    </a:solidFill>
+                  </a:tcPr>
+                </a:tc>
+                <a:tc>
+                  <a:txBody>
+                    <a:bodyPr/>
+                    <a:lstStyle/>
+                    <a:p>
+                      <a:pPr indent="0" marL="0">
+                        <a:buNone/>
+                      </a:pPr>
+                      <a:r>
+                        <a:rPr lang="el-GR" sz="1100" dirty="0">
+                          <a:solidFill>
+                            <a:srgbClr val="171B26"/>
+                          </a:solidFill>
+                          <a:latin typeface="Segoe UI" pitchFamily="34" charset="0"/>
+                          <a:ea typeface="Segoe UI" pitchFamily="34" charset="-122"/>
+                          <a:cs typeface="Segoe UI" pitchFamily="34" charset="-120"/>
+                        </a:rPr>
+                        <a:t>ΕΛ/ΛΑΚ</a:t>
+                      </a:r>
+                      <a:endParaRPr lang="el-GR" sz="1100" dirty="0"/>
+                    </a:p>
+                  </a:txBody>
+                  <a:tcPr marL="91440" marR="91440" marT="45720" marB="45720" anchor="ctr">
+                    <a:lnL w="9525" cap="flat" cmpd="sng" algn="ctr">
+                      <a:solidFill>
+                        <a:srgbClr val="D3D9E4"/>
+                      </a:solidFill>
+                      <a:prstDash val="solid"/>
+                      <a:round/>
+                      <a:headEnd type="none" w="med" len="med"/>
+                      <a:tailEnd type="none" w="med" len="med"/>
+                    </a:lnL>
+                    <a:lnR w="9525" cap="flat" cmpd="sng" algn="ctr">
+                      <a:solidFill>
+                        <a:srgbClr val="D3D9E4"/>
+                      </a:solidFill>
+                      <a:prstDash val="solid"/>
+                      <a:round/>
+                      <a:headEnd type="none" w="med" len="med"/>
+                      <a:tailEnd type="none" w="med" len="med"/>
+                    </a:lnR>
+                    <a:lnT w="9525" cap="flat" cmpd="sng" algn="ctr">
+                      <a:solidFill>
+                        <a:srgbClr val="D3D9E4"/>
+                      </a:solidFill>
+                      <a:prstDash val="solid"/>
+                      <a:round/>
+                      <a:headEnd type="none" w="med" len="med"/>
+                      <a:tailEnd type="none" w="med" len="med"/>
+                    </a:lnT>
+                    <a:lnB w="9525" cap="flat" cmpd="sng" algn="ctr">
+                      <a:solidFill>
+                        <a:srgbClr val="D3D9E4"/>
+                      </a:solidFill>
+                      <a:prstDash val="solid"/>
+                      <a:round/>
+                      <a:headEnd type="none" w="med" len="med"/>
+                      <a:tailEnd type="none" w="med" len="med"/>
+                    </a:lnB>
+                    <a:solidFill>
+                      <a:srgbClr val="FBFCFE"/>
+                    </a:solidFill>
+                  </a:tcPr>
+                </a:tc>
+                <a:tc>
+                  <a:txBody>
+                    <a:bodyPr/>
+                    <a:lstStyle/>
+                    <a:p>
+                      <a:pPr indent="0" marL="0">
+                        <a:buNone/>
+                      </a:pPr>
+                      <a:r>
+                        <a:rPr lang="el-GR" sz="1100" dirty="0">
+                          <a:solidFill>
+                            <a:srgbClr val="171B26"/>
+                          </a:solidFill>
+                          <a:latin typeface="Segoe UI" pitchFamily="34" charset="0"/>
+                          <a:ea typeface="Segoe UI" pitchFamily="34" charset="-122"/>
+                          <a:cs typeface="Segoe UI" pitchFamily="34" charset="-120"/>
+                        </a:rPr>
+                        <a:t>The Document Foundation</a:t>
+                      </a:r>
+                      <a:endParaRPr lang="el-GR" sz="1100" dirty="0"/>
+                    </a:p>
+                  </a:txBody>
+                  <a:tcPr marL="91440" marR="91440" marT="45720" marB="45720" anchor="ctr">
+                    <a:lnL w="9525" cap="flat" cmpd="sng" algn="ctr">
+                      <a:solidFill>
+                        <a:srgbClr val="D3D9E4"/>
+                      </a:solidFill>
+                      <a:prstDash val="solid"/>
+                      <a:round/>
+                      <a:headEnd type="none" w="med" len="med"/>
+                      <a:tailEnd type="none" w="med" len="med"/>
+                    </a:lnL>
+                    <a:lnR w="9525" cap="flat" cmpd="sng" algn="ctr">
+                      <a:solidFill>
+                        <a:srgbClr val="D3D9E4"/>
+                      </a:solidFill>
+                      <a:prstDash val="solid"/>
+                      <a:round/>
+                      <a:headEnd type="none" w="med" len="med"/>
+                      <a:tailEnd type="none" w="med" len="med"/>
+                    </a:lnR>
+                    <a:lnT w="9525" cap="flat" cmpd="sng" algn="ctr">
+                      <a:solidFill>
+                        <a:srgbClr val="D3D9E4"/>
+                      </a:solidFill>
+                      <a:prstDash val="solid"/>
+                      <a:round/>
+                      <a:headEnd type="none" w="med" len="med"/>
+                      <a:tailEnd type="none" w="med" len="med"/>
+                    </a:lnT>
+                    <a:lnB w="9525" cap="flat" cmpd="sng" algn="ctr">
+                      <a:solidFill>
+                        <a:srgbClr val="D3D9E4"/>
+                      </a:solidFill>
+                      <a:prstDash val="solid"/>
+                      <a:round/>
+                      <a:headEnd type="none" w="med" len="med"/>
+                      <a:tailEnd type="none" w="med" len="med"/>
+                    </a:lnB>
+                    <a:solidFill>
+                      <a:srgbClr val="FBFCFE"/>
+                    </a:solidFill>
+                  </a:tcPr>
+                </a:tc>
+              </a:tr>
+              <a:tr h="310896">
+                <a:tc>
+                  <a:txBody>
+                    <a:bodyPr/>
+                    <a:lstStyle/>
+                    <a:p>
+                      <a:pPr indent="0" marL="0">
+                        <a:buNone/>
+                      </a:pPr>
+                      <a:r>
+                        <a:rPr lang="el-GR" sz="1100" b="1" dirty="0">
+                          <a:solidFill>
+                            <a:srgbClr val="171B26"/>
+                          </a:solidFill>
+                          <a:latin typeface="Segoe UI" pitchFamily="34" charset="0"/>
+                          <a:ea typeface="Segoe UI" pitchFamily="34" charset="-122"/>
+                          <a:cs typeface="Segoe UI" pitchFamily="34" charset="-120"/>
+                        </a:rPr>
+                        <a:t>Adobe Photoshop</a:t>
+                      </a:r>
+                      <a:endParaRPr lang="el-GR" sz="1100" dirty="0"/>
+                    </a:p>
+                  </a:txBody>
+                  <a:tcPr marL="91440" marR="91440" marT="45720" marB="45720" anchor="ctr">
+                    <a:lnL w="9525" cap="flat" cmpd="sng" algn="ctr">
+                      <a:solidFill>
+                        <a:srgbClr val="D3D9E4"/>
+                      </a:solidFill>
+                      <a:prstDash val="solid"/>
+                      <a:round/>
+                      <a:headEnd type="none" w="med" len="med"/>
+                      <a:tailEnd type="none" w="med" len="med"/>
+                    </a:lnL>
+                    <a:lnR w="9525" cap="flat" cmpd="sng" algn="ctr">
+                      <a:solidFill>
+                        <a:srgbClr val="D3D9E4"/>
+                      </a:solidFill>
+                      <a:prstDash val="solid"/>
+                      <a:round/>
+                      <a:headEnd type="none" w="med" len="med"/>
+                      <a:tailEnd type="none" w="med" len="med"/>
+                    </a:lnR>
+                    <a:lnT w="9525" cap="flat" cmpd="sng" algn="ctr">
+                      <a:solidFill>
+                        <a:srgbClr val="D3D9E4"/>
+                      </a:solidFill>
+                      <a:prstDash val="solid"/>
+                      <a:round/>
+                      <a:headEnd type="none" w="med" len="med"/>
+                      <a:tailEnd type="none" w="med" len="med"/>
+                    </a:lnT>
+                    <a:lnB w="9525" cap="flat" cmpd="sng" algn="ctr">
+                      <a:solidFill>
+                        <a:srgbClr val="D3D9E4"/>
+                      </a:solidFill>
+                      <a:prstDash val="solid"/>
+                      <a:round/>
+                      <a:headEnd type="none" w="med" len="med"/>
+                      <a:tailEnd type="none" w="med" len="med"/>
+                    </a:lnB>
+                    <a:solidFill>
+                      <a:srgbClr val="FBFCFE"/>
+                    </a:solidFill>
+                  </a:tcPr>
+                </a:tc>
+                <a:tc>
+                  <a:txBody>
+                    <a:bodyPr/>
+                    <a:lstStyle/>
+                    <a:p>
+                      <a:pPr indent="0" marL="0">
+                        <a:buNone/>
+                      </a:pPr>
+                      <a:r>
+                        <a:rPr lang="el-GR" sz="1100" dirty="0">
+                          <a:solidFill>
+                            <a:srgbClr val="171B26"/>
+                          </a:solidFill>
+                          <a:latin typeface="Segoe UI" pitchFamily="34" charset="0"/>
+                          <a:ea typeface="Segoe UI" pitchFamily="34" charset="-122"/>
+                          <a:cs typeface="Segoe UI" pitchFamily="34" charset="-120"/>
+                        </a:rPr>
+                        <a:t>Επεξεργασία εικόνας</a:t>
+                      </a:r>
+                      <a:endParaRPr lang="el-GR" sz="1100" dirty="0"/>
+                    </a:p>
+                  </a:txBody>
+                  <a:tcPr marL="91440" marR="91440" marT="45720" marB="45720" anchor="ctr">
+                    <a:lnL w="9525" cap="flat" cmpd="sng" algn="ctr">
+                      <a:solidFill>
+                        <a:srgbClr val="D3D9E4"/>
+                      </a:solidFill>
+                      <a:prstDash val="solid"/>
+                      <a:round/>
+                      <a:headEnd type="none" w="med" len="med"/>
+                      <a:tailEnd type="none" w="med" len="med"/>
+                    </a:lnL>
+                    <a:lnR w="9525" cap="flat" cmpd="sng" algn="ctr">
+                      <a:solidFill>
+                        <a:srgbClr val="D3D9E4"/>
+                      </a:solidFill>
+                      <a:prstDash val="solid"/>
+                      <a:round/>
+                      <a:headEnd type="none" w="med" len="med"/>
+                      <a:tailEnd type="none" w="med" len="med"/>
+                    </a:lnR>
+                    <a:lnT w="9525" cap="flat" cmpd="sng" algn="ctr">
+                      <a:solidFill>
+                        <a:srgbClr val="D3D9E4"/>
+                      </a:solidFill>
+                      <a:prstDash val="solid"/>
+                      <a:round/>
+                      <a:headEnd type="none" w="med" len="med"/>
+                      <a:tailEnd type="none" w="med" len="med"/>
+                    </a:lnT>
+                    <a:lnB w="9525" cap="flat" cmpd="sng" algn="ctr">
+                      <a:solidFill>
+                        <a:srgbClr val="D3D9E4"/>
+                      </a:solidFill>
+                      <a:prstDash val="solid"/>
+                      <a:round/>
+                      <a:headEnd type="none" w="med" len="med"/>
+                      <a:tailEnd type="none" w="med" len="med"/>
+                    </a:lnB>
+                    <a:solidFill>
+                      <a:srgbClr val="FBFCFE"/>
+                    </a:solidFill>
+                  </a:tcPr>
+                </a:tc>
+                <a:tc>
+                  <a:txBody>
+                    <a:bodyPr/>
+                    <a:lstStyle/>
+                    <a:p>
+                      <a:pPr indent="0" marL="0">
+                        <a:buNone/>
+                      </a:pPr>
+                      <a:r>
+                        <a:rPr lang="el-GR" sz="1100" dirty="0">
+                          <a:solidFill>
+                            <a:srgbClr val="171B26"/>
+                          </a:solidFill>
+                          <a:latin typeface="Segoe UI" pitchFamily="34" charset="0"/>
+                          <a:ea typeface="Segoe UI" pitchFamily="34" charset="-122"/>
+                          <a:cs typeface="Segoe UI" pitchFamily="34" charset="-120"/>
+                        </a:rPr>
+                        <a:t>Εμπορικό</a:t>
+                      </a:r>
+                      <a:endParaRPr lang="el-GR" sz="1100" dirty="0"/>
+                    </a:p>
+                  </a:txBody>
+                  <a:tcPr marL="91440" marR="91440" marT="45720" marB="45720" anchor="ctr">
+                    <a:lnL w="9525" cap="flat" cmpd="sng" algn="ctr">
+                      <a:solidFill>
+                        <a:srgbClr val="D3D9E4"/>
+                      </a:solidFill>
+                      <a:prstDash val="solid"/>
+                      <a:round/>
+                      <a:headEnd type="none" w="med" len="med"/>
+                      <a:tailEnd type="none" w="med" len="med"/>
+                    </a:lnL>
+                    <a:lnR w="9525" cap="flat" cmpd="sng" algn="ctr">
+                      <a:solidFill>
+                        <a:srgbClr val="D3D9E4"/>
+                      </a:solidFill>
+                      <a:prstDash val="solid"/>
+                      <a:round/>
+                      <a:headEnd type="none" w="med" len="med"/>
+                      <a:tailEnd type="none" w="med" len="med"/>
+                    </a:lnR>
+                    <a:lnT w="9525" cap="flat" cmpd="sng" algn="ctr">
+                      <a:solidFill>
+                        <a:srgbClr val="D3D9E4"/>
+                      </a:solidFill>
+                      <a:prstDash val="solid"/>
+                      <a:round/>
+                      <a:headEnd type="none" w="med" len="med"/>
+                      <a:tailEnd type="none" w="med" len="med"/>
+                    </a:lnT>
+                    <a:lnB w="9525" cap="flat" cmpd="sng" algn="ctr">
+                      <a:solidFill>
+                        <a:srgbClr val="D3D9E4"/>
+                      </a:solidFill>
+                      <a:prstDash val="solid"/>
+                      <a:round/>
+                      <a:headEnd type="none" w="med" len="med"/>
+                      <a:tailEnd type="none" w="med" len="med"/>
+                    </a:lnB>
+                    <a:solidFill>
+                      <a:srgbClr val="FBFCFE"/>
+                    </a:solidFill>
+                  </a:tcPr>
+                </a:tc>
+                <a:tc>
+                  <a:txBody>
+                    <a:bodyPr/>
+                    <a:lstStyle/>
+                    <a:p>
+                      <a:pPr indent="0" marL="0">
+                        <a:buNone/>
+                      </a:pPr>
+                      <a:r>
+                        <a:rPr lang="el-GR" sz="1100" dirty="0">
+                          <a:solidFill>
+                            <a:srgbClr val="171B26"/>
+                          </a:solidFill>
+                          <a:latin typeface="Segoe UI" pitchFamily="34" charset="0"/>
+                          <a:ea typeface="Segoe UI" pitchFamily="34" charset="-122"/>
+                          <a:cs typeface="Segoe UI" pitchFamily="34" charset="-120"/>
+                        </a:rPr>
+                        <a:t>Adobe</a:t>
+                      </a:r>
+                      <a:endParaRPr lang="el-GR" sz="1100" dirty="0"/>
+                    </a:p>
+                  </a:txBody>
+                  <a:tcPr marL="91440" marR="91440" marT="45720" marB="45720" anchor="ctr">
+                    <a:lnL w="9525" cap="flat" cmpd="sng" algn="ctr">
+                      <a:solidFill>
+                        <a:srgbClr val="D3D9E4"/>
+                      </a:solidFill>
+                      <a:prstDash val="solid"/>
+                      <a:round/>
+                      <a:headEnd type="none" w="med" len="med"/>
+                      <a:tailEnd type="none" w="med" len="med"/>
+                    </a:lnL>
+                    <a:lnR w="9525" cap="flat" cmpd="sng" algn="ctr">
+                      <a:solidFill>
+                        <a:srgbClr val="D3D9E4"/>
+                      </a:solidFill>
+                      <a:prstDash val="solid"/>
+                      <a:round/>
+                      <a:headEnd type="none" w="med" len="med"/>
+                      <a:tailEnd type="none" w="med" len="med"/>
+                    </a:lnR>
+                    <a:lnT w="9525" cap="flat" cmpd="sng" algn="ctr">
+                      <a:solidFill>
+                        <a:srgbClr val="D3D9E4"/>
+                      </a:solidFill>
+                      <a:prstDash val="solid"/>
+                      <a:round/>
+                      <a:headEnd type="none" w="med" len="med"/>
+                      <a:tailEnd type="none" w="med" len="med"/>
+                    </a:lnT>
+                    <a:lnB w="9525" cap="flat" cmpd="sng" algn="ctr">
+                      <a:solidFill>
+                        <a:srgbClr val="D3D9E4"/>
+                      </a:solidFill>
+                      <a:prstDash val="solid"/>
+                      <a:round/>
+                      <a:headEnd type="none" w="med" len="med"/>
+                      <a:tailEnd type="none" w="med" len="med"/>
+                    </a:lnB>
+                    <a:solidFill>
+                      <a:srgbClr val="FBFCFE"/>
+                    </a:solidFill>
+                  </a:tcPr>
+                </a:tc>
+              </a:tr>
+              <a:tr h="310896">
+                <a:tc>
+                  <a:txBody>
+                    <a:bodyPr/>
+                    <a:lstStyle/>
+                    <a:p>
+                      <a:pPr indent="0" marL="0">
+                        <a:buNone/>
+                      </a:pPr>
+                      <a:r>
+                        <a:rPr lang="el-GR" sz="1100" b="1" dirty="0">
+                          <a:solidFill>
+                            <a:srgbClr val="171B26"/>
+                          </a:solidFill>
+                          <a:latin typeface="Segoe UI" pitchFamily="34" charset="0"/>
+                          <a:ea typeface="Segoe UI" pitchFamily="34" charset="-122"/>
+                          <a:cs typeface="Segoe UI" pitchFamily="34" charset="-120"/>
+                        </a:rPr>
+                        <a:t>GIMP</a:t>
+                      </a:r>
+                      <a:endParaRPr lang="el-GR" sz="1100" dirty="0"/>
+                    </a:p>
+                  </a:txBody>
+                  <a:tcPr marL="91440" marR="91440" marT="45720" marB="45720" anchor="ctr">
+                    <a:lnL w="9525" cap="flat" cmpd="sng" algn="ctr">
+                      <a:solidFill>
+                        <a:srgbClr val="D3D9E4"/>
+                      </a:solidFill>
+                      <a:prstDash val="solid"/>
+                      <a:round/>
+                      <a:headEnd type="none" w="med" len="med"/>
+                      <a:tailEnd type="none" w="med" len="med"/>
+                    </a:lnL>
+                    <a:lnR w="9525" cap="flat" cmpd="sng" algn="ctr">
+                      <a:solidFill>
+                        <a:srgbClr val="D3D9E4"/>
+                      </a:solidFill>
+                      <a:prstDash val="solid"/>
+                      <a:round/>
+                      <a:headEnd type="none" w="med" len="med"/>
+                      <a:tailEnd type="none" w="med" len="med"/>
+                    </a:lnR>
+                    <a:lnT w="9525" cap="flat" cmpd="sng" algn="ctr">
+                      <a:solidFill>
+                        <a:srgbClr val="D3D9E4"/>
+                      </a:solidFill>
+                      <a:prstDash val="solid"/>
+                      <a:round/>
+                      <a:headEnd type="none" w="med" len="med"/>
+                      <a:tailEnd type="none" w="med" len="med"/>
+                    </a:lnT>
+                    <a:lnB w="9525" cap="flat" cmpd="sng" algn="ctr">
+                      <a:solidFill>
+                        <a:srgbClr val="D3D9E4"/>
+                      </a:solidFill>
+                      <a:prstDash val="solid"/>
+                      <a:round/>
+                      <a:headEnd type="none" w="med" len="med"/>
+                      <a:tailEnd type="none" w="med" len="med"/>
+                    </a:lnB>
+                    <a:solidFill>
+                      <a:srgbClr val="FBFCFE"/>
+                    </a:solidFill>
+                  </a:tcPr>
+                </a:tc>
+                <a:tc>
+                  <a:txBody>
+                    <a:bodyPr/>
+                    <a:lstStyle/>
+                    <a:p>
+                      <a:pPr indent="0" marL="0">
+                        <a:buNone/>
+                      </a:pPr>
+                      <a:r>
+                        <a:rPr lang="el-GR" sz="1100" dirty="0">
+                          <a:solidFill>
+                            <a:srgbClr val="171B26"/>
+                          </a:solidFill>
+                          <a:latin typeface="Segoe UI" pitchFamily="34" charset="0"/>
+                          <a:ea typeface="Segoe UI" pitchFamily="34" charset="-122"/>
+                          <a:cs typeface="Segoe UI" pitchFamily="34" charset="-120"/>
+                        </a:rPr>
+                        <a:t>Επεξεργασία εικόνας</a:t>
+                      </a:r>
+                      <a:endParaRPr lang="el-GR" sz="1100" dirty="0"/>
+                    </a:p>
+                  </a:txBody>
+                  <a:tcPr marL="91440" marR="91440" marT="45720" marB="45720" anchor="ctr">
+                    <a:lnL w="9525" cap="flat" cmpd="sng" algn="ctr">
+                      <a:solidFill>
+                        <a:srgbClr val="D3D9E4"/>
+                      </a:solidFill>
+                      <a:prstDash val="solid"/>
+                      <a:round/>
+                      <a:headEnd type="none" w="med" len="med"/>
+                      <a:tailEnd type="none" w="med" len="med"/>
+                    </a:lnL>
+                    <a:lnR w="9525" cap="flat" cmpd="sng" algn="ctr">
+                      <a:solidFill>
+                        <a:srgbClr val="D3D9E4"/>
+                      </a:solidFill>
+                      <a:prstDash val="solid"/>
+                      <a:round/>
+                      <a:headEnd type="none" w="med" len="med"/>
+                      <a:tailEnd type="none" w="med" len="med"/>
+                    </a:lnR>
+                    <a:lnT w="9525" cap="flat" cmpd="sng" algn="ctr">
+                      <a:solidFill>
+                        <a:srgbClr val="D3D9E4"/>
+                      </a:solidFill>
+                      <a:prstDash val="solid"/>
+                      <a:round/>
+                      <a:headEnd type="none" w="med" len="med"/>
+                      <a:tailEnd type="none" w="med" len="med"/>
+                    </a:lnT>
+                    <a:lnB w="9525" cap="flat" cmpd="sng" algn="ctr">
+                      <a:solidFill>
+                        <a:srgbClr val="D3D9E4"/>
+                      </a:solidFill>
+                      <a:prstDash val="solid"/>
+                      <a:round/>
+                      <a:headEnd type="none" w="med" len="med"/>
+                      <a:tailEnd type="none" w="med" len="med"/>
+                    </a:lnB>
+                    <a:solidFill>
+                      <a:srgbClr val="FBFCFE"/>
+                    </a:solidFill>
+                  </a:tcPr>
+                </a:tc>
+                <a:tc>
+                  <a:txBody>
+                    <a:bodyPr/>
+                    <a:lstStyle/>
+                    <a:p>
+                      <a:pPr indent="0" marL="0">
+                        <a:buNone/>
+                      </a:pPr>
+                      <a:r>
+                        <a:rPr lang="el-GR" sz="1100" dirty="0">
+                          <a:solidFill>
+                            <a:srgbClr val="171B26"/>
+                          </a:solidFill>
+                          <a:latin typeface="Segoe UI" pitchFamily="34" charset="0"/>
+                          <a:ea typeface="Segoe UI" pitchFamily="34" charset="-122"/>
+                          <a:cs typeface="Segoe UI" pitchFamily="34" charset="-120"/>
+                        </a:rPr>
+                        <a:t>ΕΛ/ΛΑΚ</a:t>
+                      </a:r>
+                      <a:endParaRPr lang="el-GR" sz="1100" dirty="0"/>
+                    </a:p>
+                  </a:txBody>
+                  <a:tcPr marL="91440" marR="91440" marT="45720" marB="45720" anchor="ctr">
+                    <a:lnL w="9525" cap="flat" cmpd="sng" algn="ctr">
+                      <a:solidFill>
+                        <a:srgbClr val="D3D9E4"/>
+                      </a:solidFill>
+                      <a:prstDash val="solid"/>
+                      <a:round/>
+                      <a:headEnd type="none" w="med" len="med"/>
+                      <a:tailEnd type="none" w="med" len="med"/>
+                    </a:lnL>
+                    <a:lnR w="9525" cap="flat" cmpd="sng" algn="ctr">
+                      <a:solidFill>
+                        <a:srgbClr val="D3D9E4"/>
+                      </a:solidFill>
+                      <a:prstDash val="solid"/>
+                      <a:round/>
+                      <a:headEnd type="none" w="med" len="med"/>
+                      <a:tailEnd type="none" w="med" len="med"/>
+                    </a:lnR>
+                    <a:lnT w="9525" cap="flat" cmpd="sng" algn="ctr">
+                      <a:solidFill>
+                        <a:srgbClr val="D3D9E4"/>
+                      </a:solidFill>
+                      <a:prstDash val="solid"/>
+                      <a:round/>
+                      <a:headEnd type="none" w="med" len="med"/>
+                      <a:tailEnd type="none" w="med" len="med"/>
+                    </a:lnT>
+                    <a:lnB w="9525" cap="flat" cmpd="sng" algn="ctr">
+                      <a:solidFill>
+                        <a:srgbClr val="D3D9E4"/>
+                      </a:solidFill>
+                      <a:prstDash val="solid"/>
+                      <a:round/>
+                      <a:headEnd type="none" w="med" len="med"/>
+                      <a:tailEnd type="none" w="med" len="med"/>
+                    </a:lnB>
+                    <a:solidFill>
+                      <a:srgbClr val="FBFCFE"/>
+                    </a:solidFill>
+                  </a:tcPr>
+                </a:tc>
+                <a:tc>
+                  <a:txBody>
+                    <a:bodyPr/>
+                    <a:lstStyle/>
+                    <a:p>
+                      <a:pPr indent="0" marL="0">
+                        <a:buNone/>
+                      </a:pPr>
+                      <a:r>
+                        <a:rPr lang="el-GR" sz="1100" dirty="0">
+                          <a:solidFill>
+                            <a:srgbClr val="171B26"/>
+                          </a:solidFill>
+                          <a:latin typeface="Segoe UI" pitchFamily="34" charset="0"/>
+                          <a:ea typeface="Segoe UI" pitchFamily="34" charset="-122"/>
+                          <a:cs typeface="Segoe UI" pitchFamily="34" charset="-120"/>
+                        </a:rPr>
+                        <a:t>Κοινότητα GNOME</a:t>
+                      </a:r>
+                      <a:endParaRPr lang="el-GR" sz="1100" dirty="0"/>
+                    </a:p>
+                  </a:txBody>
+                  <a:tcPr marL="91440" marR="91440" marT="45720" marB="45720" anchor="ctr">
+                    <a:lnL w="9525" cap="flat" cmpd="sng" algn="ctr">
+                      <a:solidFill>
+                        <a:srgbClr val="D3D9E4"/>
+                      </a:solidFill>
+                      <a:prstDash val="solid"/>
+                      <a:round/>
+                      <a:headEnd type="none" w="med" len="med"/>
+                      <a:tailEnd type="none" w="med" len="med"/>
+                    </a:lnL>
+                    <a:lnR w="9525" cap="flat" cmpd="sng" algn="ctr">
+                      <a:solidFill>
+                        <a:srgbClr val="D3D9E4"/>
+                      </a:solidFill>
+                      <a:prstDash val="solid"/>
+                      <a:round/>
+                      <a:headEnd type="none" w="med" len="med"/>
+                      <a:tailEnd type="none" w="med" len="med"/>
+                    </a:lnR>
+                    <a:lnT w="9525" cap="flat" cmpd="sng" algn="ctr">
+                      <a:solidFill>
+                        <a:srgbClr val="D3D9E4"/>
+                      </a:solidFill>
+                      <a:prstDash val="solid"/>
+                      <a:round/>
+                      <a:headEnd type="none" w="med" len="med"/>
+                      <a:tailEnd type="none" w="med" len="med"/>
+                    </a:lnT>
+                    <a:lnB w="9525" cap="flat" cmpd="sng" algn="ctr">
+                      <a:solidFill>
+                        <a:srgbClr val="D3D9E4"/>
+                      </a:solidFill>
+                      <a:prstDash val="solid"/>
+                      <a:round/>
+                      <a:headEnd type="none" w="med" len="med"/>
+                      <a:tailEnd type="none" w="med" len="med"/>
+                    </a:lnB>
+                    <a:solidFill>
+                      <a:srgbClr val="FBFCFE"/>
+                    </a:solidFill>
+                  </a:tcPr>
+                </a:tc>
+              </a:tr>
+              <a:tr h="310896">
+                <a:tc>
+                  <a:txBody>
+                    <a:bodyPr/>
+                    <a:lstStyle/>
+                    <a:p>
+                      <a:pPr indent="0" marL="0">
+                        <a:buNone/>
+                      </a:pPr>
+                      <a:r>
+                        <a:rPr lang="el-GR" sz="1100" b="1" dirty="0">
+                          <a:solidFill>
+                            <a:srgbClr val="171B26"/>
+                          </a:solidFill>
+                          <a:latin typeface="Segoe UI" pitchFamily="34" charset="0"/>
+                          <a:ea typeface="Segoe UI" pitchFamily="34" charset="-122"/>
+                          <a:cs typeface="Segoe UI" pitchFamily="34" charset="-120"/>
+                        </a:rPr>
+                        <a:t>Firefox</a:t>
+                      </a:r>
+                      <a:endParaRPr lang="el-GR" sz="1100" dirty="0"/>
+                    </a:p>
+                  </a:txBody>
+                  <a:tcPr marL="91440" marR="91440" marT="45720" marB="45720" anchor="ctr">
+                    <a:lnL w="9525" cap="flat" cmpd="sng" algn="ctr">
+                      <a:solidFill>
+                        <a:srgbClr val="D3D9E4"/>
+                      </a:solidFill>
+                      <a:prstDash val="solid"/>
+                      <a:round/>
+                      <a:headEnd type="none" w="med" len="med"/>
+                      <a:tailEnd type="none" w="med" len="med"/>
+                    </a:lnL>
+                    <a:lnR w="9525" cap="flat" cmpd="sng" algn="ctr">
+                      <a:solidFill>
+                        <a:srgbClr val="D3D9E4"/>
+                      </a:solidFill>
+                      <a:prstDash val="solid"/>
+                      <a:round/>
+                      <a:headEnd type="none" w="med" len="med"/>
+                      <a:tailEnd type="none" w="med" len="med"/>
+                    </a:lnR>
+                    <a:lnT w="9525" cap="flat" cmpd="sng" algn="ctr">
+                      <a:solidFill>
+                        <a:srgbClr val="D3D9E4"/>
+                      </a:solidFill>
+                      <a:prstDash val="solid"/>
+                      <a:round/>
+                      <a:headEnd type="none" w="med" len="med"/>
+                      <a:tailEnd type="none" w="med" len="med"/>
+                    </a:lnT>
+                    <a:lnB w="9525" cap="flat" cmpd="sng" algn="ctr">
+                      <a:solidFill>
+                        <a:srgbClr val="D3D9E4"/>
+                      </a:solidFill>
+                      <a:prstDash val="solid"/>
+                      <a:round/>
+                      <a:headEnd type="none" w="med" len="med"/>
+                      <a:tailEnd type="none" w="med" len="med"/>
+                    </a:lnB>
+                    <a:solidFill>
+                      <a:srgbClr val="FBFCFE"/>
+                    </a:solidFill>
+                  </a:tcPr>
+                </a:tc>
+                <a:tc>
+                  <a:txBody>
+                    <a:bodyPr/>
+                    <a:lstStyle/>
+                    <a:p>
+                      <a:pPr indent="0" marL="0">
+                        <a:buNone/>
+                      </a:pPr>
+                      <a:r>
+                        <a:rPr lang="el-GR" sz="1100" dirty="0">
+                          <a:solidFill>
+                            <a:srgbClr val="171B26"/>
+                          </a:solidFill>
+                          <a:latin typeface="Segoe UI" pitchFamily="34" charset="0"/>
+                          <a:ea typeface="Segoe UI" pitchFamily="34" charset="-122"/>
+                          <a:cs typeface="Segoe UI" pitchFamily="34" charset="-120"/>
+                        </a:rPr>
+                        <a:t>Φυλλομετρητής (browser)</a:t>
+                      </a:r>
+                      <a:endParaRPr lang="el-GR" sz="1100" dirty="0"/>
+                    </a:p>
+                  </a:txBody>
+                  <a:tcPr marL="91440" marR="91440" marT="45720" marB="45720" anchor="ctr">
+                    <a:lnL w="9525" cap="flat" cmpd="sng" algn="ctr">
+                      <a:solidFill>
+                        <a:srgbClr val="D3D9E4"/>
+                      </a:solidFill>
+                      <a:prstDash val="solid"/>
+                      <a:round/>
+                      <a:headEnd type="none" w="med" len="med"/>
+                      <a:tailEnd type="none" w="med" len="med"/>
+                    </a:lnL>
+                    <a:lnR w="9525" cap="flat" cmpd="sng" algn="ctr">
+                      <a:solidFill>
+                        <a:srgbClr val="D3D9E4"/>
+                      </a:solidFill>
+                      <a:prstDash val="solid"/>
+                      <a:round/>
+                      <a:headEnd type="none" w="med" len="med"/>
+                      <a:tailEnd type="none" w="med" len="med"/>
+                    </a:lnR>
+                    <a:lnT w="9525" cap="flat" cmpd="sng" algn="ctr">
+                      <a:solidFill>
+                        <a:srgbClr val="D3D9E4"/>
+                      </a:solidFill>
+                      <a:prstDash val="solid"/>
+                      <a:round/>
+                      <a:headEnd type="none" w="med" len="med"/>
+                      <a:tailEnd type="none" w="med" len="med"/>
+                    </a:lnT>
+                    <a:lnB w="9525" cap="flat" cmpd="sng" algn="ctr">
+                      <a:solidFill>
+                        <a:srgbClr val="D3D9E4"/>
+                      </a:solidFill>
+                      <a:prstDash val="solid"/>
+                      <a:round/>
+                      <a:headEnd type="none" w="med" len="med"/>
+                      <a:tailEnd type="none" w="med" len="med"/>
+                    </a:lnB>
+                    <a:solidFill>
+                      <a:srgbClr val="FBFCFE"/>
+                    </a:solidFill>
+                  </a:tcPr>
+                </a:tc>
+                <a:tc>
+                  <a:txBody>
+                    <a:bodyPr/>
+                    <a:lstStyle/>
+                    <a:p>
+                      <a:pPr indent="0" marL="0">
+                        <a:buNone/>
+                      </a:pPr>
+                      <a:r>
+                        <a:rPr lang="el-GR" sz="1100" dirty="0">
+                          <a:solidFill>
+                            <a:srgbClr val="171B26"/>
+                          </a:solidFill>
+                          <a:latin typeface="Segoe UI" pitchFamily="34" charset="0"/>
+                          <a:ea typeface="Segoe UI" pitchFamily="34" charset="-122"/>
+                          <a:cs typeface="Segoe UI" pitchFamily="34" charset="-120"/>
+                        </a:rPr>
+                        <a:t>ΕΛ/ΛΑΚ</a:t>
+                      </a:r>
+                      <a:endParaRPr lang="el-GR" sz="1100" dirty="0"/>
+                    </a:p>
+                  </a:txBody>
+                  <a:tcPr marL="91440" marR="91440" marT="45720" marB="45720" anchor="ctr">
+                    <a:lnL w="9525" cap="flat" cmpd="sng" algn="ctr">
+                      <a:solidFill>
+                        <a:srgbClr val="D3D9E4"/>
+                      </a:solidFill>
+                      <a:prstDash val="solid"/>
+                      <a:round/>
+                      <a:headEnd type="none" w="med" len="med"/>
+                      <a:tailEnd type="none" w="med" len="med"/>
+                    </a:lnL>
+                    <a:lnR w="9525" cap="flat" cmpd="sng" algn="ctr">
+                      <a:solidFill>
+                        <a:srgbClr val="D3D9E4"/>
+                      </a:solidFill>
+                      <a:prstDash val="solid"/>
+                      <a:round/>
+                      <a:headEnd type="none" w="med" len="med"/>
+                      <a:tailEnd type="none" w="med" len="med"/>
+                    </a:lnR>
+                    <a:lnT w="9525" cap="flat" cmpd="sng" algn="ctr">
+                      <a:solidFill>
+                        <a:srgbClr val="D3D9E4"/>
+                      </a:solidFill>
+                      <a:prstDash val="solid"/>
+                      <a:round/>
+                      <a:headEnd type="none" w="med" len="med"/>
+                      <a:tailEnd type="none" w="med" len="med"/>
+                    </a:lnT>
+                    <a:lnB w="9525" cap="flat" cmpd="sng" algn="ctr">
+                      <a:solidFill>
+                        <a:srgbClr val="D3D9E4"/>
+                      </a:solidFill>
+                      <a:prstDash val="solid"/>
+                      <a:round/>
+                      <a:headEnd type="none" w="med" len="med"/>
+                      <a:tailEnd type="none" w="med" len="med"/>
+                    </a:lnB>
+                    <a:solidFill>
+                      <a:srgbClr val="FBFCFE"/>
+                    </a:solidFill>
+                  </a:tcPr>
+                </a:tc>
+                <a:tc>
+                  <a:txBody>
+                    <a:bodyPr/>
+                    <a:lstStyle/>
+                    <a:p>
+                      <a:pPr indent="0" marL="0">
+                        <a:buNone/>
+                      </a:pPr>
+                      <a:r>
+                        <a:rPr lang="el-GR" sz="1100" dirty="0">
+                          <a:solidFill>
+                            <a:srgbClr val="171B26"/>
+                          </a:solidFill>
+                          <a:latin typeface="Segoe UI" pitchFamily="34" charset="0"/>
+                          <a:ea typeface="Segoe UI" pitchFamily="34" charset="-122"/>
+                          <a:cs typeface="Segoe UI" pitchFamily="34" charset="-120"/>
+                        </a:rPr>
+                        <a:t>Mozilla</a:t>
+                      </a:r>
+                      <a:endParaRPr lang="el-GR" sz="1100" dirty="0"/>
+                    </a:p>
+                  </a:txBody>
+                  <a:tcPr marL="91440" marR="91440" marT="45720" marB="45720" anchor="ctr">
+                    <a:lnL w="9525" cap="flat" cmpd="sng" algn="ctr">
+                      <a:solidFill>
+                        <a:srgbClr val="D3D9E4"/>
+                      </a:solidFill>
+                      <a:prstDash val="solid"/>
+                      <a:round/>
+                      <a:headEnd type="none" w="med" len="med"/>
+                      <a:tailEnd type="none" w="med" len="med"/>
+                    </a:lnL>
+                    <a:lnR w="9525" cap="flat" cmpd="sng" algn="ctr">
+                      <a:solidFill>
+                        <a:srgbClr val="D3D9E4"/>
+                      </a:solidFill>
+                      <a:prstDash val="solid"/>
+                      <a:round/>
+                      <a:headEnd type="none" w="med" len="med"/>
+                      <a:tailEnd type="none" w="med" len="med"/>
+                    </a:lnR>
+                    <a:lnT w="9525" cap="flat" cmpd="sng" algn="ctr">
+                      <a:solidFill>
+                        <a:srgbClr val="D3D9E4"/>
+                      </a:solidFill>
+                      <a:prstDash val="solid"/>
+                      <a:round/>
+                      <a:headEnd type="none" w="med" len="med"/>
+                      <a:tailEnd type="none" w="med" len="med"/>
+                    </a:lnT>
+                    <a:lnB w="9525" cap="flat" cmpd="sng" algn="ctr">
+                      <a:solidFill>
+                        <a:srgbClr val="D3D9E4"/>
+                      </a:solidFill>
+                      <a:prstDash val="solid"/>
+                      <a:round/>
+                      <a:headEnd type="none" w="med" len="med"/>
+                      <a:tailEnd type="none" w="med" len="med"/>
+                    </a:lnB>
+                    <a:solidFill>
+                      <a:srgbClr val="FBFCFE"/>
+                    </a:solidFill>
+                  </a:tcPr>
+                </a:tc>
+              </a:tr>
+              <a:tr h="310896">
+                <a:tc>
+                  <a:txBody>
+                    <a:bodyPr/>
+                    <a:lstStyle/>
+                    <a:p>
+                      <a:pPr indent="0" marL="0">
+                        <a:buNone/>
+                      </a:pPr>
+                      <a:r>
+                        <a:rPr lang="el-GR" sz="1100" b="1" dirty="0">
+                          <a:solidFill>
+                            <a:srgbClr val="171B26"/>
+                          </a:solidFill>
+                          <a:latin typeface="Segoe UI" pitchFamily="34" charset="0"/>
+                          <a:ea typeface="Segoe UI" pitchFamily="34" charset="-122"/>
+                          <a:cs typeface="Segoe UI" pitchFamily="34" charset="-120"/>
+                        </a:rPr>
+                        <a:t>7-Zip</a:t>
+                      </a:r>
+                      <a:endParaRPr lang="el-GR" sz="1100" dirty="0"/>
+                    </a:p>
+                  </a:txBody>
+                  <a:tcPr marL="91440" marR="91440" marT="45720" marB="45720" anchor="ctr">
+                    <a:lnL w="9525" cap="flat" cmpd="sng" algn="ctr">
+                      <a:solidFill>
+                        <a:srgbClr val="D3D9E4"/>
+                      </a:solidFill>
+                      <a:prstDash val="solid"/>
+                      <a:round/>
+                      <a:headEnd type="none" w="med" len="med"/>
+                      <a:tailEnd type="none" w="med" len="med"/>
+                    </a:lnL>
+                    <a:lnR w="9525" cap="flat" cmpd="sng" algn="ctr">
+                      <a:solidFill>
+                        <a:srgbClr val="D3D9E4"/>
+                      </a:solidFill>
+                      <a:prstDash val="solid"/>
+                      <a:round/>
+                      <a:headEnd type="none" w="med" len="med"/>
+                      <a:tailEnd type="none" w="med" len="med"/>
+                    </a:lnR>
+                    <a:lnT w="9525" cap="flat" cmpd="sng" algn="ctr">
+                      <a:solidFill>
+                        <a:srgbClr val="D3D9E4"/>
+                      </a:solidFill>
+                      <a:prstDash val="solid"/>
+                      <a:round/>
+                      <a:headEnd type="none" w="med" len="med"/>
+                      <a:tailEnd type="none" w="med" len="med"/>
+                    </a:lnT>
+                    <a:lnB w="9525" cap="flat" cmpd="sng" algn="ctr">
+                      <a:solidFill>
+                        <a:srgbClr val="D3D9E4"/>
+                      </a:solidFill>
+                      <a:prstDash val="solid"/>
+                      <a:round/>
+                      <a:headEnd type="none" w="med" len="med"/>
+                      <a:tailEnd type="none" w="med" len="med"/>
+                    </a:lnB>
+                    <a:solidFill>
+                      <a:srgbClr val="FBFCFE"/>
+                    </a:solidFill>
+                  </a:tcPr>
+                </a:tc>
+                <a:tc>
+                  <a:txBody>
+                    <a:bodyPr/>
+                    <a:lstStyle/>
+                    <a:p>
+                      <a:pPr indent="0" marL="0">
+                        <a:buNone/>
+                      </a:pPr>
+                      <a:r>
+                        <a:rPr lang="el-GR" sz="1100" dirty="0">
+                          <a:solidFill>
+                            <a:srgbClr val="171B26"/>
+                          </a:solidFill>
+                          <a:latin typeface="Segoe UI" pitchFamily="34" charset="0"/>
+                          <a:ea typeface="Segoe UI" pitchFamily="34" charset="-122"/>
+                          <a:cs typeface="Segoe UI" pitchFamily="34" charset="-120"/>
+                        </a:rPr>
+                        <a:t>Συμπίεση αρχείων</a:t>
+                      </a:r>
+                      <a:endParaRPr lang="el-GR" sz="1100" dirty="0"/>
+                    </a:p>
+                  </a:txBody>
+                  <a:tcPr marL="91440" marR="91440" marT="45720" marB="45720" anchor="ctr">
+                    <a:lnL w="9525" cap="flat" cmpd="sng" algn="ctr">
+                      <a:solidFill>
+                        <a:srgbClr val="D3D9E4"/>
+                      </a:solidFill>
+                      <a:prstDash val="solid"/>
+                      <a:round/>
+                      <a:headEnd type="none" w="med" len="med"/>
+                      <a:tailEnd type="none" w="med" len="med"/>
+                    </a:lnL>
+                    <a:lnR w="9525" cap="flat" cmpd="sng" algn="ctr">
+                      <a:solidFill>
+                        <a:srgbClr val="D3D9E4"/>
+                      </a:solidFill>
+                      <a:prstDash val="solid"/>
+                      <a:round/>
+                      <a:headEnd type="none" w="med" len="med"/>
+                      <a:tailEnd type="none" w="med" len="med"/>
+                    </a:lnR>
+                    <a:lnT w="9525" cap="flat" cmpd="sng" algn="ctr">
+                      <a:solidFill>
+                        <a:srgbClr val="D3D9E4"/>
+                      </a:solidFill>
+                      <a:prstDash val="solid"/>
+                      <a:round/>
+                      <a:headEnd type="none" w="med" len="med"/>
+                      <a:tailEnd type="none" w="med" len="med"/>
+                    </a:lnT>
+                    <a:lnB w="9525" cap="flat" cmpd="sng" algn="ctr">
+                      <a:solidFill>
+                        <a:srgbClr val="D3D9E4"/>
+                      </a:solidFill>
+                      <a:prstDash val="solid"/>
+                      <a:round/>
+                      <a:headEnd type="none" w="med" len="med"/>
+                      <a:tailEnd type="none" w="med" len="med"/>
+                    </a:lnB>
+                    <a:solidFill>
+                      <a:srgbClr val="FBFCFE"/>
+                    </a:solidFill>
+                  </a:tcPr>
+                </a:tc>
+                <a:tc>
+                  <a:txBody>
+                    <a:bodyPr/>
+                    <a:lstStyle/>
+                    <a:p>
+                      <a:pPr indent="0" marL="0">
+                        <a:buNone/>
+                      </a:pPr>
+                      <a:r>
+                        <a:rPr lang="el-GR" sz="1100" dirty="0">
+                          <a:solidFill>
+                            <a:srgbClr val="171B26"/>
+                          </a:solidFill>
+                          <a:latin typeface="Segoe UI" pitchFamily="34" charset="0"/>
+                          <a:ea typeface="Segoe UI" pitchFamily="34" charset="-122"/>
+                          <a:cs typeface="Segoe UI" pitchFamily="34" charset="-120"/>
+                        </a:rPr>
+                        <a:t>ΕΛ/ΛΑΚ</a:t>
+                      </a:r>
+                      <a:endParaRPr lang="el-GR" sz="1100" dirty="0"/>
+                    </a:p>
+                  </a:txBody>
+                  <a:tcPr marL="91440" marR="91440" marT="45720" marB="45720" anchor="ctr">
+                    <a:lnL w="9525" cap="flat" cmpd="sng" algn="ctr">
+                      <a:solidFill>
+                        <a:srgbClr val="D3D9E4"/>
+                      </a:solidFill>
+                      <a:prstDash val="solid"/>
+                      <a:round/>
+                      <a:headEnd type="none" w="med" len="med"/>
+                      <a:tailEnd type="none" w="med" len="med"/>
+                    </a:lnL>
+                    <a:lnR w="9525" cap="flat" cmpd="sng" algn="ctr">
+                      <a:solidFill>
+                        <a:srgbClr val="D3D9E4"/>
+                      </a:solidFill>
+                      <a:prstDash val="solid"/>
+                      <a:round/>
+                      <a:headEnd type="none" w="med" len="med"/>
+                      <a:tailEnd type="none" w="med" len="med"/>
+                    </a:lnR>
+                    <a:lnT w="9525" cap="flat" cmpd="sng" algn="ctr">
+                      <a:solidFill>
+                        <a:srgbClr val="D3D9E4"/>
+                      </a:solidFill>
+                      <a:prstDash val="solid"/>
+                      <a:round/>
+                      <a:headEnd type="none" w="med" len="med"/>
+                      <a:tailEnd type="none" w="med" len="med"/>
+                    </a:lnT>
+                    <a:lnB w="9525" cap="flat" cmpd="sng" algn="ctr">
+                      <a:solidFill>
+                        <a:srgbClr val="D3D9E4"/>
+                      </a:solidFill>
+                      <a:prstDash val="solid"/>
+                      <a:round/>
+                      <a:headEnd type="none" w="med" len="med"/>
+                      <a:tailEnd type="none" w="med" len="med"/>
+                    </a:lnB>
+                    <a:solidFill>
+                      <a:srgbClr val="FBFCFE"/>
+                    </a:solidFill>
+                  </a:tcPr>
+                </a:tc>
+                <a:tc>
+                  <a:txBody>
+                    <a:bodyPr/>
+                    <a:lstStyle/>
+                    <a:p>
+                      <a:pPr indent="0" marL="0">
+                        <a:buNone/>
+                      </a:pPr>
+                      <a:r>
+                        <a:rPr lang="el-GR" sz="1100" dirty="0">
+                          <a:solidFill>
+                            <a:srgbClr val="171B26"/>
+                          </a:solidFill>
+                          <a:latin typeface="Segoe UI" pitchFamily="34" charset="0"/>
+                          <a:ea typeface="Segoe UI" pitchFamily="34" charset="-122"/>
+                          <a:cs typeface="Segoe UI" pitchFamily="34" charset="-120"/>
+                        </a:rPr>
+                        <a:t>Igor Pavlov</a:t>
+                      </a:r>
+                      <a:endParaRPr lang="el-GR" sz="1100" dirty="0"/>
+                    </a:p>
+                  </a:txBody>
+                  <a:tcPr marL="91440" marR="91440" marT="45720" marB="45720" anchor="ctr">
+                    <a:lnL w="9525" cap="flat" cmpd="sng" algn="ctr">
+                      <a:solidFill>
+                        <a:srgbClr val="D3D9E4"/>
+                      </a:solidFill>
+                      <a:prstDash val="solid"/>
+                      <a:round/>
+                      <a:headEnd type="none" w="med" len="med"/>
+                      <a:tailEnd type="none" w="med" len="med"/>
+                    </a:lnL>
+                    <a:lnR w="9525" cap="flat" cmpd="sng" algn="ctr">
+                      <a:solidFill>
+                        <a:srgbClr val="D3D9E4"/>
+                      </a:solidFill>
+                      <a:prstDash val="solid"/>
+                      <a:round/>
+                      <a:headEnd type="none" w="med" len="med"/>
+                      <a:tailEnd type="none" w="med" len="med"/>
+                    </a:lnR>
+                    <a:lnT w="9525" cap="flat" cmpd="sng" algn="ctr">
+                      <a:solidFill>
+                        <a:srgbClr val="D3D9E4"/>
+                      </a:solidFill>
+                      <a:prstDash val="solid"/>
+                      <a:round/>
+                      <a:headEnd type="none" w="med" len="med"/>
+                      <a:tailEnd type="none" w="med" len="med"/>
+                    </a:lnT>
+                    <a:lnB w="9525" cap="flat" cmpd="sng" algn="ctr">
+                      <a:solidFill>
+                        <a:srgbClr val="D3D9E4"/>
+                      </a:solidFill>
+                      <a:prstDash val="solid"/>
+                      <a:round/>
+                      <a:headEnd type="none" w="med" len="med"/>
+                      <a:tailEnd type="none" w="med" len="med"/>
+                    </a:lnB>
+                    <a:solidFill>
+                      <a:srgbClr val="FBFCFE"/>
+                    </a:solidFill>
+                  </a:tcPr>
+                </a:tc>
+              </a:tr>
+            </a:tbl>
+          </a:graphicData>
+        </a:graphic>
+      </p:graphicFrame>
+      <p:sp>
+        <p:nvSpPr>
+          <p:cNvPr id="108" name="Shape 108"/>
+          <p:cNvSpPr/>
+          <p:nvPr/>
+        </p:nvSpPr>
+        <p:spPr>
+          <a:xfrm>
+            <a:off x="566928" y="4818888"/>
+            <a:ext cx="10881360" cy="1170432"/>
+          </a:xfrm>
+          <a:prstGeom prst="roundRect">
+            <a:avLst>
+              <a:gd name="adj" fmla="val 1935"/>
+            </a:avLst>
+          </a:prstGeom>
+          <a:solidFill>
+            <a:srgbClr val="F6EDD6"/>
+          </a:solidFill>
+          <a:ln w="12700">
+            <a:solidFill>
+              <a:srgbClr val="F6EDD6"/>
+            </a:solidFill>
+            <a:prstDash val="solid"/>
+          </a:ln>
+        </p:spPr>
+        <p:txBody>
+          <a:bodyPr/>
+          <a:p/>
+        </p:txBody>
+      </p:sp>
+      <p:sp>
+        <p:nvSpPr>
+          <p:cNvPr id="109" name="Text 109"/>
+          <p:cNvSpPr txBox="1"/>
+          <p:nvPr/>
+        </p:nvSpPr>
+        <p:spPr>
+          <a:xfrm>
+            <a:off x="731520" y="4946904"/>
+            <a:ext cx="10552176" cy="274320"/>
+          </a:xfrm>
+          <a:prstGeom prst="rect">
+            <a:avLst/>
+          </a:prstGeom>
+          <a:noFill/>
+          <a:ln/>
+        </p:spPr>
+        <p:txBody>
+          <a:bodyPr wrap="square" lIns="0" tIns="0" rIns="0" bIns="0" rtlCol="0" anchor="ctr"/>
+          <a:lstStyle/>
+          <a:p>
+            <a:pPr indent="0" marL="0">
+              <a:buNone/>
+            </a:pPr>
+            <a:r>
+              <a:rPr lang="el-GR" sz="1400" b="1" dirty="0">
+                <a:solidFill>
+                  <a:srgbClr val="171B26"/>
+                </a:solidFill>
+                <a:latin typeface="Segoe UI" pitchFamily="34" charset="0"/>
+                <a:ea typeface="Segoe UI" pitchFamily="34" charset="-122"/>
+                <a:cs typeface="Segoe UI" pitchFamily="34" charset="-120"/>
+              </a:rPr>
+              <a:t>Δωρεάν δεν σημαίνει ΕΛ/ΛΑΚ</a:t>
+            </a:r>
+            <a:endParaRPr lang="el-GR" sz="1400" dirty="0"/>
+          </a:p>
+        </p:txBody>
+      </p:sp>
+      <p:sp>
+        <p:nvSpPr>
+          <p:cNvPr id="110" name="Text 110"/>
+          <p:cNvSpPr txBox="1"/>
+          <p:nvPr/>
+        </p:nvSpPr>
+        <p:spPr>
+          <a:xfrm>
+            <a:off x="731520" y="5294376"/>
+            <a:ext cx="10552176" cy="603504"/>
+          </a:xfrm>
+          <a:prstGeom prst="rect">
+            <a:avLst/>
+          </a:prstGeom>
+          <a:noFill/>
+          <a:ln/>
+        </p:spPr>
+        <p:txBody>
+          <a:bodyPr wrap="square" lIns="0" tIns="0" rIns="0" bIns="0" rtlCol="0" anchor="t"/>
+          <a:lstStyle/>
+          <a:p>
+            <a:pPr indent="0" marL="0">
+              <a:lnSpc>
+                <a:spcPct val="112000"/>
+              </a:lnSpc>
+              <a:spcAft>
+                <a:spcPts val="400"/>
+              </a:spcAft>
+              <a:buNone/>
+            </a:pPr>
+            <a:r>
+              <a:rPr lang="el-GR" sz="1200" dirty="0">
+                <a:solidFill>
+                  <a:srgbClr val="4A5265"/>
+                </a:solidFill>
+                <a:latin typeface="Segoe UI" pitchFamily="34" charset="0"/>
+                <a:ea typeface="Segoe UI" pitchFamily="34" charset="-122"/>
+                <a:cs typeface="Segoe UI" pitchFamily="34" charset="-120"/>
+              </a:rPr>
+              <a:t xml:space="preserve">Το Chrome και το WhatsApp είναι δωρεάν, αλλά ο κώδικάς τους είναι κλειστός. </a:t>
+            </a:r>
+            <a:r>
+              <a:rPr lang="el-GR" sz="1200" b="1" dirty="0">
+                <a:solidFill>
+                  <a:srgbClr val="171B26"/>
+                </a:solidFill>
+                <a:latin typeface="Segoe UI" pitchFamily="34" charset="0"/>
+                <a:ea typeface="Segoe UI" pitchFamily="34" charset="-122"/>
+                <a:cs typeface="Segoe UI" pitchFamily="34" charset="-120"/>
+              </a:rPr>
+              <a:t>ΕΛ/ΛΑΚ</a:t>
+            </a:r>
+            <a:r>
+              <a:rPr lang="el-GR" sz="1200" dirty="0">
+                <a:solidFill>
+                  <a:srgbClr val="4A5265"/>
+                </a:solidFill>
+                <a:latin typeface="Segoe UI" pitchFamily="34" charset="0"/>
+                <a:ea typeface="Segoe UI" pitchFamily="34" charset="-122"/>
+                <a:cs typeface="Segoe UI" pitchFamily="34" charset="-120"/>
+              </a:rPr>
+              <a:t xml:space="preserve"> σημαίνει ότι ο κώδικας είναι </a:t>
+            </a:r>
+            <a:r>
+              <a:rPr lang="el-GR" sz="1200" b="1" dirty="0">
+                <a:solidFill>
+                  <a:srgbClr val="171B26"/>
+                </a:solidFill>
+                <a:latin typeface="Segoe UI" pitchFamily="34" charset="0"/>
+                <a:ea typeface="Segoe UI" pitchFamily="34" charset="-122"/>
+                <a:cs typeface="Segoe UI" pitchFamily="34" charset="-120"/>
+              </a:rPr>
+              <a:t>ανοιχτός</a:t>
+            </a:r>
+            <a:r>
+              <a:rPr lang="el-GR" sz="1200" dirty="0">
+                <a:solidFill>
+                  <a:srgbClr val="4A5265"/>
+                </a:solidFill>
+                <a:latin typeface="Segoe UI" pitchFamily="34" charset="0"/>
+                <a:ea typeface="Segoe UI" pitchFamily="34" charset="-122"/>
+                <a:cs typeface="Segoe UI" pitchFamily="34" charset="-120"/>
+              </a:rPr>
+              <a:t>: τον βλέπεις, τον αλλάζεις, τον μοιράζεσαι.</a:t>
+            </a:r>
+            <a:endParaRPr lang="el-GR" sz="1200" dirty="0"/>
           </a:p>
         </p:txBody>
       </p:sp>
@@ -19676,7 +24584,7 @@
         </p:nvGraphicFramePr>
         <p:xfrm>
           <a:off x="566928" y="2697480"/>
-          <a:ext cx="10881360" cy="2633472"/>
+          <a:ext cx="10881360" cy="3072384"/>
         </p:xfrm>
         <a:graphic>
           <a:graphicData uri="http://schemas.openxmlformats.org/drawingml/2006/table">
@@ -20915,6 +25823,217 @@
                           <a:cs typeface="Segoe UI" pitchFamily="34" charset="-120"/>
                         </a:rPr>
                         <a:t>Αρχεία &amp; φάκελοι</a:t>
+                      </a:r>
+                      <a:endParaRPr lang="en-US" sz="1250" dirty="0">
+                        <a:latin typeface="Segoe UI" charset="0"/>
+                        <a:ea typeface="Segoe UI" charset="0"/>
+                        <a:cs typeface="Segoe UI" charset="0"/>
+                      </a:endParaRPr>
+                    </a:p>
+                  </a:txBody>
+                  <a:tcPr anchor="ctr">
+                    <a:lnL w="9525" cap="flat" cmpd="sng" algn="ctr">
+                      <a:solidFill>
+                        <a:srgbClr val="D3D9E4"/>
+                      </a:solidFill>
+                      <a:prstDash val="solid"/>
+                      <a:round/>
+                      <a:headEnd type="none" w="med" len="med"/>
+                      <a:tailEnd type="none" w="med" len="med"/>
+                    </a:lnL>
+                    <a:lnR w="9525" cap="flat" cmpd="sng" algn="ctr">
+                      <a:solidFill>
+                        <a:srgbClr val="D3D9E4"/>
+                      </a:solidFill>
+                      <a:prstDash val="solid"/>
+                      <a:round/>
+                      <a:headEnd type="none" w="med" len="med"/>
+                      <a:tailEnd type="none" w="med" len="med"/>
+                    </a:lnR>
+                    <a:lnT w="9525" cap="flat" cmpd="sng" algn="ctr">
+                      <a:solidFill>
+                        <a:srgbClr val="D3D9E4"/>
+                      </a:solidFill>
+                      <a:prstDash val="solid"/>
+                      <a:round/>
+                      <a:headEnd type="none" w="med" len="med"/>
+                      <a:tailEnd type="none" w="med" len="med"/>
+                    </a:lnT>
+                    <a:lnB w="9525" cap="flat" cmpd="sng" algn="ctr">
+                      <a:solidFill>
+                        <a:srgbClr val="D3D9E4"/>
+                      </a:solidFill>
+                      <a:prstDash val="solid"/>
+                      <a:round/>
+                      <a:headEnd type="none" w="med" len="med"/>
+                      <a:tailEnd type="none" w="med" len="med"/>
+                    </a:lnB>
+                    <a:solidFill>
+                      <a:srgbClr val="FBFCFE"/>
+                    </a:solidFill>
+                  </a:tcPr>
+                </a:tc>
+                <a:extLst>
+                  <a:ext uri="{0D108BD9-81ED-4DB2-BD59-A6C34878D82A}">
+                    <a16:rowId xmlns:a16="http://schemas.microsoft.com/office/drawing/2014/main" val="10005"/>
+                  </a:ext>
+                </a:extLst>
+              </a:tr>
+              <a:tr h="438912">
+                <a:tc>
+                  <a:txBody>
+                    <a:bodyPr/>
+                    <a:lstStyle/>
+                    <a:p>
+                      <a:pPr marL="0" indent="0">
+                        <a:buNone/>
+                      </a:pPr>
+                      <a:r>
+                        <a:rPr lang="en-US" sz="1250" b="1" dirty="0">
+                          <a:solidFill>
+                            <a:srgbClr val="2F4BD8"/>
+                          </a:solidFill>
+                          <a:latin typeface="Consolas" pitchFamily="34" charset="0"/>
+                          <a:ea typeface="Consolas" pitchFamily="34" charset="-122"/>
+                          <a:cs typeface="Consolas" pitchFamily="34" charset="-120"/>
+                        </a:rPr>
+                        <a:t>στ</a:t>
+                      </a:r>
+                      <a:endParaRPr lang="en-US" sz="1250" dirty="0">
+                        <a:latin typeface="Consolas" charset="0"/>
+                        <a:ea typeface="Consolas" charset="0"/>
+                        <a:cs typeface="Consolas" charset="0"/>
+                      </a:endParaRPr>
+                    </a:p>
+                  </a:txBody>
+                  <a:tcPr anchor="ctr">
+                    <a:lnL w="9525" cap="flat" cmpd="sng" algn="ctr">
+                      <a:solidFill>
+                        <a:srgbClr val="D3D9E4"/>
+                      </a:solidFill>
+                      <a:prstDash val="solid"/>
+                      <a:round/>
+                      <a:headEnd type="none" w="med" len="med"/>
+                      <a:tailEnd type="none" w="med" len="med"/>
+                    </a:lnL>
+                    <a:lnR w="9525" cap="flat" cmpd="sng" algn="ctr">
+                      <a:solidFill>
+                        <a:srgbClr val="D3D9E4"/>
+                      </a:solidFill>
+                      <a:prstDash val="solid"/>
+                      <a:round/>
+                      <a:headEnd type="none" w="med" len="med"/>
+                      <a:tailEnd type="none" w="med" len="med"/>
+                    </a:lnR>
+                    <a:lnT w="9525" cap="flat" cmpd="sng" algn="ctr">
+                      <a:solidFill>
+                        <a:srgbClr val="D3D9E4"/>
+                      </a:solidFill>
+                      <a:prstDash val="solid"/>
+                      <a:round/>
+                      <a:headEnd type="none" w="med" len="med"/>
+                      <a:tailEnd type="none" w="med" len="med"/>
+                    </a:lnT>
+                    <a:lnB w="9525" cap="flat" cmpd="sng" algn="ctr">
+                      <a:solidFill>
+                        <a:srgbClr val="D3D9E4"/>
+                      </a:solidFill>
+                      <a:prstDash val="solid"/>
+                      <a:round/>
+                      <a:headEnd type="none" w="med" len="med"/>
+                      <a:tailEnd type="none" w="med" len="med"/>
+                    </a:lnB>
+                    <a:solidFill>
+                      <a:srgbClr val="FBFCFE"/>
+                    </a:solidFill>
+                  </a:tcPr>
+                </a:tc>
+                <a:tc>
+                  <a:txBody>
+                    <a:bodyPr/>
+                    <a:lstStyle/>
+                    <a:p>
+                      <a:pPr marL="0" indent="0">
+                        <a:buNone/>
+                      </a:pPr>
+                      <a:r>
+                        <a:rPr lang="en-US" sz="1250" dirty="0">
+                          <a:solidFill>
+                            <a:srgbClr val="171B26"/>
+                          </a:solidFill>
+                          <a:latin typeface="Segoe UI" pitchFamily="34" charset="0"/>
+                          <a:ea typeface="Segoe UI" pitchFamily="34" charset="-122"/>
+                          <a:cs typeface="Segoe UI" pitchFamily="34" charset="-120"/>
+                        </a:rPr>
+                        <a:t>Κάνεις διπλό κλικ σε ένα εικονίδιο και ανοίγει παράθυρο.</a:t>
+                      </a:r>
+                      <a:endParaRPr lang="en-US" sz="1250" dirty="0">
+                        <a:latin typeface="Segoe UI" charset="0"/>
+                        <a:ea typeface="Segoe UI" charset="0"/>
+                        <a:cs typeface="Segoe UI" charset="0"/>
+                      </a:endParaRPr>
+                    </a:p>
+                  </a:txBody>
+                  <a:tcPr anchor="ctr">
+                    <a:lnL w="9525" cap="flat" cmpd="sng" algn="ctr">
+                      <a:solidFill>
+                        <a:srgbClr val="D3D9E4"/>
+                      </a:solidFill>
+                      <a:prstDash val="solid"/>
+                      <a:round/>
+                      <a:headEnd type="none" w="med" len="med"/>
+                      <a:tailEnd type="none" w="med" len="med"/>
+                    </a:lnL>
+                    <a:lnR w="9525" cap="flat" cmpd="sng" algn="ctr">
+                      <a:solidFill>
+                        <a:srgbClr val="D3D9E4"/>
+                      </a:solidFill>
+                      <a:prstDash val="solid"/>
+                      <a:round/>
+                      <a:headEnd type="none" w="med" len="med"/>
+                      <a:tailEnd type="none" w="med" len="med"/>
+                    </a:lnR>
+                    <a:lnT w="9525" cap="flat" cmpd="sng" algn="ctr">
+                      <a:solidFill>
+                        <a:srgbClr val="D3D9E4"/>
+                      </a:solidFill>
+                      <a:prstDash val="solid"/>
+                      <a:round/>
+                      <a:headEnd type="none" w="med" len="med"/>
+                      <a:tailEnd type="none" w="med" len="med"/>
+                    </a:lnT>
+                    <a:lnB w="9525" cap="flat" cmpd="sng" algn="ctr">
+                      <a:solidFill>
+                        <a:srgbClr val="D3D9E4"/>
+                      </a:solidFill>
+                      <a:prstDash val="solid"/>
+                      <a:round/>
+                      <a:headEnd type="none" w="med" len="med"/>
+                      <a:tailEnd type="none" w="med" len="med"/>
+                    </a:lnB>
+                    <a:solidFill>
+                      <a:srgbClr val="FBFCFE"/>
+                    </a:solidFill>
+                  </a:tcPr>
+                </a:tc>
+                <a:tc>
+                  <a:txBody>
+                    <a:bodyPr/>
+                    <a:lstStyle/>
+                    <a:p>
+                      <a:pPr marL="0" indent="0">
+                        <a:buNone/>
+                      </a:pPr>
+                      <a:r>
+                        <a:rPr lang="en-US" sz="1250" b="1" dirty="0">
+                          <a:solidFill>
+                            <a:srgbClr val="171B26"/>
+                          </a:solidFill>
+                          <a:latin typeface="Segoe UI" pitchFamily="34" charset="0"/>
+                          <a:ea typeface="Segoe UI" pitchFamily="34" charset="-122"/>
+                          <a:cs typeface="Segoe UI" pitchFamily="34" charset="-120"/>
+                        </a:rPr>
+                        <a:t>Διεπαφή χρήστη (GUI)</a:t>
                       </a:r>
                       <a:endParaRPr lang="en-US" sz="1250" dirty="0">
                         <a:latin typeface="Segoe UI" charset="0"/>
